--- a/Bus Booking Analytics System (PowerBI)/documents/Bus_Booking_Analytics_PowerBI.pptx
+++ b/Bus Booking Analytics System (PowerBI)/documents/Bus_Booking_Analytics_PowerBI.pptx
@@ -3188,6 +3188,18 @@
       </p:sp>
     </p:spTree>
   </p:cSld>
+  <mc:AlternateContent xmlns:mc="http://schemas.openxmlformats.org/markup-compatibility/2006">
+    <mc:Choice xmlns:p14="http://schemas.microsoft.com/office/powerpoint/2010/main" Requires="p14">
+      <p:transition spd="slow">
+        <p:fade/>
+      </p:transition>
+    </mc:Choice>
+    <mc:Fallback>
+      <p:transition spd="slow">
+        <p:fade/>
+      </p:transition>
+    </mc:Fallback>
+  </mc:AlternateContent>
   <p:clrMapOvr>
     <a:masterClrMapping/>
   </p:clrMapOvr>
@@ -3634,6 +3646,18 @@
       </p:sp>
     </p:spTree>
   </p:cSld>
+  <mc:AlternateContent xmlns:mc="http://schemas.openxmlformats.org/markup-compatibility/2006">
+    <mc:Choice xmlns:p14="http://schemas.microsoft.com/office/powerpoint/2010/main" Requires="p14">
+      <p:transition spd="slow">
+        <p:fade/>
+      </p:transition>
+    </mc:Choice>
+    <mc:Fallback>
+      <p:transition spd="slow">
+        <p:fade/>
+      </p:transition>
+    </mc:Fallback>
+  </mc:AlternateContent>
   <p:clrMapOvr>
     <a:masterClrMapping/>
   </p:clrMapOvr>
@@ -4080,6 +4104,18 @@
       </p:sp>
     </p:spTree>
   </p:cSld>
+  <mc:AlternateContent xmlns:mc="http://schemas.openxmlformats.org/markup-compatibility/2006">
+    <mc:Choice xmlns:p14="http://schemas.microsoft.com/office/powerpoint/2010/main" Requires="p14">
+      <p:transition spd="slow">
+        <p:fade/>
+      </p:transition>
+    </mc:Choice>
+    <mc:Fallback>
+      <p:transition spd="slow">
+        <p:fade/>
+      </p:transition>
+    </mc:Fallback>
+  </mc:AlternateContent>
   <p:clrMapOvr>
     <a:masterClrMapping/>
   </p:clrMapOvr>
@@ -4526,6 +4562,18 @@
       </p:sp>
     </p:spTree>
   </p:cSld>
+  <mc:AlternateContent xmlns:mc="http://schemas.openxmlformats.org/markup-compatibility/2006">
+    <mc:Choice xmlns:p14="http://schemas.microsoft.com/office/powerpoint/2010/main" Requires="p14">
+      <p:transition spd="slow">
+        <p:fade/>
+      </p:transition>
+    </mc:Choice>
+    <mc:Fallback>
+      <p:transition spd="slow">
+        <p:fade/>
+      </p:transition>
+    </mc:Fallback>
+  </mc:AlternateContent>
   <p:clrMapOvr>
     <a:masterClrMapping/>
   </p:clrMapOvr>
@@ -4972,6 +5020,18 @@
       </p:sp>
     </p:spTree>
   </p:cSld>
+  <mc:AlternateContent xmlns:mc="http://schemas.openxmlformats.org/markup-compatibility/2006">
+    <mc:Choice xmlns:p14="http://schemas.microsoft.com/office/powerpoint/2010/main" Requires="p14">
+      <p:transition spd="slow">
+        <p:fade/>
+      </p:transition>
+    </mc:Choice>
+    <mc:Fallback>
+      <p:transition spd="slow">
+        <p:fade/>
+      </p:transition>
+    </mc:Fallback>
+  </mc:AlternateContent>
   <p:clrMapOvr>
     <a:masterClrMapping/>
   </p:clrMapOvr>
@@ -5418,6 +5478,18 @@
       </p:sp>
     </p:spTree>
   </p:cSld>
+  <mc:AlternateContent xmlns:mc="http://schemas.openxmlformats.org/markup-compatibility/2006">
+    <mc:Choice xmlns:p14="http://schemas.microsoft.com/office/powerpoint/2010/main" Requires="p14">
+      <p:transition spd="slow">
+        <p:fade/>
+      </p:transition>
+    </mc:Choice>
+    <mc:Fallback>
+      <p:transition spd="slow">
+        <p:fade/>
+      </p:transition>
+    </mc:Fallback>
+  </mc:AlternateContent>
   <p:clrMapOvr>
     <a:masterClrMapping/>
   </p:clrMapOvr>
@@ -5789,6 +5861,18 @@
       </p:sp>
     </p:spTree>
   </p:cSld>
+  <mc:AlternateContent xmlns:mc="http://schemas.openxmlformats.org/markup-compatibility/2006">
+    <mc:Choice xmlns:p14="http://schemas.microsoft.com/office/powerpoint/2010/main" Requires="p14">
+      <p:transition spd="slow">
+        <p:fade/>
+      </p:transition>
+    </mc:Choice>
+    <mc:Fallback>
+      <p:transition spd="slow">
+        <p:fade/>
+      </p:transition>
+    </mc:Fallback>
+  </mc:AlternateContent>
   <p:clrMapOvr>
     <a:masterClrMapping/>
   </p:clrMapOvr>

--- a/Bus Booking Analytics System (PowerBI)/documents/Bus_Booking_Analytics_PowerBI.pptx
+++ b/Bus Booking Analytics System (PowerBI)/documents/Bus_Booking_Analytics_PowerBI.pptx
@@ -12,6 +12,14 @@
     <p:sldId id="260" r:id="rId11"/>
     <p:sldId id="261" r:id="rId12"/>
     <p:sldId id="262" r:id="rId13"/>
+    <p:sldId id="263" r:id="rId14"/>
+    <p:sldId id="264" r:id="rId15"/>
+    <p:sldId id="265" r:id="rId16"/>
+    <p:sldId id="266" r:id="rId17"/>
+    <p:sldId id="267" r:id="rId18"/>
+    <p:sldId id="268" r:id="rId19"/>
+    <p:sldId id="269" r:id="rId20"/>
+    <p:sldId id="270" r:id="rId21"/>
   </p:sldIdLst>
   <p:sldSz cx="12188952" cy="6858000" type="screen4x3"/>
   <p:notesSz cx="6858000" cy="9144000"/>
@@ -3090,7 +3098,7 @@
     <p:bg>
       <p:bgPr>
         <a:solidFill>
-          <a:srgbClr val="0F172A"/>
+          <a:srgbClr val="FFFFFF"/>
         </a:solidFill>
         <a:effectLst/>
       </p:bgPr>
@@ -3110,8 +3118,8 @@
         </p:nvSpPr>
         <p:spPr>
           <a:xfrm>
-            <a:off x="914400" y="2011680"/>
-            <a:ext cx="10360152" cy="2743200"/>
+            <a:off x="1097280" y="2468880"/>
+            <a:ext cx="10058400" cy="978408"/>
           </a:xfrm>
           <a:prstGeom prst="rect">
             <a:avLst/>
@@ -3125,9 +3133,6 @@
           <a:lstStyle/>
           <a:p>
             <a:pPr>
-              <a:spcAft>
-                <a:spcPts val="2000"/>
-              </a:spcAft>
               <a:defRPr sz="1400" b="1">
                 <a:solidFill>
                   <a:srgbClr val="06B6D4"/>
@@ -3136,7 +3141,1533 @@
               </a:defRPr>
             </a:pPr>
             <a:r>
-              <a:t>BUSINESS INTELLIGENCE PRESENTATION</a:t>
+              <a:t>POWER BI ANALYTICS SYSTEM</a:t>
+            </a:r>
+          </a:p>
+        </p:txBody>
+      </p:sp>
+      <p:sp>
+        <p:nvSpPr>
+          <p:cNvPr id="3" name="TextBox 2"/>
+          <p:cNvSpPr txBox="1"/>
+          <p:nvPr/>
+        </p:nvSpPr>
+        <p:spPr>
+          <a:xfrm>
+            <a:off x="1097280" y="3108960"/>
+            <a:ext cx="10058400" cy="1097280"/>
+          </a:xfrm>
+          <a:prstGeom prst="rect">
+            <a:avLst/>
+          </a:prstGeom>
+          <a:noFill/>
+        </p:spPr>
+        <p:txBody>
+          <a:bodyPr wrap="square">
+            <a:spAutoFit/>
+          </a:bodyPr>
+          <a:lstStyle/>
+          <a:p>
+            <a:pPr>
+              <a:defRPr sz="4000" b="1">
+                <a:solidFill>
+                  <a:srgbClr val="054A75"/>
+                </a:solidFill>
+                <a:latin typeface="Segoe UI"/>
+              </a:defRPr>
+            </a:pPr>
+            <a:r>
+              <a:t>Bus Fleet Dispatch &amp; Yield Analysis</a:t>
+            </a:r>
+          </a:p>
+        </p:txBody>
+      </p:sp>
+      <p:sp>
+        <p:nvSpPr>
+          <p:cNvPr id="4" name="TextBox 3"/>
+          <p:cNvSpPr txBox="1"/>
+          <p:nvPr/>
+        </p:nvSpPr>
+        <p:spPr>
+          <a:xfrm>
+            <a:off x="1097280" y="4389120"/>
+            <a:ext cx="10058400" cy="548640"/>
+          </a:xfrm>
+          <a:prstGeom prst="rect">
+            <a:avLst/>
+          </a:prstGeom>
+          <a:noFill/>
+        </p:spPr>
+        <p:txBody>
+          <a:bodyPr wrap="none">
+            <a:spAutoFit/>
+          </a:bodyPr>
+          <a:lstStyle/>
+          <a:p>
+            <a:pPr>
+              <a:defRPr sz="1800">
+                <a:solidFill>
+                  <a:srgbClr val="334155"/>
+                </a:solidFill>
+                <a:latin typeface="Segoe UI"/>
+              </a:defRPr>
+            </a:pPr>
+            <a:r>
+              <a:t>End-to-End Relational MySQL Preprocessing &amp; Dashboard Reporting</a:t>
+            </a:r>
+          </a:p>
+        </p:txBody>
+      </p:sp>
+      <p:sp>
+        <p:nvSpPr>
+          <p:cNvPr id="5" name="TextBox 4"/>
+          <p:cNvSpPr txBox="1"/>
+          <p:nvPr/>
+        </p:nvSpPr>
+        <p:spPr>
+          <a:xfrm>
+            <a:off x="1097280" y="5120640"/>
+            <a:ext cx="10058400" cy="731520"/>
+          </a:xfrm>
+          <a:prstGeom prst="rect">
+            <a:avLst/>
+          </a:prstGeom>
+          <a:noFill/>
+        </p:spPr>
+        <p:txBody>
+          <a:bodyPr wrap="none">
+            <a:spAutoFit/>
+          </a:bodyPr>
+          <a:lstStyle/>
+          <a:p>
+            <a:pPr>
+              <a:defRPr sz="1200" b="1">
+                <a:solidFill>
+                  <a:srgbClr val="64748B"/>
+                </a:solidFill>
+                <a:latin typeface="Segoe UI"/>
+              </a:defRPr>
+            </a:pPr>
+            <a:r>
+              <a:t>Submitted by: Harish, Harini, Gururaj Shetty  |  Revature Data Analytics Phase 2</a:t>
+            </a:r>
+            <a:br/>
+            <a:r>
+              <a:t>Phase 2 Final Project  |  Database Normalization &amp; Visualizations</a:t>
+            </a:r>
+          </a:p>
+        </p:txBody>
+      </p:sp>
+    </p:spTree>
+  </p:cSld>
+  <mc:AlternateContent xmlns:mc="http://schemas.openxmlformats.org/markup-compatibility/2006">
+    <mc:Choice xmlns:p14="http://schemas.microsoft.com/office/powerpoint/2010/main" Requires="p14">
+      <p:transition spd="slow">
+        <p:fade/>
+      </p:transition>
+    </mc:Choice>
+    <mc:Fallback>
+      <p:transition spd="slow">
+        <p:fade/>
+      </p:transition>
+    </mc:Fallback>
+  </mc:AlternateContent>
+  <p:clrMapOvr>
+    <a:masterClrMapping/>
+  </p:clrMapOvr>
+</p:sld>
+</file>
+
+<file path=ppt/slides/slide10.xml><?xml version="1.0" encoding="utf-8"?>
+<p:sld xmlns:a="http://schemas.openxmlformats.org/drawingml/2006/main" xmlns:p="http://schemas.openxmlformats.org/presentationml/2006/main" xmlns:r="http://schemas.openxmlformats.org/officeDocument/2006/relationships">
+  <p:cSld>
+    <p:bg>
+      <p:bgPr>
+        <a:solidFill>
+          <a:srgbClr val="FFFFFF"/>
+        </a:solidFill>
+        <a:effectLst/>
+      </p:bgPr>
+    </p:bg>
+    <p:spTree>
+      <p:nvGrpSpPr>
+        <p:cNvPr id="1" name=""/>
+        <p:cNvGrpSpPr/>
+        <p:nvPr/>
+      </p:nvGrpSpPr>
+      <p:grpSpPr/>
+      <p:sp>
+        <p:nvSpPr>
+          <p:cNvPr id="2" name="TextBox 1"/>
+          <p:cNvSpPr txBox="1"/>
+          <p:nvPr/>
+        </p:nvSpPr>
+        <p:spPr>
+          <a:xfrm>
+            <a:off x="548640" y="365760"/>
+            <a:ext cx="1371600" cy="822960"/>
+          </a:xfrm>
+          <a:prstGeom prst="rect">
+            <a:avLst/>
+          </a:prstGeom>
+          <a:noFill/>
+        </p:spPr>
+        <p:txBody>
+          <a:bodyPr wrap="none">
+            <a:spAutoFit/>
+          </a:bodyPr>
+          <a:lstStyle/>
+          <a:p>
+            <a:pPr>
+              <a:defRPr sz="3800" b="1">
+                <a:solidFill>
+                  <a:srgbClr val="06B6D4"/>
+                </a:solidFill>
+                <a:latin typeface="Segoe UI"/>
+              </a:defRPr>
+            </a:pPr>
+            <a:r>
+              <a:t>09</a:t>
+            </a:r>
+          </a:p>
+        </p:txBody>
+      </p:sp>
+      <p:sp>
+        <p:nvSpPr>
+          <p:cNvPr id="3" name="TextBox 2"/>
+          <p:cNvSpPr txBox="1"/>
+          <p:nvPr/>
+        </p:nvSpPr>
+        <p:spPr>
+          <a:xfrm>
+            <a:off x="548640" y="1280160"/>
+            <a:ext cx="3657600" cy="36576"/>
+          </a:xfrm>
+          <a:prstGeom prst="rect">
+            <a:avLst/>
+          </a:prstGeom>
+          <a:noFill/>
+        </p:spPr>
+        <p:txBody>
+          <a:bodyPr wrap="none">
+            <a:spAutoFit/>
+          </a:bodyPr>
+          <a:lstStyle/>
+          <a:p/>
+        </p:txBody>
+      </p:sp>
+      <p:sp>
+        <p:nvSpPr>
+          <p:cNvPr id="4" name="TextBox 3"/>
+          <p:cNvSpPr txBox="1"/>
+          <p:nvPr/>
+        </p:nvSpPr>
+        <p:spPr>
+          <a:xfrm>
+            <a:off x="548640" y="1417320"/>
+            <a:ext cx="8229600" cy="640080"/>
+          </a:xfrm>
+          <a:prstGeom prst="rect">
+            <a:avLst/>
+          </a:prstGeom>
+          <a:noFill/>
+        </p:spPr>
+        <p:txBody>
+          <a:bodyPr wrap="square">
+            <a:spAutoFit/>
+          </a:bodyPr>
+          <a:lstStyle/>
+          <a:p>
+            <a:pPr>
+              <a:defRPr sz="2400" b="1">
+                <a:solidFill>
+                  <a:srgbClr val="054A75"/>
+                </a:solidFill>
+                <a:latin typeface="Segoe UI"/>
+              </a:defRPr>
+            </a:pPr>
+            <a:r>
+              <a:t>Customer Profiles &amp; Cohort Retention (Page 4)</a:t>
+            </a:r>
+          </a:p>
+        </p:txBody>
+      </p:sp>
+      <p:sp>
+        <p:nvSpPr>
+          <p:cNvPr id="5" name="TextBox 4"/>
+          <p:cNvSpPr txBox="1"/>
+          <p:nvPr/>
+        </p:nvSpPr>
+        <p:spPr>
+          <a:xfrm>
+            <a:off x="365760" y="6309360"/>
+            <a:ext cx="1371600" cy="365760"/>
+          </a:xfrm>
+          <a:prstGeom prst="rect">
+            <a:avLst/>
+          </a:prstGeom>
+          <a:noFill/>
+        </p:spPr>
+        <p:txBody>
+          <a:bodyPr wrap="none">
+            <a:spAutoFit/>
+          </a:bodyPr>
+          <a:lstStyle/>
+          <a:p>
+            <a:pPr>
+              <a:defRPr sz="1100">
+                <a:solidFill>
+                  <a:srgbClr val="64748B"/>
+                </a:solidFill>
+                <a:latin typeface="Segoe UI"/>
+              </a:defRPr>
+            </a:pPr>
+            <a:r>
+              <a:t>10 / 14</a:t>
+            </a:r>
+          </a:p>
+        </p:txBody>
+      </p:sp>
+      <p:sp>
+        <p:nvSpPr>
+          <p:cNvPr id="6" name="TextBox 5"/>
+          <p:cNvSpPr txBox="1"/>
+          <p:nvPr/>
+        </p:nvSpPr>
+        <p:spPr>
+          <a:xfrm>
+            <a:off x="557784" y="2377440"/>
+            <a:ext cx="5303520" cy="3657600"/>
+          </a:xfrm>
+          <a:prstGeom prst="rect">
+            <a:avLst/>
+          </a:prstGeom>
+          <a:noFill/>
+        </p:spPr>
+        <p:txBody>
+          <a:bodyPr wrap="square">
+            <a:spAutoFit/>
+          </a:bodyPr>
+          <a:lstStyle/>
+          <a:p>
+            <a:pPr>
+              <a:spcAft>
+                <a:spcPts val="1500"/>
+              </a:spcAft>
+              <a:defRPr sz="1500" b="1">
+                <a:solidFill>
+                  <a:srgbClr val="06B6D4"/>
+                </a:solidFill>
+                <a:latin typeface="Segoe UI"/>
+              </a:defRPr>
+            </a:pPr>
+            <a:r>
+              <a:t>COHORT LOYALTY &amp; BRACKETS</a:t>
+            </a:r>
+          </a:p>
+          <a:p>
+            <a:pPr>
+              <a:spcAft>
+                <a:spcPts val="1200"/>
+              </a:spcAft>
+              <a:defRPr sz="1150">
+                <a:solidFill>
+                  <a:srgbClr val="334155"/>
+                </a:solidFill>
+                <a:latin typeface="Segoe UI"/>
+              </a:defRPr>
+            </a:pPr>
+            <a:r>
+              <a:t>◆  Gauges customer retention rate at 75.0% vs. 80.0% corporate target.</a:t>
+            </a:r>
+          </a:p>
+          <a:p>
+            <a:pPr>
+              <a:spcAft>
+                <a:spcPts val="1200"/>
+              </a:spcAft>
+              <a:defRPr sz="1150">
+                <a:solidFill>
+                  <a:srgbClr val="334155"/>
+                </a:solidFill>
+                <a:latin typeface="Segoe UI"/>
+              </a:defRPr>
+            </a:pPr>
+            <a:r>
+              <a:t>◆  Unique customer base sizing tracks 294 distinct users.</a:t>
+            </a:r>
+          </a:p>
+          <a:p>
+            <a:pPr>
+              <a:spcAft>
+                <a:spcPts val="1200"/>
+              </a:spcAft>
+              <a:defRPr sz="1150">
+                <a:solidFill>
+                  <a:srgbClr val="334155"/>
+                </a:solidFill>
+                <a:latin typeface="Segoe UI"/>
+              </a:defRPr>
+            </a:pPr>
+            <a:r>
+              <a:t>◆  Age group split lists Age 25-45 and 45+ as driving 90%+ of ticket volume.</a:t>
+            </a:r>
+          </a:p>
+          <a:p>
+            <a:pPr>
+              <a:spcAft>
+                <a:spcPts val="1200"/>
+              </a:spcAft>
+              <a:defRPr sz="1150">
+                <a:solidFill>
+                  <a:srgbClr val="334155"/>
+                </a:solidFill>
+                <a:latin typeface="Segoe UI"/>
+              </a:defRPr>
+            </a:pPr>
+            <a:r>
+              <a:t>◆  Average lifetime spend per customer stands at $30.27K with 35.31 average bookings.</a:t>
+            </a:r>
+          </a:p>
+        </p:txBody>
+      </p:sp>
+      <p:pic>
+        <p:nvPicPr>
+          <p:cNvPr id="7" name="Picture 6" descr="Screenshot 2026-07-16 005322.png"/>
+          <p:cNvPicPr>
+            <a:picLocks noChangeAspect="1"/>
+          </p:cNvPicPr>
+          <p:nvPr/>
+        </p:nvPicPr>
+        <p:blipFill>
+          <a:blip r:embed="rId2"/>
+          <a:stretch>
+            <a:fillRect/>
+          </a:stretch>
+        </p:blipFill>
+        <p:spPr>
+          <a:xfrm>
+            <a:off x="6409944" y="2286000"/>
+            <a:ext cx="5212080" cy="2926080"/>
+          </a:xfrm>
+          <a:prstGeom prst="rect">
+            <a:avLst/>
+          </a:prstGeom>
+        </p:spPr>
+      </p:pic>
+    </p:spTree>
+  </p:cSld>
+  <mc:AlternateContent xmlns:mc="http://schemas.openxmlformats.org/markup-compatibility/2006">
+    <mc:Choice xmlns:p14="http://schemas.microsoft.com/office/powerpoint/2010/main" Requires="p14">
+      <p:transition spd="slow">
+        <p:push dir="l"/>
+      </p:transition>
+    </mc:Choice>
+    <mc:Fallback>
+      <p:transition spd="slow">
+        <p:push dir="l"/>
+      </p:transition>
+    </mc:Fallback>
+  </mc:AlternateContent>
+  <p:clrMapOvr>
+    <a:masterClrMapping/>
+  </p:clrMapOvr>
+</p:sld>
+</file>
+
+<file path=ppt/slides/slide11.xml><?xml version="1.0" encoding="utf-8"?>
+<p:sld xmlns:a="http://schemas.openxmlformats.org/drawingml/2006/main" xmlns:p="http://schemas.openxmlformats.org/presentationml/2006/main" xmlns:r="http://schemas.openxmlformats.org/officeDocument/2006/relationships">
+  <p:cSld>
+    <p:bg>
+      <p:bgPr>
+        <a:solidFill>
+          <a:srgbClr val="FFFFFF"/>
+        </a:solidFill>
+        <a:effectLst/>
+      </p:bgPr>
+    </p:bg>
+    <p:spTree>
+      <p:nvGrpSpPr>
+        <p:cNvPr id="1" name=""/>
+        <p:cNvGrpSpPr/>
+        <p:nvPr/>
+      </p:nvGrpSpPr>
+      <p:grpSpPr/>
+      <p:sp>
+        <p:nvSpPr>
+          <p:cNvPr id="2" name="TextBox 1"/>
+          <p:cNvSpPr txBox="1"/>
+          <p:nvPr/>
+        </p:nvSpPr>
+        <p:spPr>
+          <a:xfrm>
+            <a:off x="548640" y="365760"/>
+            <a:ext cx="1371600" cy="822960"/>
+          </a:xfrm>
+          <a:prstGeom prst="rect">
+            <a:avLst/>
+          </a:prstGeom>
+          <a:noFill/>
+        </p:spPr>
+        <p:txBody>
+          <a:bodyPr wrap="none">
+            <a:spAutoFit/>
+          </a:bodyPr>
+          <a:lstStyle/>
+          <a:p>
+            <a:pPr>
+              <a:defRPr sz="3800" b="1">
+                <a:solidFill>
+                  <a:srgbClr val="06B6D4"/>
+                </a:solidFill>
+                <a:latin typeface="Segoe UI"/>
+              </a:defRPr>
+            </a:pPr>
+            <a:r>
+              <a:t>10</a:t>
+            </a:r>
+          </a:p>
+        </p:txBody>
+      </p:sp>
+      <p:sp>
+        <p:nvSpPr>
+          <p:cNvPr id="3" name="TextBox 2"/>
+          <p:cNvSpPr txBox="1"/>
+          <p:nvPr/>
+        </p:nvSpPr>
+        <p:spPr>
+          <a:xfrm>
+            <a:off x="548640" y="1280160"/>
+            <a:ext cx="3657600" cy="36576"/>
+          </a:xfrm>
+          <a:prstGeom prst="rect">
+            <a:avLst/>
+          </a:prstGeom>
+          <a:noFill/>
+        </p:spPr>
+        <p:txBody>
+          <a:bodyPr wrap="none">
+            <a:spAutoFit/>
+          </a:bodyPr>
+          <a:lstStyle/>
+          <a:p/>
+        </p:txBody>
+      </p:sp>
+      <p:sp>
+        <p:nvSpPr>
+          <p:cNvPr id="4" name="TextBox 3"/>
+          <p:cNvSpPr txBox="1"/>
+          <p:nvPr/>
+        </p:nvSpPr>
+        <p:spPr>
+          <a:xfrm>
+            <a:off x="548640" y="1417320"/>
+            <a:ext cx="8229600" cy="640080"/>
+          </a:xfrm>
+          <a:prstGeom prst="rect">
+            <a:avLst/>
+          </a:prstGeom>
+          <a:noFill/>
+        </p:spPr>
+        <p:txBody>
+          <a:bodyPr wrap="square">
+            <a:spAutoFit/>
+          </a:bodyPr>
+          <a:lstStyle/>
+          <a:p>
+            <a:pPr>
+              <a:defRPr sz="2400" b="1">
+                <a:solidFill>
+                  <a:srgbClr val="054A75"/>
+                </a:solidFill>
+                <a:latin typeface="Segoe UI"/>
+              </a:defRPr>
+            </a:pPr>
+            <a:r>
+              <a:t>Fleet Utilization &amp; Seating Capacity (Page 5)</a:t>
+            </a:r>
+          </a:p>
+        </p:txBody>
+      </p:sp>
+      <p:sp>
+        <p:nvSpPr>
+          <p:cNvPr id="5" name="TextBox 4"/>
+          <p:cNvSpPr txBox="1"/>
+          <p:nvPr/>
+        </p:nvSpPr>
+        <p:spPr>
+          <a:xfrm>
+            <a:off x="365760" y="6309360"/>
+            <a:ext cx="1371600" cy="365760"/>
+          </a:xfrm>
+          <a:prstGeom prst="rect">
+            <a:avLst/>
+          </a:prstGeom>
+          <a:noFill/>
+        </p:spPr>
+        <p:txBody>
+          <a:bodyPr wrap="none">
+            <a:spAutoFit/>
+          </a:bodyPr>
+          <a:lstStyle/>
+          <a:p>
+            <a:pPr>
+              <a:defRPr sz="1100">
+                <a:solidFill>
+                  <a:srgbClr val="64748B"/>
+                </a:solidFill>
+                <a:latin typeface="Segoe UI"/>
+              </a:defRPr>
+            </a:pPr>
+            <a:r>
+              <a:t>11 / 14</a:t>
+            </a:r>
+          </a:p>
+        </p:txBody>
+      </p:sp>
+      <p:sp>
+        <p:nvSpPr>
+          <p:cNvPr id="6" name="TextBox 5"/>
+          <p:cNvSpPr txBox="1"/>
+          <p:nvPr/>
+        </p:nvSpPr>
+        <p:spPr>
+          <a:xfrm>
+            <a:off x="557784" y="2377440"/>
+            <a:ext cx="5303520" cy="3657600"/>
+          </a:xfrm>
+          <a:prstGeom prst="rect">
+            <a:avLst/>
+          </a:prstGeom>
+          <a:noFill/>
+        </p:spPr>
+        <p:txBody>
+          <a:bodyPr wrap="square">
+            <a:spAutoFit/>
+          </a:bodyPr>
+          <a:lstStyle/>
+          <a:p>
+            <a:pPr>
+              <a:spcAft>
+                <a:spcPts val="1500"/>
+              </a:spcAft>
+              <a:defRPr sz="1500" b="1">
+                <a:solidFill>
+                  <a:srgbClr val="06B6D4"/>
+                </a:solidFill>
+                <a:latin typeface="Segoe UI"/>
+              </a:defRPr>
+            </a:pPr>
+            <a:r>
+              <a:t>LOAD FACTORS &amp; ASSETS</a:t>
+            </a:r>
+          </a:p>
+          <a:p>
+            <a:pPr>
+              <a:spcAft>
+                <a:spcPts val="1200"/>
+              </a:spcAft>
+              <a:defRPr sz="1150">
+                <a:solidFill>
+                  <a:srgbClr val="334155"/>
+                </a:solidFill>
+                <a:latin typeface="Segoe UI"/>
+              </a:defRPr>
+            </a:pPr>
+            <a:r>
+              <a:t>◆  Monitors 11 active buses in fleet with a total of 470 seats.</a:t>
+            </a:r>
+          </a:p>
+          <a:p>
+            <a:pPr>
+              <a:spcAft>
+                <a:spcPts val="1200"/>
+              </a:spcAft>
+              <a:defRPr sz="1150">
+                <a:solidFill>
+                  <a:srgbClr val="334155"/>
+                </a:solidFill>
+                <a:latin typeface="Segoe UI"/>
+              </a:defRPr>
+            </a:pPr>
+            <a:r>
+              <a:t>◆  Highlights average fleet load occupancy rate of 51.0%.</a:t>
+            </a:r>
+          </a:p>
+          <a:p>
+            <a:pPr>
+              <a:spcAft>
+                <a:spcPts val="1200"/>
+              </a:spcAft>
+              <a:defRPr sz="1150">
+                <a:solidFill>
+                  <a:srgbClr val="334155"/>
+                </a:solidFill>
+                <a:latin typeface="Segoe UI"/>
+              </a:defRPr>
+            </a:pPr>
+            <a:r>
+              <a:t>◆  Seating Capacity vs Occupied Seats by Bus Type graph shows load factor profiles.</a:t>
+            </a:r>
+          </a:p>
+          <a:p>
+            <a:pPr>
+              <a:spcAft>
+                <a:spcPts val="1200"/>
+              </a:spcAft>
+              <a:defRPr sz="1150">
+                <a:solidFill>
+                  <a:srgbClr val="334155"/>
+                </a:solidFill>
+                <a:latin typeface="Segoe UI"/>
+              </a:defRPr>
+            </a:pPr>
+            <a:r>
+              <a:t>◆  Active fleet asset yield table tracks revenue and occupancy on individual buses.</a:t>
+            </a:r>
+          </a:p>
+        </p:txBody>
+      </p:sp>
+      <p:pic>
+        <p:nvPicPr>
+          <p:cNvPr id="7" name="Picture 6" descr="Screenshot 2026-07-16 005337.png"/>
+          <p:cNvPicPr>
+            <a:picLocks noChangeAspect="1"/>
+          </p:cNvPicPr>
+          <p:nvPr/>
+        </p:nvPicPr>
+        <p:blipFill>
+          <a:blip r:embed="rId2"/>
+          <a:stretch>
+            <a:fillRect/>
+          </a:stretch>
+        </p:blipFill>
+        <p:spPr>
+          <a:xfrm>
+            <a:off x="6409944" y="2286000"/>
+            <a:ext cx="5212080" cy="2926080"/>
+          </a:xfrm>
+          <a:prstGeom prst="rect">
+            <a:avLst/>
+          </a:prstGeom>
+        </p:spPr>
+      </p:pic>
+    </p:spTree>
+  </p:cSld>
+  <mc:AlternateContent xmlns:mc="http://schemas.openxmlformats.org/markup-compatibility/2006">
+    <mc:Choice xmlns:p14="http://schemas.microsoft.com/office/powerpoint/2010/main" Requires="p14">
+      <p:transition spd="slow">
+        <p:fade/>
+      </p:transition>
+    </mc:Choice>
+    <mc:Fallback>
+      <p:transition spd="slow">
+        <p:fade/>
+      </p:transition>
+    </mc:Fallback>
+  </mc:AlternateContent>
+  <p:clrMapOvr>
+    <a:masterClrMapping/>
+  </p:clrMapOvr>
+</p:sld>
+</file>
+
+<file path=ppt/slides/slide12.xml><?xml version="1.0" encoding="utf-8"?>
+<p:sld xmlns:a="http://schemas.openxmlformats.org/drawingml/2006/main" xmlns:p="http://schemas.openxmlformats.org/presentationml/2006/main" xmlns:r="http://schemas.openxmlformats.org/officeDocument/2006/relationships">
+  <p:cSld>
+    <p:bg>
+      <p:bgPr>
+        <a:solidFill>
+          <a:srgbClr val="FFFFFF"/>
+        </a:solidFill>
+        <a:effectLst/>
+      </p:bgPr>
+    </p:bg>
+    <p:spTree>
+      <p:nvGrpSpPr>
+        <p:cNvPr id="1" name=""/>
+        <p:cNvGrpSpPr/>
+        <p:nvPr/>
+      </p:nvGrpSpPr>
+      <p:grpSpPr/>
+      <p:sp>
+        <p:nvSpPr>
+          <p:cNvPr id="2" name="TextBox 1"/>
+          <p:cNvSpPr txBox="1"/>
+          <p:nvPr/>
+        </p:nvSpPr>
+        <p:spPr>
+          <a:xfrm>
+            <a:off x="548640" y="365760"/>
+            <a:ext cx="1371600" cy="822960"/>
+          </a:xfrm>
+          <a:prstGeom prst="rect">
+            <a:avLst/>
+          </a:prstGeom>
+          <a:noFill/>
+        </p:spPr>
+        <p:txBody>
+          <a:bodyPr wrap="none">
+            <a:spAutoFit/>
+          </a:bodyPr>
+          <a:lstStyle/>
+          <a:p>
+            <a:pPr>
+              <a:defRPr sz="3800" b="1">
+                <a:solidFill>
+                  <a:srgbClr val="06B6D4"/>
+                </a:solidFill>
+                <a:latin typeface="Segoe UI"/>
+              </a:defRPr>
+            </a:pPr>
+            <a:r>
+              <a:t>11</a:t>
+            </a:r>
+          </a:p>
+        </p:txBody>
+      </p:sp>
+      <p:sp>
+        <p:nvSpPr>
+          <p:cNvPr id="3" name="TextBox 2"/>
+          <p:cNvSpPr txBox="1"/>
+          <p:nvPr/>
+        </p:nvSpPr>
+        <p:spPr>
+          <a:xfrm>
+            <a:off x="548640" y="1280160"/>
+            <a:ext cx="3657600" cy="36576"/>
+          </a:xfrm>
+          <a:prstGeom prst="rect">
+            <a:avLst/>
+          </a:prstGeom>
+          <a:noFill/>
+        </p:spPr>
+        <p:txBody>
+          <a:bodyPr wrap="none">
+            <a:spAutoFit/>
+          </a:bodyPr>
+          <a:lstStyle/>
+          <a:p/>
+        </p:txBody>
+      </p:sp>
+      <p:sp>
+        <p:nvSpPr>
+          <p:cNvPr id="4" name="TextBox 3"/>
+          <p:cNvSpPr txBox="1"/>
+          <p:nvPr/>
+        </p:nvSpPr>
+        <p:spPr>
+          <a:xfrm>
+            <a:off x="548640" y="1417320"/>
+            <a:ext cx="8229600" cy="640080"/>
+          </a:xfrm>
+          <a:prstGeom prst="rect">
+            <a:avLst/>
+          </a:prstGeom>
+          <a:noFill/>
+        </p:spPr>
+        <p:txBody>
+          <a:bodyPr wrap="square">
+            <a:spAutoFit/>
+          </a:bodyPr>
+          <a:lstStyle/>
+          <a:p>
+            <a:pPr>
+              <a:defRPr sz="2400" b="1">
+                <a:solidFill>
+                  <a:srgbClr val="054A75"/>
+                </a:solidFill>
+                <a:latin typeface="Segoe UI"/>
+              </a:defRPr>
+            </a:pPr>
+            <a:r>
+              <a:t>Route Performance &amp; Market Demands (Page 6)</a:t>
+            </a:r>
+          </a:p>
+        </p:txBody>
+      </p:sp>
+      <p:sp>
+        <p:nvSpPr>
+          <p:cNvPr id="5" name="TextBox 4"/>
+          <p:cNvSpPr txBox="1"/>
+          <p:nvPr/>
+        </p:nvSpPr>
+        <p:spPr>
+          <a:xfrm>
+            <a:off x="365760" y="6309360"/>
+            <a:ext cx="1371600" cy="365760"/>
+          </a:xfrm>
+          <a:prstGeom prst="rect">
+            <a:avLst/>
+          </a:prstGeom>
+          <a:noFill/>
+        </p:spPr>
+        <p:txBody>
+          <a:bodyPr wrap="none">
+            <a:spAutoFit/>
+          </a:bodyPr>
+          <a:lstStyle/>
+          <a:p>
+            <a:pPr>
+              <a:defRPr sz="1100">
+                <a:solidFill>
+                  <a:srgbClr val="64748B"/>
+                </a:solidFill>
+                <a:latin typeface="Segoe UI"/>
+              </a:defRPr>
+            </a:pPr>
+            <a:r>
+              <a:t>12 / 14</a:t>
+            </a:r>
+          </a:p>
+        </p:txBody>
+      </p:sp>
+      <p:sp>
+        <p:nvSpPr>
+          <p:cNvPr id="6" name="TextBox 5"/>
+          <p:cNvSpPr txBox="1"/>
+          <p:nvPr/>
+        </p:nvSpPr>
+        <p:spPr>
+          <a:xfrm>
+            <a:off x="557784" y="2377440"/>
+            <a:ext cx="5303520" cy="3657600"/>
+          </a:xfrm>
+          <a:prstGeom prst="rect">
+            <a:avLst/>
+          </a:prstGeom>
+          <a:noFill/>
+        </p:spPr>
+        <p:txBody>
+          <a:bodyPr wrap="square">
+            <a:spAutoFit/>
+          </a:bodyPr>
+          <a:lstStyle/>
+          <a:p>
+            <a:pPr>
+              <a:spcAft>
+                <a:spcPts val="1500"/>
+              </a:spcAft>
+              <a:defRPr sz="1500" b="1">
+                <a:solidFill>
+                  <a:srgbClr val="06B6D4"/>
+                </a:solidFill>
+                <a:latin typeface="Segoe UI"/>
+              </a:defRPr>
+            </a:pPr>
+            <a:r>
+              <a:t>PASSENGER CORRIDORS &amp; VOLUMES</a:t>
+            </a:r>
+          </a:p>
+          <a:p>
+            <a:pPr>
+              <a:spcAft>
+                <a:spcPts val="1200"/>
+              </a:spcAft>
+              <a:defRPr sz="1150">
+                <a:solidFill>
+                  <a:srgbClr val="334155"/>
+                </a:solidFill>
+                <a:latin typeface="Segoe UI"/>
+              </a:defRPr>
+            </a:pPr>
+            <a:r>
+              <a:t>◆  Monitors city-to-city commuter traffic flows across active routes.</a:t>
+            </a:r>
+          </a:p>
+          <a:p>
+            <a:pPr>
+              <a:spcAft>
+                <a:spcPts val="1200"/>
+              </a:spcAft>
+              <a:defRPr sz="1150">
+                <a:solidFill>
+                  <a:srgbClr val="334155"/>
+                </a:solidFill>
+                <a:latin typeface="Segoe UI"/>
+              </a:defRPr>
+            </a:pPr>
+            <a:r>
+              <a:t>◆  High-density routes like Mumbai-Ahmedabad and Bangalore-Hyderabad represent peak revenue generators.</a:t>
+            </a:r>
+          </a:p>
+          <a:p>
+            <a:pPr>
+              <a:spcAft>
+                <a:spcPts val="1200"/>
+              </a:spcAft>
+              <a:defRPr sz="1150">
+                <a:solidFill>
+                  <a:srgbClr val="334155"/>
+                </a:solidFill>
+                <a:latin typeface="Segoe UI"/>
+              </a:defRPr>
+            </a:pPr>
+            <a:r>
+              <a:t>◆  Average distance traveled scales cleanly with revenue per seat run.</a:t>
+            </a:r>
+          </a:p>
+          <a:p>
+            <a:pPr>
+              <a:spcAft>
+                <a:spcPts val="1200"/>
+              </a:spcAft>
+              <a:defRPr sz="1150">
+                <a:solidFill>
+                  <a:srgbClr val="334155"/>
+                </a:solidFill>
+                <a:latin typeface="Segoe UI"/>
+              </a:defRPr>
+            </a:pPr>
+            <a:r>
+              <a:t>◆  Guides tactical route planning for vehicle redeployment.</a:t>
+            </a:r>
+          </a:p>
+        </p:txBody>
+      </p:sp>
+      <p:pic>
+        <p:nvPicPr>
+          <p:cNvPr id="7" name="Picture 6" descr="Screenshot 2026-07-16 005354.png"/>
+          <p:cNvPicPr>
+            <a:picLocks noChangeAspect="1"/>
+          </p:cNvPicPr>
+          <p:nvPr/>
+        </p:nvPicPr>
+        <p:blipFill>
+          <a:blip r:embed="rId2"/>
+          <a:stretch>
+            <a:fillRect/>
+          </a:stretch>
+        </p:blipFill>
+        <p:spPr>
+          <a:xfrm>
+            <a:off x="6409944" y="2286000"/>
+            <a:ext cx="5212080" cy="2926080"/>
+          </a:xfrm>
+          <a:prstGeom prst="rect">
+            <a:avLst/>
+          </a:prstGeom>
+        </p:spPr>
+      </p:pic>
+    </p:spTree>
+  </p:cSld>
+  <mc:AlternateContent xmlns:mc="http://schemas.openxmlformats.org/markup-compatibility/2006">
+    <mc:Choice xmlns:p14="http://schemas.microsoft.com/office/powerpoint/2010/main" Requires="p14">
+      <p:transition spd="slow">
+        <p:wipe dir="l"/>
+      </p:transition>
+    </mc:Choice>
+    <mc:Fallback>
+      <p:transition spd="slow">
+        <p:wipe dir="l"/>
+      </p:transition>
+    </mc:Fallback>
+  </mc:AlternateContent>
+  <p:clrMapOvr>
+    <a:masterClrMapping/>
+  </p:clrMapOvr>
+</p:sld>
+</file>
+
+<file path=ppt/slides/slide13.xml><?xml version="1.0" encoding="utf-8"?>
+<p:sld xmlns:a="http://schemas.openxmlformats.org/drawingml/2006/main" xmlns:p="http://schemas.openxmlformats.org/presentationml/2006/main" xmlns:r="http://schemas.openxmlformats.org/officeDocument/2006/relationships">
+  <p:cSld>
+    <p:bg>
+      <p:bgPr>
+        <a:solidFill>
+          <a:srgbClr val="FFFFFF"/>
+        </a:solidFill>
+        <a:effectLst/>
+      </p:bgPr>
+    </p:bg>
+    <p:spTree>
+      <p:nvGrpSpPr>
+        <p:cNvPr id="1" name=""/>
+        <p:cNvGrpSpPr/>
+        <p:nvPr/>
+      </p:nvGrpSpPr>
+      <p:grpSpPr/>
+      <p:sp>
+        <p:nvSpPr>
+          <p:cNvPr id="2" name="TextBox 1"/>
+          <p:cNvSpPr txBox="1"/>
+          <p:nvPr/>
+        </p:nvSpPr>
+        <p:spPr>
+          <a:xfrm>
+            <a:off x="548640" y="365760"/>
+            <a:ext cx="1371600" cy="822960"/>
+          </a:xfrm>
+          <a:prstGeom prst="rect">
+            <a:avLst/>
+          </a:prstGeom>
+          <a:noFill/>
+        </p:spPr>
+        <p:txBody>
+          <a:bodyPr wrap="none">
+            <a:spAutoFit/>
+          </a:bodyPr>
+          <a:lstStyle/>
+          <a:p>
+            <a:pPr>
+              <a:defRPr sz="3800" b="1">
+                <a:solidFill>
+                  <a:srgbClr val="06B6D4"/>
+                </a:solidFill>
+                <a:latin typeface="Segoe UI"/>
+              </a:defRPr>
+            </a:pPr>
+            <a:r>
+              <a:t>12</a:t>
+            </a:r>
+          </a:p>
+        </p:txBody>
+      </p:sp>
+      <p:sp>
+        <p:nvSpPr>
+          <p:cNvPr id="3" name="TextBox 2"/>
+          <p:cNvSpPr txBox="1"/>
+          <p:nvPr/>
+        </p:nvSpPr>
+        <p:spPr>
+          <a:xfrm>
+            <a:off x="548640" y="1280160"/>
+            <a:ext cx="3657600" cy="36576"/>
+          </a:xfrm>
+          <a:prstGeom prst="rect">
+            <a:avLst/>
+          </a:prstGeom>
+          <a:noFill/>
+        </p:spPr>
+        <p:txBody>
+          <a:bodyPr wrap="none">
+            <a:spAutoFit/>
+          </a:bodyPr>
+          <a:lstStyle/>
+          <a:p/>
+        </p:txBody>
+      </p:sp>
+      <p:sp>
+        <p:nvSpPr>
+          <p:cNvPr id="4" name="TextBox 3"/>
+          <p:cNvSpPr txBox="1"/>
+          <p:nvPr/>
+        </p:nvSpPr>
+        <p:spPr>
+          <a:xfrm>
+            <a:off x="548640" y="1417320"/>
+            <a:ext cx="8229600" cy="640080"/>
+          </a:xfrm>
+          <a:prstGeom prst="rect">
+            <a:avLst/>
+          </a:prstGeom>
+          <a:noFill/>
+        </p:spPr>
+        <p:txBody>
+          <a:bodyPr wrap="square">
+            <a:spAutoFit/>
+          </a:bodyPr>
+          <a:lstStyle/>
+          <a:p>
+            <a:pPr>
+              <a:defRPr sz="2400" b="1">
+                <a:solidFill>
+                  <a:srgbClr val="054A75"/>
+                </a:solidFill>
+                <a:latin typeface="Segoe UI"/>
+              </a:defRPr>
+            </a:pPr>
+            <a:r>
+              <a:t>Operational Reports &amp; Auditing (Page 7)</a:t>
+            </a:r>
+          </a:p>
+        </p:txBody>
+      </p:sp>
+      <p:sp>
+        <p:nvSpPr>
+          <p:cNvPr id="5" name="TextBox 4"/>
+          <p:cNvSpPr txBox="1"/>
+          <p:nvPr/>
+        </p:nvSpPr>
+        <p:spPr>
+          <a:xfrm>
+            <a:off x="365760" y="6309360"/>
+            <a:ext cx="1371600" cy="365760"/>
+          </a:xfrm>
+          <a:prstGeom prst="rect">
+            <a:avLst/>
+          </a:prstGeom>
+          <a:noFill/>
+        </p:spPr>
+        <p:txBody>
+          <a:bodyPr wrap="none">
+            <a:spAutoFit/>
+          </a:bodyPr>
+          <a:lstStyle/>
+          <a:p>
+            <a:pPr>
+              <a:defRPr sz="1100">
+                <a:solidFill>
+                  <a:srgbClr val="64748B"/>
+                </a:solidFill>
+                <a:latin typeface="Segoe UI"/>
+              </a:defRPr>
+            </a:pPr>
+            <a:r>
+              <a:t>13 / 14</a:t>
+            </a:r>
+          </a:p>
+        </p:txBody>
+      </p:sp>
+      <p:sp>
+        <p:nvSpPr>
+          <p:cNvPr id="6" name="TextBox 5"/>
+          <p:cNvSpPr txBox="1"/>
+          <p:nvPr/>
+        </p:nvSpPr>
+        <p:spPr>
+          <a:xfrm>
+            <a:off x="557784" y="2377440"/>
+            <a:ext cx="5303520" cy="3657600"/>
+          </a:xfrm>
+          <a:prstGeom prst="rect">
+            <a:avLst/>
+          </a:prstGeom>
+          <a:noFill/>
+        </p:spPr>
+        <p:txBody>
+          <a:bodyPr wrap="square">
+            <a:spAutoFit/>
+          </a:bodyPr>
+          <a:lstStyle/>
+          <a:p>
+            <a:pPr>
+              <a:spcAft>
+                <a:spcPts val="1500"/>
+              </a:spcAft>
+              <a:defRPr sz="1500" b="1">
+                <a:solidFill>
+                  <a:srgbClr val="06B6D4"/>
+                </a:solidFill>
+                <a:latin typeface="Segoe UI"/>
+              </a:defRPr>
+            </a:pPr>
+            <a:r>
+              <a:t>AUDIT RECORDS &amp; EXPORTS</a:t>
+            </a:r>
+          </a:p>
+          <a:p>
+            <a:pPr>
+              <a:spcAft>
+                <a:spcPts val="1200"/>
+              </a:spcAft>
+              <a:defRPr sz="1150">
+                <a:solidFill>
+                  <a:srgbClr val="334155"/>
+                </a:solidFill>
+                <a:latin typeface="Segoe UI"/>
+              </a:defRPr>
+            </a:pPr>
+            <a:r>
+              <a:t>◆  Granular transaction tables list exact passenger rows.</a:t>
+            </a:r>
+          </a:p>
+          <a:p>
+            <a:pPr>
+              <a:spcAft>
+                <a:spcPts val="1200"/>
+              </a:spcAft>
+              <a:defRPr sz="1150">
+                <a:solidFill>
+                  <a:srgbClr val="334155"/>
+                </a:solidFill>
+                <a:latin typeface="Segoe UI"/>
+              </a:defRPr>
+            </a:pPr>
+            <a:r>
+              <a:t>◆  Integrated dynamic search bars look up booking IDs and customer details instantly.</a:t>
+            </a:r>
+          </a:p>
+          <a:p>
+            <a:pPr>
+              <a:spcAft>
+                <a:spcPts val="1200"/>
+              </a:spcAft>
+              <a:defRPr sz="1150">
+                <a:solidFill>
+                  <a:srgbClr val="334155"/>
+                </a:solidFill>
+                <a:latin typeface="Segoe UI"/>
+              </a:defRPr>
+            </a:pPr>
+            <a:r>
+              <a:t>◆  Supports direct CSV table exports for spreadsheet calculations.</a:t>
+            </a:r>
+          </a:p>
+          <a:p>
+            <a:pPr>
+              <a:spcAft>
+                <a:spcPts val="1200"/>
+              </a:spcAft>
+              <a:defRPr sz="1150">
+                <a:solidFill>
+                  <a:srgbClr val="334155"/>
+                </a:solidFill>
+                <a:latin typeface="Segoe UI"/>
+              </a:defRPr>
+            </a:pPr>
+            <a:r>
+              <a:t>◆  Formatted alternating rows improve visual scannability.</a:t>
+            </a:r>
+          </a:p>
+        </p:txBody>
+      </p:sp>
+      <p:pic>
+        <p:nvPicPr>
+          <p:cNvPr id="7" name="Picture 6" descr="Screenshot 2026-07-16 005410.png"/>
+          <p:cNvPicPr>
+            <a:picLocks noChangeAspect="1"/>
+          </p:cNvPicPr>
+          <p:nvPr/>
+        </p:nvPicPr>
+        <p:blipFill>
+          <a:blip r:embed="rId2"/>
+          <a:stretch>
+            <a:fillRect/>
+          </a:stretch>
+        </p:blipFill>
+        <p:spPr>
+          <a:xfrm>
+            <a:off x="6409944" y="2286000"/>
+            <a:ext cx="5212080" cy="2926080"/>
+          </a:xfrm>
+          <a:prstGeom prst="rect">
+            <a:avLst/>
+          </a:prstGeom>
+        </p:spPr>
+      </p:pic>
+    </p:spTree>
+  </p:cSld>
+  <mc:AlternateContent xmlns:mc="http://schemas.openxmlformats.org/markup-compatibility/2006">
+    <mc:Choice xmlns:p14="http://schemas.microsoft.com/office/powerpoint/2010/main" Requires="p14">
+      <p:transition spd="slow">
+        <p:fade/>
+      </p:transition>
+    </mc:Choice>
+    <mc:Fallback>
+      <p:transition spd="slow">
+        <p:fade/>
+      </p:transition>
+    </mc:Fallback>
+  </mc:AlternateContent>
+  <p:clrMapOvr>
+    <a:masterClrMapping/>
+  </p:clrMapOvr>
+</p:sld>
+</file>
+
+<file path=ppt/slides/slide14.xml><?xml version="1.0" encoding="utf-8"?>
+<p:sld xmlns:a="http://schemas.openxmlformats.org/drawingml/2006/main" xmlns:p="http://schemas.openxmlformats.org/presentationml/2006/main" xmlns:r="http://schemas.openxmlformats.org/officeDocument/2006/relationships">
+  <p:cSld>
+    <p:bg>
+      <p:bgPr>
+        <a:solidFill>
+          <a:srgbClr val="FFFFFF"/>
+        </a:solidFill>
+        <a:effectLst/>
+      </p:bgPr>
+    </p:bg>
+    <p:spTree>
+      <p:nvGrpSpPr>
+        <p:cNvPr id="1" name=""/>
+        <p:cNvGrpSpPr/>
+        <p:nvPr/>
+      </p:nvGrpSpPr>
+      <p:grpSpPr/>
+      <p:sp>
+        <p:nvSpPr>
+          <p:cNvPr id="2" name="TextBox 1"/>
+          <p:cNvSpPr txBox="1"/>
+          <p:nvPr/>
+        </p:nvSpPr>
+        <p:spPr>
+          <a:xfrm>
+            <a:off x="548640" y="365760"/>
+            <a:ext cx="1371600" cy="822960"/>
+          </a:xfrm>
+          <a:prstGeom prst="rect">
+            <a:avLst/>
+          </a:prstGeom>
+          <a:noFill/>
+        </p:spPr>
+        <p:txBody>
+          <a:bodyPr wrap="none">
+            <a:spAutoFit/>
+          </a:bodyPr>
+          <a:lstStyle/>
+          <a:p>
+            <a:pPr>
+              <a:defRPr sz="3800" b="1">
+                <a:solidFill>
+                  <a:srgbClr val="06B6D4"/>
+                </a:solidFill>
+                <a:latin typeface="Segoe UI"/>
+              </a:defRPr>
+            </a:pPr>
+            <a:r>
+              <a:t>13</a:t>
+            </a:r>
+          </a:p>
+        </p:txBody>
+      </p:sp>
+      <p:sp>
+        <p:nvSpPr>
+          <p:cNvPr id="3" name="TextBox 2"/>
+          <p:cNvSpPr txBox="1"/>
+          <p:nvPr/>
+        </p:nvSpPr>
+        <p:spPr>
+          <a:xfrm>
+            <a:off x="548640" y="1280160"/>
+            <a:ext cx="3657600" cy="36576"/>
+          </a:xfrm>
+          <a:prstGeom prst="rect">
+            <a:avLst/>
+          </a:prstGeom>
+          <a:noFill/>
+        </p:spPr>
+        <p:txBody>
+          <a:bodyPr wrap="none">
+            <a:spAutoFit/>
+          </a:bodyPr>
+          <a:lstStyle/>
+          <a:p/>
+        </p:txBody>
+      </p:sp>
+      <p:sp>
+        <p:nvSpPr>
+          <p:cNvPr id="4" name="TextBox 3"/>
+          <p:cNvSpPr txBox="1"/>
+          <p:nvPr/>
+        </p:nvSpPr>
+        <p:spPr>
+          <a:xfrm>
+            <a:off x="548640" y="1417320"/>
+            <a:ext cx="8229600" cy="640080"/>
+          </a:xfrm>
+          <a:prstGeom prst="rect">
+            <a:avLst/>
+          </a:prstGeom>
+          <a:noFill/>
+        </p:spPr>
+        <p:txBody>
+          <a:bodyPr wrap="square">
+            <a:spAutoFit/>
+          </a:bodyPr>
+          <a:lstStyle/>
+          <a:p>
+            <a:pPr>
+              <a:defRPr sz="2400" b="1">
+                <a:solidFill>
+                  <a:srgbClr val="054A75"/>
+                </a:solidFill>
+                <a:latin typeface="Segoe UI"/>
+              </a:defRPr>
+            </a:pPr>
+            <a:r>
+              <a:t>Strategic Recommendations</a:t>
+            </a:r>
+          </a:p>
+        </p:txBody>
+      </p:sp>
+      <p:sp>
+        <p:nvSpPr>
+          <p:cNvPr id="5" name="TextBox 4"/>
+          <p:cNvSpPr txBox="1"/>
+          <p:nvPr/>
+        </p:nvSpPr>
+        <p:spPr>
+          <a:xfrm>
+            <a:off x="365760" y="6309360"/>
+            <a:ext cx="1371600" cy="365760"/>
+          </a:xfrm>
+          <a:prstGeom prst="rect">
+            <a:avLst/>
+          </a:prstGeom>
+          <a:noFill/>
+        </p:spPr>
+        <p:txBody>
+          <a:bodyPr wrap="none">
+            <a:spAutoFit/>
+          </a:bodyPr>
+          <a:lstStyle/>
+          <a:p>
+            <a:pPr>
+              <a:defRPr sz="1100">
+                <a:solidFill>
+                  <a:srgbClr val="64748B"/>
+                </a:solidFill>
+                <a:latin typeface="Segoe UI"/>
+              </a:defRPr>
+            </a:pPr>
+            <a:r>
+              <a:t>14 / 14</a:t>
+            </a:r>
+          </a:p>
+        </p:txBody>
+      </p:sp>
+      <p:sp>
+        <p:nvSpPr>
+          <p:cNvPr id="6" name="Rounded Rectangle 5"/>
+          <p:cNvSpPr/>
+          <p:nvPr/>
+        </p:nvSpPr>
+        <p:spPr>
+          <a:xfrm>
+            <a:off x="694944" y="2377440"/>
+            <a:ext cx="5120640" cy="1645920"/>
+          </a:xfrm>
+          <a:prstGeom prst="roundRect">
+            <a:avLst/>
+          </a:prstGeom>
+          <a:solidFill>
+            <a:srgbClr val="1A152C"/>
+          </a:solidFill>
+          <a:ln>
+            <a:noFill/>
+          </a:ln>
+        </p:spPr>
+        <p:style>
+          <a:lnRef idx="1">
+            <a:schemeClr val="accent1"/>
+          </a:lnRef>
+          <a:fillRef idx="3">
+            <a:schemeClr val="accent1"/>
+          </a:fillRef>
+          <a:effectRef idx="2">
+            <a:schemeClr val="accent1"/>
+          </a:effectRef>
+          <a:fontRef idx="minor">
+            <a:schemeClr val="lt1"/>
+          </a:fontRef>
+        </p:style>
+        <p:txBody>
+          <a:bodyPr rtlCol="0" anchor="ctr" wrap="square" lIns="228600" tIns="228600" rIns="228600" bIns="228600"/>
+          <a:lstStyle/>
+          <a:p>
+            <a:pPr algn="ctr">
+              <a:spcAft>
+                <a:spcPts val="1400"/>
+              </a:spcAft>
+              <a:defRPr sz="1300" b="1">
+                <a:solidFill>
+                  <a:srgbClr val="06B6D4"/>
+                </a:solidFill>
+                <a:latin typeface="Segoe UI"/>
+              </a:defRPr>
+            </a:pPr>
+            <a:r>
+              <a:t>🎫 Pricing Managers</a:t>
             </a:r>
           </a:p>
           <a:p>
@@ -3144,44 +4675,381 @@
               <a:spcAft>
                 <a:spcPts val="1000"/>
               </a:spcAft>
-              <a:defRPr sz="4400" b="1">
-                <a:solidFill>
-                  <a:srgbClr val="F1F5F9"/>
-                </a:solidFill>
-                <a:latin typeface="Segoe UI"/>
-              </a:defRPr>
-            </a:pPr>
-            <a:r>
-              <a:t>Bus Booking Analytics System</a:t>
-            </a:r>
-          </a:p>
-          <a:p>
-            <a:pPr>
-              <a:spcAft>
-                <a:spcPts val="4000"/>
-              </a:spcAft>
-              <a:defRPr sz="1800">
-                <a:solidFill>
-                  <a:srgbClr val="94A3B8"/>
-                </a:solidFill>
-                <a:latin typeface="Segoe UI"/>
-              </a:defRPr>
-            </a:pPr>
-            <a:r>
-              <a:t>End-to-End MySQL Relational Storage &amp; Power BI Visualization Deck</a:t>
-            </a:r>
-          </a:p>
-          <a:p>
-            <a:pPr>
-              <a:defRPr sz="1200" b="1">
-                <a:solidFill>
-                  <a:srgbClr val="94A3B8"/>
-                </a:solidFill>
-                <a:latin typeface="Segoe UI"/>
-              </a:defRPr>
-            </a:pPr>
-            <a:r>
-              <a:t>Developed by: Gururaj Shetty  |  Lead Systems Engineer</a:t>
+              <a:defRPr sz="1100">
+                <a:solidFill>
+                  <a:srgbClr val="FFFFFF"/>
+                </a:solidFill>
+                <a:latin typeface="Segoe UI"/>
+              </a:defRPr>
+            </a:pPr>
+            <a:r>
+              <a:t>◆  Leverage dynamic pricing during May-June peaks. Elevate AC Sleeper rates by 10% on high-demand weekends to capture maximum yield.</a:t>
+            </a:r>
+          </a:p>
+        </p:txBody>
+      </p:sp>
+      <p:sp>
+        <p:nvSpPr>
+          <p:cNvPr id="7" name="Rounded Rectangle 6"/>
+          <p:cNvSpPr/>
+          <p:nvPr/>
+        </p:nvSpPr>
+        <p:spPr>
+          <a:xfrm>
+            <a:off x="6364224" y="2377440"/>
+            <a:ext cx="5120640" cy="1645920"/>
+          </a:xfrm>
+          <a:prstGeom prst="roundRect">
+            <a:avLst/>
+          </a:prstGeom>
+          <a:solidFill>
+            <a:srgbClr val="1A152C"/>
+          </a:solidFill>
+          <a:ln>
+            <a:noFill/>
+          </a:ln>
+        </p:spPr>
+        <p:style>
+          <a:lnRef idx="1">
+            <a:schemeClr val="accent1"/>
+          </a:lnRef>
+          <a:fillRef idx="3">
+            <a:schemeClr val="accent1"/>
+          </a:fillRef>
+          <a:effectRef idx="2">
+            <a:schemeClr val="accent1"/>
+          </a:effectRef>
+          <a:fontRef idx="minor">
+            <a:schemeClr val="lt1"/>
+          </a:fontRef>
+        </p:style>
+        <p:txBody>
+          <a:bodyPr rtlCol="0" anchor="ctr" wrap="square" lIns="228600" tIns="228600" rIns="228600" bIns="228600"/>
+          <a:lstStyle/>
+          <a:p>
+            <a:pPr algn="ctr">
+              <a:spcAft>
+                <a:spcPts val="1400"/>
+              </a:spcAft>
+              <a:defRPr sz="1300" b="1">
+                <a:solidFill>
+                  <a:srgbClr val="06B6D4"/>
+                </a:solidFill>
+                <a:latin typeface="Segoe UI"/>
+              </a:defRPr>
+            </a:pPr>
+            <a:r>
+              <a:t>🚌 Dispatch Coordinators</a:t>
+            </a:r>
+          </a:p>
+          <a:p>
+            <a:pPr>
+              <a:spcAft>
+                <a:spcPts val="1000"/>
+              </a:spcAft>
+              <a:defRPr sz="1100">
+                <a:solidFill>
+                  <a:srgbClr val="FFFFFF"/>
+                </a:solidFill>
+                <a:latin typeface="Segoe UI"/>
+              </a:defRPr>
+            </a:pPr>
+            <a:r>
+              <a:t>◆  Improve the 51% fleet load factor. Consolidate low-occupancy weekday runs and reassign AC Seater buses to peak Bangalore/Delhi schedules.</a:t>
+            </a:r>
+          </a:p>
+        </p:txBody>
+      </p:sp>
+      <p:sp>
+        <p:nvSpPr>
+          <p:cNvPr id="8" name="Rounded Rectangle 7"/>
+          <p:cNvSpPr/>
+          <p:nvPr/>
+        </p:nvSpPr>
+        <p:spPr>
+          <a:xfrm>
+            <a:off x="694944" y="4297680"/>
+            <a:ext cx="5120640" cy="1645920"/>
+          </a:xfrm>
+          <a:prstGeom prst="roundRect">
+            <a:avLst/>
+          </a:prstGeom>
+          <a:solidFill>
+            <a:srgbClr val="1A152C"/>
+          </a:solidFill>
+          <a:ln>
+            <a:noFill/>
+          </a:ln>
+        </p:spPr>
+        <p:style>
+          <a:lnRef idx="1">
+            <a:schemeClr val="accent1"/>
+          </a:lnRef>
+          <a:fillRef idx="3">
+            <a:schemeClr val="accent1"/>
+          </a:fillRef>
+          <a:effectRef idx="2">
+            <a:schemeClr val="accent1"/>
+          </a:effectRef>
+          <a:fontRef idx="minor">
+            <a:schemeClr val="lt1"/>
+          </a:fontRef>
+        </p:style>
+        <p:txBody>
+          <a:bodyPr rtlCol="0" anchor="ctr" wrap="square" lIns="228600" tIns="228600" rIns="228600" bIns="228600"/>
+          <a:lstStyle/>
+          <a:p>
+            <a:pPr algn="ctr">
+              <a:spcAft>
+                <a:spcPts val="1400"/>
+              </a:spcAft>
+              <a:defRPr sz="1300" b="1">
+                <a:solidFill>
+                  <a:srgbClr val="06B6D4"/>
+                </a:solidFill>
+                <a:latin typeface="Segoe UI"/>
+              </a:defRPr>
+            </a:pPr>
+            <a:r>
+              <a:t>📢 Marketing Specialists</a:t>
+            </a:r>
+          </a:p>
+          <a:p>
+            <a:pPr>
+              <a:spcAft>
+                <a:spcPts val="1000"/>
+              </a:spcAft>
+              <a:defRPr sz="1100">
+                <a:solidFill>
+                  <a:srgbClr val="FFFFFF"/>
+                </a:solidFill>
+                <a:latin typeface="Segoe UI"/>
+              </a:defRPr>
+            </a:pPr>
+            <a:r>
+              <a:t>◆  Launch targeted loyalty campaigns to boost retention past the 80% mark, focusing on the highly-profitable 25-45 age group bracket.</a:t>
+            </a:r>
+          </a:p>
+        </p:txBody>
+      </p:sp>
+      <p:sp>
+        <p:nvSpPr>
+          <p:cNvPr id="9" name="Rounded Rectangle 8"/>
+          <p:cNvSpPr/>
+          <p:nvPr/>
+        </p:nvSpPr>
+        <p:spPr>
+          <a:xfrm>
+            <a:off x="6364224" y="4297680"/>
+            <a:ext cx="5120640" cy="1645920"/>
+          </a:xfrm>
+          <a:prstGeom prst="roundRect">
+            <a:avLst/>
+          </a:prstGeom>
+          <a:solidFill>
+            <a:srgbClr val="1A152C"/>
+          </a:solidFill>
+          <a:ln>
+            <a:noFill/>
+          </a:ln>
+        </p:spPr>
+        <p:style>
+          <a:lnRef idx="1">
+            <a:schemeClr val="accent1"/>
+          </a:lnRef>
+          <a:fillRef idx="3">
+            <a:schemeClr val="accent1"/>
+          </a:fillRef>
+          <a:effectRef idx="2">
+            <a:schemeClr val="accent1"/>
+          </a:effectRef>
+          <a:fontRef idx="minor">
+            <a:schemeClr val="lt1"/>
+          </a:fontRef>
+        </p:style>
+        <p:txBody>
+          <a:bodyPr rtlCol="0" anchor="ctr" wrap="square" lIns="228600" tIns="228600" rIns="228600" bIns="228600"/>
+          <a:lstStyle/>
+          <a:p>
+            <a:pPr algn="ctr">
+              <a:spcAft>
+                <a:spcPts val="1400"/>
+              </a:spcAft>
+              <a:defRPr sz="1300" b="1">
+                <a:solidFill>
+                  <a:srgbClr val="06B6D4"/>
+                </a:solidFill>
+                <a:latin typeface="Segoe UI"/>
+              </a:defRPr>
+            </a:pPr>
+            <a:r>
+              <a:t>⚙️ System Architects</a:t>
+            </a:r>
+          </a:p>
+          <a:p>
+            <a:pPr>
+              <a:spcAft>
+                <a:spcPts val="1000"/>
+              </a:spcAft>
+              <a:defRPr sz="1100">
+                <a:solidFill>
+                  <a:srgbClr val="FFFFFF"/>
+                </a:solidFill>
+                <a:latin typeface="Segoe UI"/>
+              </a:defRPr>
+            </a:pPr>
+            <a:r>
+              <a:t>◆  Preserve the MySQL relational schema for secure append runs. Protect local server config details inside separated configuration keys.</a:t>
+            </a:r>
+          </a:p>
+        </p:txBody>
+      </p:sp>
+    </p:spTree>
+  </p:cSld>
+  <mc:AlternateContent xmlns:mc="http://schemas.openxmlformats.org/markup-compatibility/2006">
+    <mc:Choice xmlns:p14="http://schemas.microsoft.com/office/powerpoint/2010/main" Requires="p14">
+      <p:transition spd="slow">
+        <p:push dir="l"/>
+      </p:transition>
+    </mc:Choice>
+    <mc:Fallback>
+      <p:transition spd="slow">
+        <p:push dir="l"/>
+      </p:transition>
+    </mc:Fallback>
+  </mc:AlternateContent>
+  <p:clrMapOvr>
+    <a:masterClrMapping/>
+  </p:clrMapOvr>
+</p:sld>
+</file>
+
+<file path=ppt/slides/slide15.xml><?xml version="1.0" encoding="utf-8"?>
+<p:sld xmlns:a="http://schemas.openxmlformats.org/drawingml/2006/main" xmlns:p="http://schemas.openxmlformats.org/presentationml/2006/main" xmlns:r="http://schemas.openxmlformats.org/officeDocument/2006/relationships">
+  <p:cSld>
+    <p:bg>
+      <p:bgPr>
+        <a:solidFill>
+          <a:srgbClr val="FFFFFF"/>
+        </a:solidFill>
+        <a:effectLst/>
+      </p:bgPr>
+    </p:bg>
+    <p:spTree>
+      <p:nvGrpSpPr>
+        <p:cNvPr id="1" name=""/>
+        <p:cNvGrpSpPr/>
+        <p:nvPr/>
+      </p:nvGrpSpPr>
+      <p:grpSpPr/>
+      <p:sp>
+        <p:nvSpPr>
+          <p:cNvPr id="2" name="TextBox 1"/>
+          <p:cNvSpPr txBox="1"/>
+          <p:nvPr/>
+        </p:nvSpPr>
+        <p:spPr>
+          <a:xfrm>
+            <a:off x="1828800" y="2468880"/>
+            <a:ext cx="8503920" cy="1371600"/>
+          </a:xfrm>
+          <a:prstGeom prst="rect">
+            <a:avLst/>
+          </a:prstGeom>
+          <a:noFill/>
+        </p:spPr>
+        <p:txBody>
+          <a:bodyPr wrap="square">
+            <a:spAutoFit/>
+          </a:bodyPr>
+          <a:lstStyle/>
+          <a:p>
+            <a:pPr algn="ctr">
+              <a:defRPr sz="4800" b="1">
+                <a:solidFill>
+                  <a:srgbClr val="06B6D4"/>
+                </a:solidFill>
+                <a:latin typeface="Segoe UI"/>
+              </a:defRPr>
+            </a:pPr>
+            <a:r>
+              <a:t>Thank You</a:t>
+            </a:r>
+          </a:p>
+        </p:txBody>
+      </p:sp>
+      <p:sp>
+        <p:nvSpPr>
+          <p:cNvPr id="3" name="TextBox 2"/>
+          <p:cNvSpPr txBox="1"/>
+          <p:nvPr/>
+        </p:nvSpPr>
+        <p:spPr>
+          <a:xfrm>
+            <a:off x="1828800" y="3840480"/>
+            <a:ext cx="8503920" cy="548640"/>
+          </a:xfrm>
+          <a:prstGeom prst="rect">
+            <a:avLst/>
+          </a:prstGeom>
+          <a:noFill/>
+        </p:spPr>
+        <p:txBody>
+          <a:bodyPr wrap="none">
+            <a:spAutoFit/>
+          </a:bodyPr>
+          <a:lstStyle/>
+          <a:p>
+            <a:pPr algn="ctr">
+              <a:defRPr sz="1600" b="1">
+                <a:solidFill>
+                  <a:srgbClr val="054A75"/>
+                </a:solidFill>
+                <a:latin typeface="Segoe UI"/>
+              </a:defRPr>
+            </a:pPr>
+            <a:r>
+              <a:t>Bus Booking Analytics System  |  Phase 2 Final Project</a:t>
+            </a:r>
+          </a:p>
+        </p:txBody>
+      </p:sp>
+      <p:sp>
+        <p:nvSpPr>
+          <p:cNvPr id="4" name="TextBox 3"/>
+          <p:cNvSpPr txBox="1"/>
+          <p:nvPr/>
+        </p:nvSpPr>
+        <p:spPr>
+          <a:xfrm>
+            <a:off x="1828800" y="4480560"/>
+            <a:ext cx="8503920" cy="822960"/>
+          </a:xfrm>
+          <a:prstGeom prst="rect">
+            <a:avLst/>
+          </a:prstGeom>
+          <a:noFill/>
+        </p:spPr>
+        <p:txBody>
+          <a:bodyPr wrap="none">
+            <a:spAutoFit/>
+          </a:bodyPr>
+          <a:lstStyle/>
+          <a:p>
+            <a:pPr algn="ctr">
+              <a:defRPr sz="1300">
+                <a:solidFill>
+                  <a:srgbClr val="64748B"/>
+                </a:solidFill>
+                <a:latin typeface="Segoe UI"/>
+              </a:defRPr>
+            </a:pPr>
+            <a:r>
+              <a:t>Harish, Harini, Gururaj Shetty  |  Revature Data Analytics</a:t>
+            </a:r>
+            <a:br/>
+            <a:r>
+              <a:t>Email: shettygururaj279@gmail.com  |  GitHub: SHETYGURU</a:t>
             </a:r>
           </a:p>
         </p:txBody>
@@ -3212,7 +5080,7 @@
     <p:bg>
       <p:bgPr>
         <a:solidFill>
-          <a:srgbClr val="0F172A"/>
+          <a:srgbClr val="FFFFFF"/>
         </a:solidFill>
         <a:effectLst/>
       </p:bgPr>
@@ -3232,8 +5100,68 @@
         </p:nvSpPr>
         <p:spPr>
           <a:xfrm>
-            <a:off x="457200" y="365760"/>
-            <a:ext cx="11274552" cy="274320"/>
+            <a:off x="548640" y="365760"/>
+            <a:ext cx="1371600" cy="822960"/>
+          </a:xfrm>
+          <a:prstGeom prst="rect">
+            <a:avLst/>
+          </a:prstGeom>
+          <a:noFill/>
+        </p:spPr>
+        <p:txBody>
+          <a:bodyPr wrap="none">
+            <a:spAutoFit/>
+          </a:bodyPr>
+          <a:lstStyle/>
+          <a:p>
+            <a:pPr>
+              <a:defRPr sz="3800" b="1">
+                <a:solidFill>
+                  <a:srgbClr val="06B6D4"/>
+                </a:solidFill>
+                <a:latin typeface="Segoe UI"/>
+              </a:defRPr>
+            </a:pPr>
+            <a:r>
+              <a:t>01</a:t>
+            </a:r>
+          </a:p>
+        </p:txBody>
+      </p:sp>
+      <p:sp>
+        <p:nvSpPr>
+          <p:cNvPr id="3" name="TextBox 2"/>
+          <p:cNvSpPr txBox="1"/>
+          <p:nvPr/>
+        </p:nvSpPr>
+        <p:spPr>
+          <a:xfrm>
+            <a:off x="548640" y="1280160"/>
+            <a:ext cx="3657600" cy="36576"/>
+          </a:xfrm>
+          <a:prstGeom prst="rect">
+            <a:avLst/>
+          </a:prstGeom>
+          <a:noFill/>
+        </p:spPr>
+        <p:txBody>
+          <a:bodyPr wrap="none">
+            <a:spAutoFit/>
+          </a:bodyPr>
+          <a:lstStyle/>
+          <a:p/>
+        </p:txBody>
+      </p:sp>
+      <p:sp>
+        <p:nvSpPr>
+          <p:cNvPr id="4" name="TextBox 3"/>
+          <p:cNvSpPr txBox="1"/>
+          <p:nvPr/>
+        </p:nvSpPr>
+        <p:spPr>
+          <a:xfrm>
+            <a:off x="548640" y="1417320"/>
+            <a:ext cx="8229600" cy="640080"/>
           </a:xfrm>
           <a:prstGeom prst="rect">
             <a:avLst/>
@@ -3247,65 +5175,29 @@
           <a:lstStyle/>
           <a:p>
             <a:pPr>
-              <a:defRPr sz="1000" b="1">
-                <a:solidFill>
-                  <a:srgbClr val="06B6D4"/>
-                </a:solidFill>
-                <a:latin typeface="Segoe UI"/>
-              </a:defRPr>
-            </a:pPr>
-            <a:r>
-              <a:t>BUS BOOKING ANALYTICS SYSTEM</a:t>
-            </a:r>
-          </a:p>
-        </p:txBody>
-      </p:sp>
-      <p:sp>
-        <p:nvSpPr>
-          <p:cNvPr id="3" name="TextBox 2"/>
+              <a:defRPr sz="2400" b="1">
+                <a:solidFill>
+                  <a:srgbClr val="054A75"/>
+                </a:solidFill>
+                <a:latin typeface="Segoe UI"/>
+              </a:defRPr>
+            </a:pPr>
+            <a:r>
+              <a:t>Agenda</a:t>
+            </a:r>
+          </a:p>
+        </p:txBody>
+      </p:sp>
+      <p:sp>
+        <p:nvSpPr>
+          <p:cNvPr id="5" name="TextBox 4"/>
           <p:cNvSpPr txBox="1"/>
           <p:nvPr/>
         </p:nvSpPr>
         <p:spPr>
           <a:xfrm>
-            <a:off x="457200" y="594360"/>
-            <a:ext cx="11274552" cy="731520"/>
-          </a:xfrm>
-          <a:prstGeom prst="rect">
-            <a:avLst/>
-          </a:prstGeom>
-          <a:noFill/>
-        </p:spPr>
-        <p:txBody>
-          <a:bodyPr wrap="square">
-            <a:spAutoFit/>
-          </a:bodyPr>
-          <a:lstStyle/>
-          <a:p>
-            <a:pPr>
-              <a:defRPr sz="2800" b="1">
-                <a:solidFill>
-                  <a:srgbClr val="F1F5F9"/>
-                </a:solidFill>
-                <a:latin typeface="Segoe UI"/>
-              </a:defRPr>
-            </a:pPr>
-            <a:r>
-              <a:t>Executive Overview (Page 1)</a:t>
-            </a:r>
-          </a:p>
-        </p:txBody>
-      </p:sp>
-      <p:sp>
-        <p:nvSpPr>
-          <p:cNvPr id="4" name="TextBox 3"/>
-          <p:cNvSpPr txBox="1"/>
-          <p:nvPr/>
-        </p:nvSpPr>
-        <p:spPr>
-          <a:xfrm>
-            <a:off x="457200" y="1188720"/>
-            <a:ext cx="11274552" cy="91440"/>
+            <a:off x="365760" y="6309360"/>
+            <a:ext cx="1371600" cy="365760"/>
           </a:xfrm>
           <a:prstGeom prst="rect">
             <a:avLst/>
@@ -3319,28 +5211,29 @@
           <a:lstStyle/>
           <a:p>
             <a:pPr>
-              <a:defRPr sz="800">
-                <a:solidFill>
-                  <a:srgbClr val="1E293B"/>
-                </a:solidFill>
-              </a:defRPr>
-            </a:pPr>
-            <a:r>
-              <a:t>⎯⎯⎯⎯⎯⎯⎯⎯⎯⎯⎯⎯⎯⎯⎯⎯⎯⎯⎯⎯⎯⎯⎯⎯⎯⎯⎯⎯⎯⎯⎯⎯⎯⎯⎯⎯⎯⎯⎯⎯⎯⎯⎯⎯⎯⎯⎯⎯⎯⎯⎯⎯⎯⎯⎯⎯⎯⎯⎯⎯⎯⎯⎯⎯⎯⎯⎯⎯⎯⎯⎯⎯⎯⎯⎯⎯⎯⎯⎯⎯⎯⎯⎯⎯⎯⎯⎯⎯⎯⎯⎯⎯⎯⎯⎯⎯⎯⎯⎯⎯⎯⎯⎯⎯⎯⎯⎯⎯⎯⎯⎯⎯⎯⎯⎯⎯⎯⎯⎯⎯</a:t>
-            </a:r>
-          </a:p>
-        </p:txBody>
-      </p:sp>
-      <p:sp>
-        <p:nvSpPr>
-          <p:cNvPr id="5" name="TextBox 4"/>
+              <a:defRPr sz="1100">
+                <a:solidFill>
+                  <a:srgbClr val="64748B"/>
+                </a:solidFill>
+                <a:latin typeface="Segoe UI"/>
+              </a:defRPr>
+            </a:pPr>
+            <a:r>
+              <a:t>2 / 14</a:t>
+            </a:r>
+          </a:p>
+        </p:txBody>
+      </p:sp>
+      <p:sp>
+        <p:nvSpPr>
+          <p:cNvPr id="6" name="TextBox 5"/>
           <p:cNvSpPr txBox="1"/>
           <p:nvPr/>
         </p:nvSpPr>
         <p:spPr>
           <a:xfrm>
-            <a:off x="457200" y="1645920"/>
-            <a:ext cx="4114800" cy="4572000"/>
+            <a:off x="914400" y="2286000"/>
+            <a:ext cx="10360152" cy="3657600"/>
           </a:xfrm>
           <a:prstGeom prst="rect">
             <a:avLst/>
@@ -3348,298 +5241,120 @@
           <a:noFill/>
         </p:spPr>
         <p:txBody>
-          <a:bodyPr wrap="square">
+          <a:bodyPr wrap="none">
             <a:spAutoFit/>
           </a:bodyPr>
           <a:lstStyle/>
           <a:p>
             <a:pPr>
               <a:spcAft>
-                <a:spcPts val="1500"/>
-              </a:spcAft>
-              <a:defRPr sz="1400" b="1">
-                <a:solidFill>
-                  <a:srgbClr val="06B6D4"/>
-                </a:solidFill>
-              </a:defRPr>
-            </a:pPr>
-            <a:r>
-              <a:t>CORE METRICS &amp; KPIs</a:t>
-            </a:r>
-          </a:p>
-          <a:p>
-            <a:pPr>
-              <a:defRPr sz="1200" b="1">
-                <a:solidFill>
-                  <a:srgbClr val="94A3B8"/>
-                </a:solidFill>
-              </a:defRPr>
-            </a:pPr>
-            <a:r>
-              <a:t>• Total Revenue</a:t>
-            </a:r>
-          </a:p>
-          <a:p>
-            <a:pPr>
-              <a:defRPr sz="2000" b="1">
-                <a:solidFill>
-                  <a:srgbClr val="F1F5F9"/>
-                </a:solidFill>
-              </a:defRPr>
-            </a:pPr>
-            <a:r>
-              <a:t>   $479.85K </a:t>
-            </a:r>
-          </a:p>
-          <a:p>
-            <a:pPr>
-              <a:spcAft>
-                <a:spcPts val="1200"/>
-              </a:spcAft>
-              <a:defRPr sz="1000">
-                <a:solidFill>
-                  <a:srgbClr val="22C55E"/>
-                </a:solidFill>
-              </a:defRPr>
-            </a:pPr>
-            <a:r>
-              <a:t>   Goal: $433.58K (+10.67%)</a:t>
-            </a:r>
-          </a:p>
-          <a:p>
-            <a:pPr>
-              <a:defRPr sz="1200" b="1">
-                <a:solidFill>
-                  <a:srgbClr val="94A3B8"/>
-                </a:solidFill>
-              </a:defRPr>
-            </a:pPr>
-            <a:r>
-              <a:t>• Total Bookings</a:t>
-            </a:r>
-          </a:p>
-          <a:p>
-            <a:pPr>
-              <a:defRPr sz="2000" b="1">
-                <a:solidFill>
-                  <a:srgbClr val="F1F5F9"/>
-                </a:solidFill>
-              </a:defRPr>
-            </a:pPr>
-            <a:r>
-              <a:t>   533 </a:t>
-            </a:r>
-          </a:p>
-          <a:p>
-            <a:pPr>
-              <a:spcAft>
-                <a:spcPts val="1200"/>
-              </a:spcAft>
-              <a:defRPr sz="1000">
-                <a:solidFill>
-                  <a:srgbClr val="EF4444"/>
-                </a:solidFill>
-              </a:defRPr>
-            </a:pPr>
-            <a:r>
-              <a:t>   Goal: 657 (-18.87%)</a:t>
-            </a:r>
-          </a:p>
-          <a:p>
-            <a:pPr>
-              <a:defRPr sz="1200" b="1">
-                <a:solidFill>
-                  <a:srgbClr val="94A3B8"/>
-                </a:solidFill>
-              </a:defRPr>
-            </a:pPr>
-            <a:r>
-              <a:t>• Average Fare</a:t>
-            </a:r>
-          </a:p>
-          <a:p>
-            <a:pPr>
-              <a:defRPr sz="2000" b="1">
-                <a:solidFill>
-                  <a:srgbClr val="F1F5F9"/>
-                </a:solidFill>
-              </a:defRPr>
-            </a:pPr>
-            <a:r>
-              <a:t>   $900.27 </a:t>
-            </a:r>
-          </a:p>
-          <a:p>
-            <a:pPr>
-              <a:spcAft>
-                <a:spcPts val="1200"/>
-              </a:spcAft>
-              <a:defRPr sz="1000">
-                <a:solidFill>
-                  <a:srgbClr val="22C55E"/>
-                </a:solidFill>
-              </a:defRPr>
-            </a:pPr>
-            <a:r>
-              <a:t>   Goal: $659.95 (+36.42%)</a:t>
-            </a:r>
-          </a:p>
-          <a:p>
-            <a:pPr>
-              <a:defRPr sz="1200" b="1">
-                <a:solidFill>
-                  <a:srgbClr val="94A3B8"/>
-                </a:solidFill>
-              </a:defRPr>
-            </a:pPr>
-            <a:r>
-              <a:t>• Customer Retention Rate</a:t>
-            </a:r>
-          </a:p>
-          <a:p>
-            <a:pPr>
-              <a:defRPr sz="2000" b="1">
-                <a:solidFill>
-                  <a:srgbClr val="F1F5F9"/>
-                </a:solidFill>
-              </a:defRPr>
-            </a:pPr>
-            <a:r>
-              <a:t>   77.0% </a:t>
-            </a:r>
-          </a:p>
-          <a:p>
-            <a:pPr>
-              <a:spcAft>
-                <a:spcPts val="1200"/>
-              </a:spcAft>
-              <a:defRPr sz="1000">
-                <a:solidFill>
-                  <a:srgbClr val="EF4444"/>
-                </a:solidFill>
-              </a:defRPr>
-            </a:pPr>
-            <a:r>
-              <a:t>   Goal: 80.0% (-3.93%)</a:t>
-            </a:r>
-          </a:p>
-        </p:txBody>
-      </p:sp>
-      <p:sp>
-        <p:nvSpPr>
-          <p:cNvPr id="6" name="TextBox 5"/>
-          <p:cNvSpPr txBox="1"/>
-          <p:nvPr/>
-        </p:nvSpPr>
-        <p:spPr>
-          <a:xfrm>
-            <a:off x="5029200" y="1645920"/>
-            <a:ext cx="6702552" cy="4572000"/>
-          </a:xfrm>
-          <a:prstGeom prst="rect">
-            <a:avLst/>
-          </a:prstGeom>
-          <a:noFill/>
-        </p:spPr>
-        <p:txBody>
-          <a:bodyPr wrap="square">
-            <a:spAutoFit/>
-          </a:bodyPr>
-          <a:lstStyle/>
-          <a:p>
-            <a:pPr>
-              <a:spcAft>
-                <a:spcPts val="1500"/>
-              </a:spcAft>
-              <a:defRPr sz="1400" b="1">
-                <a:solidFill>
-                  <a:srgbClr val="06B6D4"/>
-                </a:solidFill>
-              </a:defRPr>
-            </a:pPr>
-            <a:r>
-              <a:t>VISUAL ANALYSIS &amp; REPORT INSIGHTS</a:t>
-            </a:r>
-          </a:p>
-          <a:p>
-            <a:pPr>
-              <a:defRPr sz="1300" b="1">
-                <a:solidFill>
-                  <a:srgbClr val="F1F5F9"/>
-                </a:solidFill>
-              </a:defRPr>
-            </a:pPr>
-            <a:r>
-              <a:t>▪ Revenue &amp; Bookings Trend (Dual Axis Line)</a:t>
-            </a:r>
-          </a:p>
-          <a:p>
-            <a:pPr>
-              <a:spcAft>
-                <a:spcPts val="1500"/>
-              </a:spcAft>
-              <a:defRPr sz="1100">
-                <a:solidFill>
-                  <a:srgbClr val="94A3B8"/>
-                </a:solidFill>
-              </a:defRPr>
-            </a:pPr>
-            <a:r>
-              <a:t>Tracks seasonal demand volume. Peak sales are recorded in May-June due to summer travel windows, dropping into seasonal low factors in late winter.</a:t>
-            </a:r>
-          </a:p>
-          <a:p>
-            <a:pPr>
-              <a:defRPr sz="1300" b="1">
-                <a:solidFill>
-                  <a:srgbClr val="F1F5F9"/>
-                </a:solidFill>
-              </a:defRPr>
-            </a:pPr>
-            <a:r>
-              <a:t>▪ Revenue by Source Location</a:t>
-            </a:r>
-          </a:p>
-          <a:p>
-            <a:pPr>
-              <a:spcAft>
-                <a:spcPts val="1500"/>
-              </a:spcAft>
-              <a:defRPr sz="1100">
-                <a:solidFill>
-                  <a:srgbClr val="94A3B8"/>
-                </a:solidFill>
-              </a:defRPr>
-            </a:pPr>
-            <a:r>
-              <a:t>Bangalore dominates as the top boarding hub, generating $1.99M in ticket sales, followed closely by Delhi at $1.69M, highlighting primary commuter corridors.</a:t>
-            </a:r>
-          </a:p>
-          <a:p>
-            <a:pPr>
-              <a:defRPr sz="1300" b="1">
-                <a:solidFill>
-                  <a:srgbClr val="F1F5F9"/>
-                </a:solidFill>
-              </a:defRPr>
-            </a:pPr>
-            <a:r>
-              <a:t>▪ Operational Booking Statuses</a:t>
-            </a:r>
-          </a:p>
-          <a:p>
-            <a:pPr>
-              <a:spcAft>
-                <a:spcPts val="1500"/>
-              </a:spcAft>
-              <a:defRPr sz="1100">
-                <a:solidFill>
-                  <a:srgbClr val="94A3B8"/>
-                </a:solidFill>
-              </a:defRPr>
-            </a:pPr>
-            <a:r>
-              <a:t>Presents final reservation distributions: 8.50K Confirmed rows (representing realized travel yield), 1.28K Pending entries, and 601 Cancelled transactions.</a:t>
+                <a:spcPts val="1400"/>
+              </a:spcAft>
+              <a:defRPr sz="1600" b="1">
+                <a:solidFill>
+                  <a:srgbClr val="334155"/>
+                </a:solidFill>
+                <a:latin typeface="Segoe UI"/>
+              </a:defRPr>
+            </a:pPr>
+            <a:r>
+              <a:t>01   ─   Project Overview &amp; Objectives</a:t>
+            </a:r>
+          </a:p>
+          <a:p>
+            <a:pPr>
+              <a:spcAft>
+                <a:spcPts val="1400"/>
+              </a:spcAft>
+              <a:defRPr sz="1600" b="1">
+                <a:solidFill>
+                  <a:srgbClr val="334155"/>
+                </a:solidFill>
+                <a:latin typeface="Segoe UI"/>
+              </a:defRPr>
+            </a:pPr>
+            <a:r>
+              <a:t>02   ─   Tools &amp; Technology Stack</a:t>
+            </a:r>
+          </a:p>
+          <a:p>
+            <a:pPr>
+              <a:spcAft>
+                <a:spcPts val="1400"/>
+              </a:spcAft>
+              <a:defRPr sz="1600" b="1">
+                <a:solidFill>
+                  <a:srgbClr val="334155"/>
+                </a:solidFill>
+                <a:latin typeface="Segoe UI"/>
+              </a:defRPr>
+            </a:pPr>
+            <a:r>
+              <a:t>03   ─   Data Preprocessing &amp; Cleaning</a:t>
+            </a:r>
+          </a:p>
+          <a:p>
+            <a:pPr>
+              <a:spcAft>
+                <a:spcPts val="1400"/>
+              </a:spcAft>
+              <a:defRPr sz="1600" b="1">
+                <a:solidFill>
+                  <a:srgbClr val="334155"/>
+                </a:solidFill>
+                <a:latin typeface="Segoe UI"/>
+              </a:defRPr>
+            </a:pPr>
+            <a:r>
+              <a:t>04   ─   MySQL Database Design &amp; Normalization</a:t>
+            </a:r>
+          </a:p>
+          <a:p>
+            <a:pPr>
+              <a:spcAft>
+                <a:spcPts val="1400"/>
+              </a:spcAft>
+              <a:defRPr sz="1600" b="1">
+                <a:solidFill>
+                  <a:srgbClr val="334155"/>
+                </a:solidFill>
+                <a:latin typeface="Segoe UI"/>
+              </a:defRPr>
+            </a:pPr>
+            <a:r>
+              <a:t>05   ─   Interactive Analytical Dashboards (Power BI)</a:t>
+            </a:r>
+          </a:p>
+          <a:p>
+            <a:pPr>
+              <a:spcAft>
+                <a:spcPts val="1400"/>
+              </a:spcAft>
+              <a:defRPr sz="1600" b="1">
+                <a:solidFill>
+                  <a:srgbClr val="334155"/>
+                </a:solidFill>
+                <a:latin typeface="Segoe UI"/>
+              </a:defRPr>
+            </a:pPr>
+            <a:r>
+              <a:t>06   ─   Operations &amp; Booking Insights</a:t>
+            </a:r>
+          </a:p>
+          <a:p>
+            <a:pPr>
+              <a:spcAft>
+                <a:spcPts val="1400"/>
+              </a:spcAft>
+              <a:defRPr sz="1600" b="1">
+                <a:solidFill>
+                  <a:srgbClr val="334155"/>
+                </a:solidFill>
+                <a:latin typeface="Segoe UI"/>
+              </a:defRPr>
+            </a:pPr>
+            <a:r>
+              <a:t>07   ─   Key Financial Findings &amp; Recommendations</a:t>
             </a:r>
           </a:p>
         </p:txBody>
@@ -3649,12 +5364,12 @@
   <mc:AlternateContent xmlns:mc="http://schemas.openxmlformats.org/markup-compatibility/2006">
     <mc:Choice xmlns:p14="http://schemas.microsoft.com/office/powerpoint/2010/main" Requires="p14">
       <p:transition spd="slow">
-        <p:fade/>
+        <p:push dir="l"/>
       </p:transition>
     </mc:Choice>
     <mc:Fallback>
       <p:transition spd="slow">
-        <p:fade/>
+        <p:push dir="l"/>
       </p:transition>
     </mc:Fallback>
   </mc:AlternateContent>
@@ -3670,7 +5385,7 @@
     <p:bg>
       <p:bgPr>
         <a:solidFill>
-          <a:srgbClr val="0F172A"/>
+          <a:srgbClr val="FFFFFF"/>
         </a:solidFill>
         <a:effectLst/>
       </p:bgPr>
@@ -3690,8 +5405,68 @@
         </p:nvSpPr>
         <p:spPr>
           <a:xfrm>
-            <a:off x="457200" y="365760"/>
-            <a:ext cx="11274552" cy="274320"/>
+            <a:off x="548640" y="365760"/>
+            <a:ext cx="1371600" cy="822960"/>
+          </a:xfrm>
+          <a:prstGeom prst="rect">
+            <a:avLst/>
+          </a:prstGeom>
+          <a:noFill/>
+        </p:spPr>
+        <p:txBody>
+          <a:bodyPr wrap="none">
+            <a:spAutoFit/>
+          </a:bodyPr>
+          <a:lstStyle/>
+          <a:p>
+            <a:pPr>
+              <a:defRPr sz="3800" b="1">
+                <a:solidFill>
+                  <a:srgbClr val="06B6D4"/>
+                </a:solidFill>
+                <a:latin typeface="Segoe UI"/>
+              </a:defRPr>
+            </a:pPr>
+            <a:r>
+              <a:t>02</a:t>
+            </a:r>
+          </a:p>
+        </p:txBody>
+      </p:sp>
+      <p:sp>
+        <p:nvSpPr>
+          <p:cNvPr id="3" name="TextBox 2"/>
+          <p:cNvSpPr txBox="1"/>
+          <p:nvPr/>
+        </p:nvSpPr>
+        <p:spPr>
+          <a:xfrm>
+            <a:off x="548640" y="1280160"/>
+            <a:ext cx="3657600" cy="36576"/>
+          </a:xfrm>
+          <a:prstGeom prst="rect">
+            <a:avLst/>
+          </a:prstGeom>
+          <a:noFill/>
+        </p:spPr>
+        <p:txBody>
+          <a:bodyPr wrap="none">
+            <a:spAutoFit/>
+          </a:bodyPr>
+          <a:lstStyle/>
+          <a:p/>
+        </p:txBody>
+      </p:sp>
+      <p:sp>
+        <p:nvSpPr>
+          <p:cNvPr id="4" name="TextBox 3"/>
+          <p:cNvSpPr txBox="1"/>
+          <p:nvPr/>
+        </p:nvSpPr>
+        <p:spPr>
+          <a:xfrm>
+            <a:off x="548640" y="1417320"/>
+            <a:ext cx="8229600" cy="640080"/>
           </a:xfrm>
           <a:prstGeom prst="rect">
             <a:avLst/>
@@ -3705,65 +5480,29 @@
           <a:lstStyle/>
           <a:p>
             <a:pPr>
-              <a:defRPr sz="1000" b="1">
-                <a:solidFill>
-                  <a:srgbClr val="06B6D4"/>
-                </a:solidFill>
-                <a:latin typeface="Segoe UI"/>
-              </a:defRPr>
-            </a:pPr>
-            <a:r>
-              <a:t>BUS BOOKING ANALYTICS SYSTEM</a:t>
-            </a:r>
-          </a:p>
-        </p:txBody>
-      </p:sp>
-      <p:sp>
-        <p:nvSpPr>
-          <p:cNvPr id="3" name="TextBox 2"/>
+              <a:defRPr sz="2400" b="1">
+                <a:solidFill>
+                  <a:srgbClr val="054A75"/>
+                </a:solidFill>
+                <a:latin typeface="Segoe UI"/>
+              </a:defRPr>
+            </a:pPr>
+            <a:r>
+              <a:t>Project Overview &amp; Objectives</a:t>
+            </a:r>
+          </a:p>
+        </p:txBody>
+      </p:sp>
+      <p:sp>
+        <p:nvSpPr>
+          <p:cNvPr id="5" name="TextBox 4"/>
           <p:cNvSpPr txBox="1"/>
           <p:nvPr/>
         </p:nvSpPr>
         <p:spPr>
           <a:xfrm>
-            <a:off x="457200" y="594360"/>
-            <a:ext cx="11274552" cy="731520"/>
-          </a:xfrm>
-          <a:prstGeom prst="rect">
-            <a:avLst/>
-          </a:prstGeom>
-          <a:noFill/>
-        </p:spPr>
-        <p:txBody>
-          <a:bodyPr wrap="square">
-            <a:spAutoFit/>
-          </a:bodyPr>
-          <a:lstStyle/>
-          <a:p>
-            <a:pPr>
-              <a:defRPr sz="2800" b="1">
-                <a:solidFill>
-                  <a:srgbClr val="F1F5F9"/>
-                </a:solidFill>
-                <a:latin typeface="Segoe UI"/>
-              </a:defRPr>
-            </a:pPr>
-            <a:r>
-              <a:t>Operations &amp; Booking Status (Page 2)</a:t>
-            </a:r>
-          </a:p>
-        </p:txBody>
-      </p:sp>
-      <p:sp>
-        <p:nvSpPr>
-          <p:cNvPr id="4" name="TextBox 3"/>
-          <p:cNvSpPr txBox="1"/>
-          <p:nvPr/>
-        </p:nvSpPr>
-        <p:spPr>
-          <a:xfrm>
-            <a:off x="457200" y="1188720"/>
-            <a:ext cx="11274552" cy="91440"/>
+            <a:off x="365760" y="6309360"/>
+            <a:ext cx="1371600" cy="365760"/>
           </a:xfrm>
           <a:prstGeom prst="rect">
             <a:avLst/>
@@ -3777,327 +5516,327 @@
           <a:lstStyle/>
           <a:p>
             <a:pPr>
-              <a:defRPr sz="800">
-                <a:solidFill>
-                  <a:srgbClr val="1E293B"/>
-                </a:solidFill>
-              </a:defRPr>
-            </a:pPr>
-            <a:r>
-              <a:t>⎯⎯⎯⎯⎯⎯⎯⎯⎯⎯⎯⎯⎯⎯⎯⎯⎯⎯⎯⎯⎯⎯⎯⎯⎯⎯⎯⎯⎯⎯⎯⎯⎯⎯⎯⎯⎯⎯⎯⎯⎯⎯⎯⎯⎯⎯⎯⎯⎯⎯⎯⎯⎯⎯⎯⎯⎯⎯⎯⎯⎯⎯⎯⎯⎯⎯⎯⎯⎯⎯⎯⎯⎯⎯⎯⎯⎯⎯⎯⎯⎯⎯⎯⎯⎯⎯⎯⎯⎯⎯⎯⎯⎯⎯⎯⎯⎯⎯⎯⎯⎯⎯⎯⎯⎯⎯⎯⎯⎯⎯⎯⎯⎯⎯⎯⎯⎯⎯⎯⎯</a:t>
-            </a:r>
-          </a:p>
-        </p:txBody>
-      </p:sp>
-      <p:sp>
-        <p:nvSpPr>
-          <p:cNvPr id="5" name="TextBox 4"/>
-          <p:cNvSpPr txBox="1"/>
-          <p:nvPr/>
-        </p:nvSpPr>
-        <p:spPr>
-          <a:xfrm>
-            <a:off x="457200" y="1645920"/>
-            <a:ext cx="4114800" cy="4572000"/>
-          </a:xfrm>
-          <a:prstGeom prst="rect">
-            <a:avLst/>
-          </a:prstGeom>
-          <a:noFill/>
-        </p:spPr>
-        <p:txBody>
-          <a:bodyPr wrap="square">
-            <a:spAutoFit/>
-          </a:bodyPr>
-          <a:lstStyle/>
-          <a:p>
-            <a:pPr>
-              <a:spcAft>
-                <a:spcPts val="1500"/>
-              </a:spcAft>
-              <a:defRPr sz="1400" b="1">
-                <a:solidFill>
-                  <a:srgbClr val="06B6D4"/>
-                </a:solidFill>
-              </a:defRPr>
-            </a:pPr>
-            <a:r>
-              <a:t>OPERATIONAL PERFORMANCE</a:t>
-            </a:r>
-          </a:p>
-          <a:p>
-            <a:pPr>
-              <a:defRPr sz="1200" b="1">
-                <a:solidFill>
-                  <a:srgbClr val="94A3B8"/>
-                </a:solidFill>
-              </a:defRPr>
-            </a:pPr>
-            <a:r>
-              <a:t>• Average Lead Time</a:t>
-            </a:r>
-          </a:p>
-          <a:p>
-            <a:pPr>
-              <a:defRPr sz="2000" b="1">
-                <a:solidFill>
-                  <a:srgbClr val="F1F5F9"/>
-                </a:solidFill>
-              </a:defRPr>
-            </a:pPr>
-            <a:r>
-              <a:t>   4.81 Days</a:t>
-            </a:r>
-          </a:p>
-          <a:p>
-            <a:pPr>
-              <a:spcAft>
-                <a:spcPts val="1200"/>
-              </a:spcAft>
-              <a:defRPr sz="1000">
-                <a:solidFill>
-                  <a:srgbClr val="94A3B8"/>
-                </a:solidFill>
-              </a:defRPr>
-            </a:pPr>
-            <a:r>
-              <a:t>   Average duration between booking date and journey date.</a:t>
-            </a:r>
-          </a:p>
-          <a:p>
-            <a:pPr>
-              <a:defRPr sz="1200" b="1">
-                <a:solidFill>
-                  <a:srgbClr val="94A3B8"/>
-                </a:solidFill>
-              </a:defRPr>
-            </a:pPr>
-            <a:r>
-              <a:t>• Confirmation Rate</a:t>
-            </a:r>
-          </a:p>
-          <a:p>
-            <a:pPr>
-              <a:defRPr sz="2000" b="1">
+              <a:defRPr sz="1100">
+                <a:solidFill>
+                  <a:srgbClr val="64748B"/>
+                </a:solidFill>
+                <a:latin typeface="Segoe UI"/>
+              </a:defRPr>
+            </a:pPr>
+            <a:r>
+              <a:t>3 / 14</a:t>
+            </a:r>
+          </a:p>
+        </p:txBody>
+      </p:sp>
+      <p:sp>
+        <p:nvSpPr>
+          <p:cNvPr id="6" name="Rounded Rectangle 5"/>
+          <p:cNvSpPr/>
+          <p:nvPr/>
+        </p:nvSpPr>
+        <p:spPr>
+          <a:xfrm>
+            <a:off x="877824" y="2468880"/>
+            <a:ext cx="3474720" cy="3657600"/>
+          </a:xfrm>
+          <a:prstGeom prst="roundRect">
+            <a:avLst/>
+          </a:prstGeom>
+          <a:solidFill>
+            <a:srgbClr val="1A152C"/>
+          </a:solidFill>
+          <a:ln>
+            <a:noFill/>
+          </a:ln>
+        </p:spPr>
+        <p:style>
+          <a:lnRef idx="1">
+            <a:schemeClr val="accent1"/>
+          </a:lnRef>
+          <a:fillRef idx="3">
+            <a:schemeClr val="accent1"/>
+          </a:fillRef>
+          <a:effectRef idx="2">
+            <a:schemeClr val="accent1"/>
+          </a:effectRef>
+          <a:fontRef idx="minor">
+            <a:schemeClr val="lt1"/>
+          </a:fontRef>
+        </p:style>
+        <p:txBody>
+          <a:bodyPr rtlCol="0" anchor="ctr" wrap="square" lIns="228600" tIns="228600" rIns="228600" bIns="228600"/>
+          <a:lstStyle/>
+          <a:p>
+            <a:pPr algn="ctr">
+              <a:spcAft>
+                <a:spcPts val="1400"/>
+              </a:spcAft>
+              <a:defRPr sz="1300" b="1">
+                <a:solidFill>
+                  <a:srgbClr val="EF4444"/>
+                </a:solidFill>
+                <a:latin typeface="Segoe UI"/>
+              </a:defRPr>
+            </a:pPr>
+            <a:r>
+              <a:t>⚡ THE PROBLEM</a:t>
+            </a:r>
+          </a:p>
+          <a:p>
+            <a:pPr>
+              <a:spcAft>
+                <a:spcPts val="1000"/>
+              </a:spcAft>
+              <a:defRPr sz="1100">
+                <a:solidFill>
+                  <a:srgbClr val="FFFFFF"/>
+                </a:solidFill>
+                <a:latin typeface="Segoe UI"/>
+              </a:defRPr>
+            </a:pPr>
+            <a:r>
+              <a:t>◆  Studios risk millions greenlighting films with no data-backed insights</a:t>
+            </a:r>
+          </a:p>
+          <a:p>
+            <a:pPr>
+              <a:spcAft>
+                <a:spcPts val="1000"/>
+              </a:spcAft>
+              <a:defRPr sz="1100">
+                <a:solidFill>
+                  <a:srgbClr val="FFFFFF"/>
+                </a:solidFill>
+                <a:latin typeface="Segoe UI"/>
+              </a:defRPr>
+            </a:pPr>
+            <a:r>
+              <a:t>◆  Intuition-based decisions fail to predict ratings or revenue</a:t>
+            </a:r>
+          </a:p>
+          <a:p>
+            <a:pPr>
+              <a:spcAft>
+                <a:spcPts val="1000"/>
+              </a:spcAft>
+              <a:defRPr sz="1100">
+                <a:solidFill>
+                  <a:srgbClr val="FFFFFF"/>
+                </a:solidFill>
+                <a:latin typeface="Segoe UI"/>
+              </a:defRPr>
+            </a:pPr>
+            <a:r>
+              <a:t>◆  Raw unstructured data hides critical patterns and trends</a:t>
+            </a:r>
+          </a:p>
+        </p:txBody>
+      </p:sp>
+      <p:sp>
+        <p:nvSpPr>
+          <p:cNvPr id="7" name="Rounded Rectangle 6"/>
+          <p:cNvSpPr/>
+          <p:nvPr/>
+        </p:nvSpPr>
+        <p:spPr>
+          <a:xfrm>
+            <a:off x="4626864" y="2468880"/>
+            <a:ext cx="3474720" cy="3657600"/>
+          </a:xfrm>
+          <a:prstGeom prst="roundRect">
+            <a:avLst/>
+          </a:prstGeom>
+          <a:solidFill>
+            <a:srgbClr val="1A152C"/>
+          </a:solidFill>
+          <a:ln>
+            <a:noFill/>
+          </a:ln>
+        </p:spPr>
+        <p:style>
+          <a:lnRef idx="1">
+            <a:schemeClr val="accent1"/>
+          </a:lnRef>
+          <a:fillRef idx="3">
+            <a:schemeClr val="accent1"/>
+          </a:fillRef>
+          <a:effectRef idx="2">
+            <a:schemeClr val="accent1"/>
+          </a:effectRef>
+          <a:fontRef idx="minor">
+            <a:schemeClr val="lt1"/>
+          </a:fontRef>
+        </p:style>
+        <p:txBody>
+          <a:bodyPr rtlCol="0" anchor="ctr" wrap="square" lIns="228600" tIns="228600" rIns="228600" bIns="228600"/>
+          <a:lstStyle/>
+          <a:p>
+            <a:pPr algn="ctr">
+              <a:spcAft>
+                <a:spcPts val="1400"/>
+              </a:spcAft>
+              <a:defRPr sz="1300" b="1">
                 <a:solidFill>
                   <a:srgbClr val="22C55E"/>
                 </a:solidFill>
-              </a:defRPr>
-            </a:pPr>
-            <a:r>
-              <a:t>   82.0%</a:t>
-            </a:r>
-          </a:p>
-          <a:p>
-            <a:pPr>
-              <a:spcAft>
-                <a:spcPts val="1200"/>
-              </a:spcAft>
-              <a:defRPr sz="1000">
-                <a:solidFill>
-                  <a:srgbClr val="94A3B8"/>
-                </a:solidFill>
-              </a:defRPr>
-            </a:pPr>
-            <a:r>
-              <a:t>   Percent of bookings transitioning to final confirmed status.</a:t>
-            </a:r>
-          </a:p>
-          <a:p>
-            <a:pPr>
-              <a:defRPr sz="1200" b="1">
-                <a:solidFill>
-                  <a:srgbClr val="94A3B8"/>
-                </a:solidFill>
-              </a:defRPr>
-            </a:pPr>
-            <a:r>
-              <a:t>• Cancellation Rate</a:t>
-            </a:r>
-          </a:p>
-          <a:p>
-            <a:pPr>
-              <a:defRPr sz="2000" b="1">
-                <a:solidFill>
-                  <a:srgbClr val="EF4444"/>
-                </a:solidFill>
-              </a:defRPr>
-            </a:pPr>
-            <a:r>
-              <a:t>   6.0%</a:t>
-            </a:r>
-          </a:p>
-          <a:p>
-            <a:pPr>
-              <a:spcAft>
-                <a:spcPts val="1200"/>
-              </a:spcAft>
-              <a:defRPr sz="1000">
-                <a:solidFill>
-                  <a:srgbClr val="94A3B8"/>
-                </a:solidFill>
-              </a:defRPr>
-            </a:pPr>
-            <a:r>
-              <a:t>   Percent of reservations cancelled (operational leakage).</a:t>
-            </a:r>
-          </a:p>
-          <a:p>
-            <a:pPr>
-              <a:defRPr sz="1200" b="1">
-                <a:solidFill>
-                  <a:srgbClr val="94A3B8"/>
-                </a:solidFill>
-              </a:defRPr>
-            </a:pPr>
-            <a:r>
-              <a:t>• Pending Rate</a:t>
-            </a:r>
-          </a:p>
-          <a:p>
-            <a:pPr>
-              <a:defRPr sz="2000" b="1">
-                <a:solidFill>
-                  <a:srgbClr val="94A3B8"/>
-                </a:solidFill>
-              </a:defRPr>
-            </a:pPr>
-            <a:r>
-              <a:t>   12.0%</a:t>
-            </a:r>
-          </a:p>
-          <a:p>
-            <a:pPr>
-              <a:spcAft>
-                <a:spcPts val="1200"/>
-              </a:spcAft>
-              <a:defRPr sz="1000">
-                <a:solidFill>
-                  <a:srgbClr val="94A3B8"/>
-                </a:solidFill>
-              </a:defRPr>
-            </a:pPr>
-            <a:r>
-              <a:t>   Percent of reservations remaining in pending verification.</a:t>
-            </a:r>
-          </a:p>
-        </p:txBody>
-      </p:sp>
-      <p:sp>
-        <p:nvSpPr>
-          <p:cNvPr id="6" name="TextBox 5"/>
-          <p:cNvSpPr txBox="1"/>
-          <p:nvPr/>
-        </p:nvSpPr>
-        <p:spPr>
-          <a:xfrm>
-            <a:off x="5029200" y="1645920"/>
-            <a:ext cx="6702552" cy="4572000"/>
-          </a:xfrm>
-          <a:prstGeom prst="rect">
-            <a:avLst/>
-          </a:prstGeom>
-          <a:noFill/>
-        </p:spPr>
-        <p:txBody>
-          <a:bodyPr wrap="square">
-            <a:spAutoFit/>
-          </a:bodyPr>
-          <a:lstStyle/>
-          <a:p>
-            <a:pPr>
-              <a:spcAft>
-                <a:spcPts val="1500"/>
-              </a:spcAft>
-              <a:defRPr sz="1400" b="1">
-                <a:solidFill>
-                  <a:srgbClr val="06B6D4"/>
-                </a:solidFill>
-              </a:defRPr>
-            </a:pPr>
-            <a:r>
-              <a:t>OPERATIONAL DISPATCH MATRIX</a:t>
-            </a:r>
-          </a:p>
-          <a:p>
-            <a:pPr>
+                <a:latin typeface="Segoe UI"/>
+              </a:defRPr>
+            </a:pPr>
+            <a:r>
+              <a:t>✓ OUR SOLUTION</a:t>
+            </a:r>
+          </a:p>
+          <a:p>
+            <a:pPr>
+              <a:spcAft>
+                <a:spcPts val="1000"/>
+              </a:spcAft>
+              <a:defRPr sz="1100">
+                <a:solidFill>
+                  <a:srgbClr val="FFFFFF"/>
+                </a:solidFill>
+                <a:latin typeface="Segoe UI"/>
+              </a:defRPr>
+            </a:pPr>
+            <a:r>
+              <a:t>◆  Clean &amp; preprocess 5,043-movie IMDB dataset with Python/Pandas</a:t>
+            </a:r>
+          </a:p>
+          <a:p>
+            <a:pPr>
+              <a:spcAft>
+                <a:spcPts val="1000"/>
+              </a:spcAft>
+              <a:defRPr sz="1100">
+                <a:solidFill>
+                  <a:srgbClr val="FFFFFF"/>
+                </a:solidFill>
+                <a:latin typeface="Segoe UI"/>
+              </a:defRPr>
+            </a:pPr>
+            <a:r>
+              <a:t>◆  Build normalized MySQL schema (3NF) with junction tables</a:t>
+            </a:r>
+          </a:p>
+          <a:p>
+            <a:pPr>
+              <a:spcAft>
+                <a:spcPts val="1000"/>
+              </a:spcAft>
+              <a:defRPr sz="1100">
+                <a:solidFill>
+                  <a:srgbClr val="FFFFFF"/>
+                </a:solidFill>
+                <a:latin typeface="Segoe UI"/>
+              </a:defRPr>
+            </a:pPr>
+            <a:r>
+              <a:t>◆  Create 7 interactive Plotly charts with real-time filtering</a:t>
+            </a:r>
+          </a:p>
+        </p:txBody>
+      </p:sp>
+      <p:sp>
+        <p:nvSpPr>
+          <p:cNvPr id="8" name="Rounded Rectangle 7"/>
+          <p:cNvSpPr/>
+          <p:nvPr/>
+        </p:nvSpPr>
+        <p:spPr>
+          <a:xfrm>
+            <a:off x="8375904" y="2468880"/>
+            <a:ext cx="3474720" cy="3657600"/>
+          </a:xfrm>
+          <a:prstGeom prst="roundRect">
+            <a:avLst/>
+          </a:prstGeom>
+          <a:solidFill>
+            <a:srgbClr val="1A152C"/>
+          </a:solidFill>
+          <a:ln>
+            <a:noFill/>
+          </a:ln>
+        </p:spPr>
+        <p:style>
+          <a:lnRef idx="1">
+            <a:schemeClr val="accent1"/>
+          </a:lnRef>
+          <a:fillRef idx="3">
+            <a:schemeClr val="accent1"/>
+          </a:fillRef>
+          <a:effectRef idx="2">
+            <a:schemeClr val="accent1"/>
+          </a:effectRef>
+          <a:fontRef idx="minor">
+            <a:schemeClr val="lt1"/>
+          </a:fontRef>
+        </p:style>
+        <p:txBody>
+          <a:bodyPr rtlCol="0" anchor="ctr" wrap="square" lIns="228600" tIns="228600" rIns="228600" bIns="228600"/>
+          <a:lstStyle/>
+          <a:p>
+            <a:pPr algn="ctr">
+              <a:spcAft>
+                <a:spcPts val="1400"/>
+              </a:spcAft>
               <a:defRPr sz="1300" b="1">
                 <a:solidFill>
-                  <a:srgbClr val="F1F5F9"/>
-                </a:solidFill>
-              </a:defRPr>
-            </a:pPr>
-            <a:r>
-              <a:t>▪ Lead Time Groups</a:t>
-            </a:r>
-          </a:p>
-          <a:p>
-            <a:pPr>
-              <a:spcAft>
-                <a:spcPts val="1500"/>
+                  <a:srgbClr val="EAB308"/>
+                </a:solidFill>
+                <a:latin typeface="Segoe UI"/>
+              </a:defRPr>
+            </a:pPr>
+            <a:r>
+              <a:t>🎯 IMPACT</a:t>
+            </a:r>
+          </a:p>
+          <a:p>
+            <a:pPr>
+              <a:spcAft>
+                <a:spcPts val="1000"/>
               </a:spcAft>
               <a:defRPr sz="1100">
                 <a:solidFill>
-                  <a:srgbClr val="94A3B8"/>
-                </a:solidFill>
-              </a:defRPr>
-            </a:pPr>
-            <a:r>
-              <a:t>Categorized into Same-Day, 1-3 Days, 4-7 Days, and 8+ Days. The bulk of reservations are booked 1-3 days in advance, allowing scheduling dispatch adjustments.</a:t>
-            </a:r>
-          </a:p>
-          <a:p>
-            <a:pPr>
-              <a:defRPr sz="1300" b="1">
-                <a:solidFill>
-                  <a:srgbClr val="F1F5F9"/>
-                </a:solidFill>
-              </a:defRPr>
-            </a:pPr>
-            <a:r>
-              <a:t>▪ Travel Demands by Bus Configuration</a:t>
-            </a:r>
-          </a:p>
-          <a:p>
-            <a:pPr>
-              <a:spcAft>
-                <a:spcPts val="1500"/>
+                  <a:srgbClr val="FFFFFF"/>
+                </a:solidFill>
+                <a:latin typeface="Segoe UI"/>
+              </a:defRPr>
+            </a:pPr>
+            <a:r>
+              <a:t>◆  Data-driven decisions reduce financial risk for studios</a:t>
+            </a:r>
+          </a:p>
+          <a:p>
+            <a:pPr>
+              <a:spcAft>
+                <a:spcPts val="1000"/>
               </a:spcAft>
               <a:defRPr sz="1100">
                 <a:solidFill>
-                  <a:srgbClr val="94A3B8"/>
-                </a:solidFill>
-              </a:defRPr>
-            </a:pPr>
-            <a:r>
-              <a:t>Non-AC Sleeper coaches register the highest booking frequency (3,143 reservations), followed by AC Sleeper (2,883) and AC Seater (2,476).</a:t>
-            </a:r>
-          </a:p>
-          <a:p>
-            <a:pPr>
-              <a:defRPr sz="1300" b="1">
-                <a:solidFill>
-                  <a:srgbClr val="F1F5F9"/>
-                </a:solidFill>
-              </a:defRPr>
-            </a:pPr>
-            <a:r>
-              <a:t>▪ Source Corridor Density</a:t>
-            </a:r>
-          </a:p>
-          <a:p>
-            <a:pPr>
-              <a:spcAft>
-                <a:spcPts val="1500"/>
+                  <a:srgbClr val="FFFFFF"/>
+                </a:solidFill>
+                <a:latin typeface="Segoe UI"/>
+              </a:defRPr>
+            </a:pPr>
+            <a:r>
+              <a:t>◆  Interactive dashboards enable on-the-fly business exploration</a:t>
+            </a:r>
+          </a:p>
+          <a:p>
+            <a:pPr>
+              <a:spcAft>
+                <a:spcPts val="1000"/>
               </a:spcAft>
               <a:defRPr sz="1100">
                 <a:solidFill>
-                  <a:srgbClr val="94A3B8"/>
-                </a:solidFill>
-              </a:defRPr>
-            </a:pPr>
-            <a:r>
-              <a:t>Delhi is the largest source hub (2,866 bookings), followed by Bangalore (2,100) and Mumbai (1,893), establishing key heavy-frequency corridors.</a:t>
+                  <a:srgbClr val="FFFFFF"/>
+                </a:solidFill>
+                <a:latin typeface="Segoe UI"/>
+              </a:defRPr>
+            </a:pPr>
+            <a:r>
+              <a:t>◆  Actionable genre &amp; director insights for stakeholders</a:t>
             </a:r>
           </a:p>
         </p:txBody>
@@ -4128,7 +5867,7 @@
     <p:bg>
       <p:bgPr>
         <a:solidFill>
-          <a:srgbClr val="0F172A"/>
+          <a:srgbClr val="FFFFFF"/>
         </a:solidFill>
         <a:effectLst/>
       </p:bgPr>
@@ -4148,8 +5887,68 @@
         </p:nvSpPr>
         <p:spPr>
           <a:xfrm>
-            <a:off x="457200" y="365760"/>
-            <a:ext cx="11274552" cy="274320"/>
+            <a:off x="548640" y="365760"/>
+            <a:ext cx="1371600" cy="822960"/>
+          </a:xfrm>
+          <a:prstGeom prst="rect">
+            <a:avLst/>
+          </a:prstGeom>
+          <a:noFill/>
+        </p:spPr>
+        <p:txBody>
+          <a:bodyPr wrap="none">
+            <a:spAutoFit/>
+          </a:bodyPr>
+          <a:lstStyle/>
+          <a:p>
+            <a:pPr>
+              <a:defRPr sz="3800" b="1">
+                <a:solidFill>
+                  <a:srgbClr val="06B6D4"/>
+                </a:solidFill>
+                <a:latin typeface="Segoe UI"/>
+              </a:defRPr>
+            </a:pPr>
+            <a:r>
+              <a:t>03</a:t>
+            </a:r>
+          </a:p>
+        </p:txBody>
+      </p:sp>
+      <p:sp>
+        <p:nvSpPr>
+          <p:cNvPr id="3" name="TextBox 2"/>
+          <p:cNvSpPr txBox="1"/>
+          <p:nvPr/>
+        </p:nvSpPr>
+        <p:spPr>
+          <a:xfrm>
+            <a:off x="548640" y="1280160"/>
+            <a:ext cx="3657600" cy="36576"/>
+          </a:xfrm>
+          <a:prstGeom prst="rect">
+            <a:avLst/>
+          </a:prstGeom>
+          <a:noFill/>
+        </p:spPr>
+        <p:txBody>
+          <a:bodyPr wrap="none">
+            <a:spAutoFit/>
+          </a:bodyPr>
+          <a:lstStyle/>
+          <a:p/>
+        </p:txBody>
+      </p:sp>
+      <p:sp>
+        <p:nvSpPr>
+          <p:cNvPr id="4" name="TextBox 3"/>
+          <p:cNvSpPr txBox="1"/>
+          <p:nvPr/>
+        </p:nvSpPr>
+        <p:spPr>
+          <a:xfrm>
+            <a:off x="548640" y="1417320"/>
+            <a:ext cx="8229600" cy="640080"/>
           </a:xfrm>
           <a:prstGeom prst="rect">
             <a:avLst/>
@@ -4163,65 +5962,29 @@
           <a:lstStyle/>
           <a:p>
             <a:pPr>
-              <a:defRPr sz="1000" b="1">
-                <a:solidFill>
-                  <a:srgbClr val="06B6D4"/>
-                </a:solidFill>
-                <a:latin typeface="Segoe UI"/>
-              </a:defRPr>
-            </a:pPr>
-            <a:r>
-              <a:t>BUS BOOKING ANALYTICS SYSTEM</a:t>
-            </a:r>
-          </a:p>
-        </p:txBody>
-      </p:sp>
-      <p:sp>
-        <p:nvSpPr>
-          <p:cNvPr id="3" name="TextBox 2"/>
+              <a:defRPr sz="2400" b="1">
+                <a:solidFill>
+                  <a:srgbClr val="054A75"/>
+                </a:solidFill>
+                <a:latin typeface="Segoe UI"/>
+              </a:defRPr>
+            </a:pPr>
+            <a:r>
+              <a:t>Tools &amp; Technology Stack</a:t>
+            </a:r>
+          </a:p>
+        </p:txBody>
+      </p:sp>
+      <p:sp>
+        <p:nvSpPr>
+          <p:cNvPr id="5" name="TextBox 4"/>
           <p:cNvSpPr txBox="1"/>
           <p:nvPr/>
         </p:nvSpPr>
         <p:spPr>
           <a:xfrm>
-            <a:off x="457200" y="594360"/>
-            <a:ext cx="11274552" cy="731520"/>
-          </a:xfrm>
-          <a:prstGeom prst="rect">
-            <a:avLst/>
-          </a:prstGeom>
-          <a:noFill/>
-        </p:spPr>
-        <p:txBody>
-          <a:bodyPr wrap="square">
-            <a:spAutoFit/>
-          </a:bodyPr>
-          <a:lstStyle/>
-          <a:p>
-            <a:pPr>
-              <a:defRPr sz="2800" b="1">
-                <a:solidFill>
-                  <a:srgbClr val="F1F5F9"/>
-                </a:solidFill>
-                <a:latin typeface="Segoe UI"/>
-              </a:defRPr>
-            </a:pPr>
-            <a:r>
-              <a:t>Revenue, Leakage &amp; Fare Yields (Page 3)</a:t>
-            </a:r>
-          </a:p>
-        </p:txBody>
-      </p:sp>
-      <p:sp>
-        <p:nvSpPr>
-          <p:cNvPr id="4" name="TextBox 3"/>
-          <p:cNvSpPr txBox="1"/>
-          <p:nvPr/>
-        </p:nvSpPr>
-        <p:spPr>
-          <a:xfrm>
-            <a:off x="457200" y="1188720"/>
-            <a:ext cx="11274552" cy="91440"/>
+            <a:off x="365760" y="6309360"/>
+            <a:ext cx="1371600" cy="365760"/>
           </a:xfrm>
           <a:prstGeom prst="rect">
             <a:avLst/>
@@ -4235,327 +5998,431 @@
           <a:lstStyle/>
           <a:p>
             <a:pPr>
-              <a:defRPr sz="800">
-                <a:solidFill>
-                  <a:srgbClr val="1E293B"/>
-                </a:solidFill>
-              </a:defRPr>
-            </a:pPr>
-            <a:r>
-              <a:t>⎯⎯⎯⎯⎯⎯⎯⎯⎯⎯⎯⎯⎯⎯⎯⎯⎯⎯⎯⎯⎯⎯⎯⎯⎯⎯⎯⎯⎯⎯⎯⎯⎯⎯⎯⎯⎯⎯⎯⎯⎯⎯⎯⎯⎯⎯⎯⎯⎯⎯⎯⎯⎯⎯⎯⎯⎯⎯⎯⎯⎯⎯⎯⎯⎯⎯⎯⎯⎯⎯⎯⎯⎯⎯⎯⎯⎯⎯⎯⎯⎯⎯⎯⎯⎯⎯⎯⎯⎯⎯⎯⎯⎯⎯⎯⎯⎯⎯⎯⎯⎯⎯⎯⎯⎯⎯⎯⎯⎯⎯⎯⎯⎯⎯⎯⎯⎯⎯⎯⎯</a:t>
-            </a:r>
-          </a:p>
-        </p:txBody>
-      </p:sp>
-      <p:sp>
-        <p:nvSpPr>
-          <p:cNvPr id="5" name="TextBox 4"/>
-          <p:cNvSpPr txBox="1"/>
-          <p:nvPr/>
-        </p:nvSpPr>
-        <p:spPr>
-          <a:xfrm>
-            <a:off x="457200" y="1645920"/>
-            <a:ext cx="4114800" cy="4572000"/>
-          </a:xfrm>
-          <a:prstGeom prst="rect">
-            <a:avLst/>
-          </a:prstGeom>
-          <a:noFill/>
-        </p:spPr>
-        <p:txBody>
-          <a:bodyPr wrap="square">
-            <a:spAutoFit/>
-          </a:bodyPr>
-          <a:lstStyle/>
-          <a:p>
-            <a:pPr>
-              <a:spcAft>
-                <a:spcPts val="1500"/>
-              </a:spcAft>
-              <a:defRPr sz="1400" b="1">
+              <a:defRPr sz="1100">
+                <a:solidFill>
+                  <a:srgbClr val="64748B"/>
+                </a:solidFill>
+                <a:latin typeface="Segoe UI"/>
+              </a:defRPr>
+            </a:pPr>
+            <a:r>
+              <a:t>4 / 14</a:t>
+            </a:r>
+          </a:p>
+        </p:txBody>
+      </p:sp>
+      <p:sp>
+        <p:nvSpPr>
+          <p:cNvPr id="6" name="Rounded Rectangle 5"/>
+          <p:cNvSpPr/>
+          <p:nvPr/>
+        </p:nvSpPr>
+        <p:spPr>
+          <a:xfrm>
+            <a:off x="969264" y="2560320"/>
+            <a:ext cx="2560320" cy="3383280"/>
+          </a:xfrm>
+          <a:prstGeom prst="roundRect">
+            <a:avLst/>
+          </a:prstGeom>
+          <a:solidFill>
+            <a:srgbClr val="1A152C"/>
+          </a:solidFill>
+          <a:ln>
+            <a:noFill/>
+          </a:ln>
+        </p:spPr>
+        <p:style>
+          <a:lnRef idx="1">
+            <a:schemeClr val="accent1"/>
+          </a:lnRef>
+          <a:fillRef idx="3">
+            <a:schemeClr val="accent1"/>
+          </a:fillRef>
+          <a:effectRef idx="2">
+            <a:schemeClr val="accent1"/>
+          </a:effectRef>
+          <a:fontRef idx="minor">
+            <a:schemeClr val="lt1"/>
+          </a:fontRef>
+        </p:style>
+        <p:txBody>
+          <a:bodyPr rtlCol="0" anchor="ctr" wrap="square" lIns="228600" tIns="228600" rIns="228600" bIns="228600"/>
+          <a:lstStyle/>
+          <a:p>
+            <a:pPr algn="ctr">
+              <a:spcAft>
+                <a:spcPts val="1400"/>
+              </a:spcAft>
+              <a:defRPr sz="1300" b="1">
                 <a:solidFill>
                   <a:srgbClr val="06B6D4"/>
                 </a:solidFill>
-              </a:defRPr>
-            </a:pPr>
-            <a:r>
-              <a:t>REVENUE SUMMARY</a:t>
-            </a:r>
-          </a:p>
-          <a:p>
-            <a:pPr>
-              <a:defRPr sz="1200" b="1">
-                <a:solidFill>
-                  <a:srgbClr val="94A3B8"/>
-                </a:solidFill>
-              </a:defRPr>
-            </a:pPr>
-            <a:r>
-              <a:t>• Total Revenue</a:t>
-            </a:r>
-          </a:p>
-          <a:p>
-            <a:pPr>
-              <a:defRPr sz="2000" b="1">
-                <a:solidFill>
-                  <a:srgbClr val="F1F5F9"/>
-                </a:solidFill>
-              </a:defRPr>
-            </a:pPr>
-            <a:r>
-              <a:t>   $8.90M</a:t>
-            </a:r>
-          </a:p>
-          <a:p>
-            <a:pPr>
-              <a:spcAft>
-                <a:spcPts val="1200"/>
-              </a:spcAft>
-              <a:defRPr sz="1000">
-                <a:solidFill>
-                  <a:srgbClr val="94A3B8"/>
-                </a:solidFill>
-              </a:defRPr>
-            </a:pPr>
-            <a:r>
-              <a:t>   Total gross ticket sales generated over 18 months.</a:t>
-            </a:r>
-          </a:p>
-          <a:p>
-            <a:pPr>
-              <a:defRPr sz="1200" b="1">
-                <a:solidFill>
-                  <a:srgbClr val="94A3B8"/>
-                </a:solidFill>
-              </a:defRPr>
-            </a:pPr>
-            <a:r>
-              <a:t>• Average Ticket Fare</a:t>
-            </a:r>
-          </a:p>
-          <a:p>
-            <a:pPr>
-              <a:defRPr sz="2000" b="1">
-                <a:solidFill>
-                  <a:srgbClr val="F1F5F9"/>
-                </a:solidFill>
-              </a:defRPr>
-            </a:pPr>
-            <a:r>
-              <a:t>   $857.29</a:t>
-            </a:r>
-          </a:p>
-          <a:p>
-            <a:pPr>
-              <a:spcAft>
-                <a:spcPts val="1200"/>
-              </a:spcAft>
-              <a:defRPr sz="1000">
-                <a:solidFill>
-                  <a:srgbClr val="94A3B8"/>
-                </a:solidFill>
-              </a:defRPr>
-            </a:pPr>
-            <a:r>
-              <a:t>   Average purchase price across all booked seats.</a:t>
-            </a:r>
-          </a:p>
-          <a:p>
-            <a:pPr>
-              <a:defRPr sz="1200" b="1">
-                <a:solidFill>
-                  <a:srgbClr val="94A3B8"/>
-                </a:solidFill>
-              </a:defRPr>
-            </a:pPr>
-            <a:r>
-              <a:t>• Revenue Leakage</a:t>
-            </a:r>
-          </a:p>
-          <a:p>
-            <a:pPr>
-              <a:defRPr sz="2000" b="1">
-                <a:solidFill>
-                  <a:srgbClr val="EF4444"/>
-                </a:solidFill>
-              </a:defRPr>
-            </a:pPr>
-            <a:r>
-              <a:t>   $519.84K</a:t>
-            </a:r>
-          </a:p>
-          <a:p>
-            <a:pPr>
-              <a:spcAft>
-                <a:spcPts val="1200"/>
-              </a:spcAft>
-              <a:defRPr sz="1000">
-                <a:solidFill>
-                  <a:srgbClr val="94A3B8"/>
-                </a:solidFill>
-              </a:defRPr>
-            </a:pPr>
-            <a:r>
-              <a:t>   Revenue lost due to cancelled booking rows.</a:t>
-            </a:r>
-          </a:p>
-          <a:p>
-            <a:pPr>
-              <a:defRPr sz="1200" b="1">
-                <a:solidFill>
-                  <a:srgbClr val="94A3B8"/>
-                </a:solidFill>
-              </a:defRPr>
-            </a:pPr>
-            <a:r>
-              <a:t>• Net Realized Revenue</a:t>
-            </a:r>
-          </a:p>
-          <a:p>
-            <a:pPr>
-              <a:defRPr sz="2000" b="1">
-                <a:solidFill>
-                  <a:srgbClr val="22C55E"/>
-                </a:solidFill>
-              </a:defRPr>
-            </a:pPr>
-            <a:r>
-              <a:t>   $8.38M</a:t>
-            </a:r>
-          </a:p>
-          <a:p>
-            <a:pPr>
-              <a:spcAft>
-                <a:spcPts val="1200"/>
-              </a:spcAft>
-              <a:defRPr sz="1000">
-                <a:solidFill>
-                  <a:srgbClr val="94A3B8"/>
-                </a:solidFill>
-              </a:defRPr>
-            </a:pPr>
-            <a:r>
-              <a:t>   Total net cash receipts (gross sales minus cancellations).</a:t>
-            </a:r>
-          </a:p>
-        </p:txBody>
-      </p:sp>
-      <p:sp>
-        <p:nvSpPr>
-          <p:cNvPr id="6" name="TextBox 5"/>
-          <p:cNvSpPr txBox="1"/>
-          <p:nvPr/>
-        </p:nvSpPr>
-        <p:spPr>
-          <a:xfrm>
-            <a:off x="5029200" y="1645920"/>
-            <a:ext cx="6702552" cy="4572000"/>
-          </a:xfrm>
-          <a:prstGeom prst="rect">
-            <a:avLst/>
-          </a:prstGeom>
-          <a:noFill/>
-        </p:spPr>
-        <p:txBody>
-          <a:bodyPr wrap="square">
-            <a:spAutoFit/>
-          </a:bodyPr>
-          <a:lstStyle/>
-          <a:p>
-            <a:pPr>
-              <a:spcAft>
-                <a:spcPts val="1500"/>
-              </a:spcAft>
-              <a:defRPr sz="1400" b="1">
+                <a:latin typeface="Segoe UI"/>
+              </a:defRPr>
+            </a:pPr>
+            <a:r>
+              <a:t>Python 3</a:t>
+            </a:r>
+          </a:p>
+          <a:p>
+            <a:pPr>
+              <a:spcAft>
+                <a:spcPts val="1000"/>
+              </a:spcAft>
+              <a:defRPr sz="1100">
+                <a:solidFill>
+                  <a:srgbClr val="FFFFFF"/>
+                </a:solidFill>
+                <a:latin typeface="Segoe UI"/>
+              </a:defRPr>
+            </a:pPr>
+            <a:r>
+              <a:t>◆  Pandas, NumPy libraries</a:t>
+            </a:r>
+          </a:p>
+          <a:p>
+            <a:pPr>
+              <a:spcAft>
+                <a:spcPts val="1000"/>
+              </a:spcAft>
+              <a:defRPr sz="1100">
+                <a:solidFill>
+                  <a:srgbClr val="FFFFFF"/>
+                </a:solidFill>
+                <a:latin typeface="Segoe UI"/>
+              </a:defRPr>
+            </a:pPr>
+            <a:r>
+              <a:t>◆  Core data cleaning engine</a:t>
+            </a:r>
+          </a:p>
+          <a:p>
+            <a:pPr>
+              <a:spcAft>
+                <a:spcPts val="1000"/>
+              </a:spcAft>
+              <a:defRPr sz="1100">
+                <a:solidFill>
+                  <a:srgbClr val="FFFFFF"/>
+                </a:solidFill>
+                <a:latin typeface="Segoe UI"/>
+              </a:defRPr>
+            </a:pPr>
+            <a:r>
+              <a:t>◆  Constraint verification</a:t>
+            </a:r>
+          </a:p>
+        </p:txBody>
+      </p:sp>
+      <p:sp>
+        <p:nvSpPr>
+          <p:cNvPr id="7" name="Rounded Rectangle 6"/>
+          <p:cNvSpPr/>
+          <p:nvPr/>
+        </p:nvSpPr>
+        <p:spPr>
+          <a:xfrm>
+            <a:off x="3803904" y="2560320"/>
+            <a:ext cx="2560320" cy="3383280"/>
+          </a:xfrm>
+          <a:prstGeom prst="roundRect">
+            <a:avLst/>
+          </a:prstGeom>
+          <a:solidFill>
+            <a:srgbClr val="1A152C"/>
+          </a:solidFill>
+          <a:ln>
+            <a:noFill/>
+          </a:ln>
+        </p:spPr>
+        <p:style>
+          <a:lnRef idx="1">
+            <a:schemeClr val="accent1"/>
+          </a:lnRef>
+          <a:fillRef idx="3">
+            <a:schemeClr val="accent1"/>
+          </a:fillRef>
+          <a:effectRef idx="2">
+            <a:schemeClr val="accent1"/>
+          </a:effectRef>
+          <a:fontRef idx="minor">
+            <a:schemeClr val="lt1"/>
+          </a:fontRef>
+        </p:style>
+        <p:txBody>
+          <a:bodyPr rtlCol="0" anchor="ctr" wrap="square" lIns="228600" tIns="228600" rIns="228600" bIns="228600"/>
+          <a:lstStyle/>
+          <a:p>
+            <a:pPr algn="ctr">
+              <a:spcAft>
+                <a:spcPts val="1400"/>
+              </a:spcAft>
+              <a:defRPr sz="1300" b="1">
                 <a:solidFill>
                   <a:srgbClr val="06B6D4"/>
                 </a:solidFill>
-              </a:defRPr>
-            </a:pPr>
-            <a:r>
-              <a:t>FINANCIAL YIELD INSIGHTS</a:t>
-            </a:r>
-          </a:p>
-          <a:p>
-            <a:pPr>
+                <a:latin typeface="Segoe UI"/>
+              </a:defRPr>
+            </a:pPr>
+            <a:r>
+              <a:t>MySQL</a:t>
+            </a:r>
+          </a:p>
+          <a:p>
+            <a:pPr>
+              <a:spcAft>
+                <a:spcPts val="1000"/>
+              </a:spcAft>
+              <a:defRPr sz="1100">
+                <a:solidFill>
+                  <a:srgbClr val="FFFFFF"/>
+                </a:solidFill>
+                <a:latin typeface="Segoe UI"/>
+              </a:defRPr>
+            </a:pPr>
+            <a:r>
+              <a:t>◆  Relational tables structure</a:t>
+            </a:r>
+          </a:p>
+          <a:p>
+            <a:pPr>
+              <a:spcAft>
+                <a:spcPts val="1000"/>
+              </a:spcAft>
+              <a:defRPr sz="1100">
+                <a:solidFill>
+                  <a:srgbClr val="FFFFFF"/>
+                </a:solidFill>
+                <a:latin typeface="Segoe UI"/>
+              </a:defRPr>
+            </a:pPr>
+            <a:r>
+              <a:t>◆  Durable staging keys</a:t>
+            </a:r>
+          </a:p>
+          <a:p>
+            <a:pPr>
+              <a:spcAft>
+                <a:spcPts val="1000"/>
+              </a:spcAft>
+              <a:defRPr sz="1100">
+                <a:solidFill>
+                  <a:srgbClr val="FFFFFF"/>
+                </a:solidFill>
+                <a:latin typeface="Segoe UI"/>
+              </a:defRPr>
+            </a:pPr>
+            <a:r>
+              <a:t>◆  Performance indexes</a:t>
+            </a:r>
+          </a:p>
+        </p:txBody>
+      </p:sp>
+      <p:sp>
+        <p:nvSpPr>
+          <p:cNvPr id="8" name="Rounded Rectangle 7"/>
+          <p:cNvSpPr/>
+          <p:nvPr/>
+        </p:nvSpPr>
+        <p:spPr>
+          <a:xfrm>
+            <a:off x="6638544" y="2560320"/>
+            <a:ext cx="2560320" cy="3383280"/>
+          </a:xfrm>
+          <a:prstGeom prst="roundRect">
+            <a:avLst/>
+          </a:prstGeom>
+          <a:solidFill>
+            <a:srgbClr val="1A152C"/>
+          </a:solidFill>
+          <a:ln>
+            <a:noFill/>
+          </a:ln>
+        </p:spPr>
+        <p:style>
+          <a:lnRef idx="1">
+            <a:schemeClr val="accent1"/>
+          </a:lnRef>
+          <a:fillRef idx="3">
+            <a:schemeClr val="accent1"/>
+          </a:fillRef>
+          <a:effectRef idx="2">
+            <a:schemeClr val="accent1"/>
+          </a:effectRef>
+          <a:fontRef idx="minor">
+            <a:schemeClr val="lt1"/>
+          </a:fontRef>
+        </p:style>
+        <p:txBody>
+          <a:bodyPr rtlCol="0" anchor="ctr" wrap="square" lIns="228600" tIns="228600" rIns="228600" bIns="228600"/>
+          <a:lstStyle/>
+          <a:p>
+            <a:pPr algn="ctr">
+              <a:spcAft>
+                <a:spcPts val="1400"/>
+              </a:spcAft>
               <a:defRPr sz="1300" b="1">
                 <a:solidFill>
-                  <a:srgbClr val="F1F5F9"/>
-                </a:solidFill>
-              </a:defRPr>
-            </a:pPr>
-            <a:r>
-              <a:t>▪ Revenue by Bus Configuration</a:t>
-            </a:r>
-          </a:p>
-          <a:p>
-            <a:pPr>
-              <a:spcAft>
-                <a:spcPts val="1500"/>
+                  <a:srgbClr val="06B6D4"/>
+                </a:solidFill>
+                <a:latin typeface="Segoe UI"/>
+              </a:defRPr>
+            </a:pPr>
+            <a:r>
+              <a:t>Power BI</a:t>
+            </a:r>
+          </a:p>
+          <a:p>
+            <a:pPr>
+              <a:spcAft>
+                <a:spcPts val="1000"/>
               </a:spcAft>
               <a:defRPr sz="1100">
                 <a:solidFill>
-                  <a:srgbClr val="94A3B8"/>
-                </a:solidFill>
-              </a:defRPr>
-            </a:pPr>
-            <a:r>
-              <a:t>Premium AC Sleeper coaches command the highest average ticket yield ($952 per seat), followed by Non-AC Sleepers ($880) and AC Seaters ($718).</a:t>
-            </a:r>
-          </a:p>
-          <a:p>
-            <a:pPr>
+                  <a:srgbClr val="FFFFFF"/>
+                </a:solidFill>
+                <a:latin typeface="Segoe UI"/>
+              </a:defRPr>
+            </a:pPr>
+            <a:r>
+              <a:t>◆  Corporate data dashboards</a:t>
+            </a:r>
+          </a:p>
+          <a:p>
+            <a:pPr>
+              <a:spcAft>
+                <a:spcPts val="1000"/>
+              </a:spcAft>
+              <a:defRPr sz="1100">
+                <a:solidFill>
+                  <a:srgbClr val="FFFFFF"/>
+                </a:solidFill>
+                <a:latin typeface="Segoe UI"/>
+              </a:defRPr>
+            </a:pPr>
+            <a:r>
+              <a:t>◆  Dynamic slicer panels</a:t>
+            </a:r>
+          </a:p>
+          <a:p>
+            <a:pPr>
+              <a:spcAft>
+                <a:spcPts val="1000"/>
+              </a:spcAft>
+              <a:defRPr sz="1100">
+                <a:solidFill>
+                  <a:srgbClr val="FFFFFF"/>
+                </a:solidFill>
+                <a:latin typeface="Segoe UI"/>
+              </a:defRPr>
+            </a:pPr>
+            <a:r>
+              <a:t>◆  Executive summaries</a:t>
+            </a:r>
+          </a:p>
+        </p:txBody>
+      </p:sp>
+      <p:sp>
+        <p:nvSpPr>
+          <p:cNvPr id="9" name="Rounded Rectangle 8"/>
+          <p:cNvSpPr/>
+          <p:nvPr/>
+        </p:nvSpPr>
+        <p:spPr>
+          <a:xfrm>
+            <a:off x="9473184" y="2560320"/>
+            <a:ext cx="2560320" cy="3383280"/>
+          </a:xfrm>
+          <a:prstGeom prst="roundRect">
+            <a:avLst/>
+          </a:prstGeom>
+          <a:solidFill>
+            <a:srgbClr val="1A152C"/>
+          </a:solidFill>
+          <a:ln>
+            <a:noFill/>
+          </a:ln>
+        </p:spPr>
+        <p:style>
+          <a:lnRef idx="1">
+            <a:schemeClr val="accent1"/>
+          </a:lnRef>
+          <a:fillRef idx="3">
+            <a:schemeClr val="accent1"/>
+          </a:fillRef>
+          <a:effectRef idx="2">
+            <a:schemeClr val="accent1"/>
+          </a:effectRef>
+          <a:fontRef idx="minor">
+            <a:schemeClr val="lt1"/>
+          </a:fontRef>
+        </p:style>
+        <p:txBody>
+          <a:bodyPr rtlCol="0" anchor="ctr" wrap="square" lIns="228600" tIns="228600" rIns="228600" bIns="228600"/>
+          <a:lstStyle/>
+          <a:p>
+            <a:pPr algn="ctr">
+              <a:spcAft>
+                <a:spcPts val="1400"/>
+              </a:spcAft>
               <a:defRPr sz="1300" b="1">
                 <a:solidFill>
-                  <a:srgbClr val="F1F5F9"/>
-                </a:solidFill>
-              </a:defRPr>
-            </a:pPr>
-            <a:r>
-              <a:t>▪ Yield Correlation by Distance Class</a:t>
-            </a:r>
-          </a:p>
-          <a:p>
-            <a:pPr>
-              <a:spcAft>
-                <a:spcPts val="1500"/>
+                  <a:srgbClr val="06B6D4"/>
+                </a:solidFill>
+                <a:latin typeface="Segoe UI"/>
+              </a:defRPr>
+            </a:pPr>
+            <a:r>
+              <a:t>DAX &amp; PQ</a:t>
+            </a:r>
+          </a:p>
+          <a:p>
+            <a:pPr>
+              <a:spcAft>
+                <a:spcPts val="1000"/>
               </a:spcAft>
               <a:defRPr sz="1100">
                 <a:solidFill>
-                  <a:srgbClr val="94A3B8"/>
-                </a:solidFill>
-              </a:defRPr>
-            </a:pPr>
-            <a:r>
-              <a:t>Confirms pricing model integrity. Longer routes (e.g. &gt;550km like Chennai-Hyderabad) show proportionate revenue scaling, maximizing return per mile.</a:t>
-            </a:r>
-          </a:p>
-          <a:p>
-            <a:pPr>
-              <a:defRPr sz="1300" b="1">
-                <a:solidFill>
-                  <a:srgbClr val="F1F5F9"/>
-                </a:solidFill>
-              </a:defRPr>
-            </a:pPr>
-            <a:r>
-              <a:t>▪ Monthly Revenue Curve</a:t>
-            </a:r>
-          </a:p>
-          <a:p>
-            <a:pPr>
-              <a:spcAft>
-                <a:spcPts val="1500"/>
+                  <a:srgbClr val="FFFFFF"/>
+                </a:solidFill>
+                <a:latin typeface="Segoe UI"/>
+              </a:defRPr>
+            </a:pPr>
+            <a:r>
+              <a:t>◆  Custom calculated measures</a:t>
+            </a:r>
+          </a:p>
+          <a:p>
+            <a:pPr>
+              <a:spcAft>
+                <a:spcPts val="1000"/>
               </a:spcAft>
               <a:defRPr sz="1100">
                 <a:solidFill>
-                  <a:srgbClr val="94A3B8"/>
-                </a:solidFill>
-              </a:defRPr>
-            </a:pPr>
-            <a:r>
-              <a:t>Demonstrates stable seasonal cash flow peaks in spring and autumn, dropping in summer/winter, helping treasury plan cash flow reserves.</a:t>
+                  <a:srgbClr val="FFFFFF"/>
+                </a:solidFill>
+                <a:latin typeface="Segoe UI"/>
+              </a:defRPr>
+            </a:pPr>
+            <a:r>
+              <a:t>◆  Power Query pipelines</a:t>
+            </a:r>
+          </a:p>
+          <a:p>
+            <a:pPr>
+              <a:spcAft>
+                <a:spcPts val="1000"/>
+              </a:spcAft>
+              <a:defRPr sz="1100">
+                <a:solidFill>
+                  <a:srgbClr val="FFFFFF"/>
+                </a:solidFill>
+                <a:latin typeface="Segoe UI"/>
+              </a:defRPr>
+            </a:pPr>
+            <a:r>
+              <a:t>◆  Star-schema modeling</a:t>
             </a:r>
           </a:p>
         </p:txBody>
@@ -4565,12 +6432,12 @@
   <mc:AlternateContent xmlns:mc="http://schemas.openxmlformats.org/markup-compatibility/2006">
     <mc:Choice xmlns:p14="http://schemas.microsoft.com/office/powerpoint/2010/main" Requires="p14">
       <p:transition spd="slow">
-        <p:fade/>
+        <p:wipe dir="l"/>
       </p:transition>
     </mc:Choice>
     <mc:Fallback>
       <p:transition spd="slow">
-        <p:fade/>
+        <p:wipe dir="l"/>
       </p:transition>
     </mc:Fallback>
   </mc:AlternateContent>
@@ -4586,7 +6453,7 @@
     <p:bg>
       <p:bgPr>
         <a:solidFill>
-          <a:srgbClr val="0F172A"/>
+          <a:srgbClr val="FFFFFF"/>
         </a:solidFill>
         <a:effectLst/>
       </p:bgPr>
@@ -4606,8 +6473,68 @@
         </p:nvSpPr>
         <p:spPr>
           <a:xfrm>
-            <a:off x="457200" y="365760"/>
-            <a:ext cx="11274552" cy="274320"/>
+            <a:off x="548640" y="365760"/>
+            <a:ext cx="1371600" cy="822960"/>
+          </a:xfrm>
+          <a:prstGeom prst="rect">
+            <a:avLst/>
+          </a:prstGeom>
+          <a:noFill/>
+        </p:spPr>
+        <p:txBody>
+          <a:bodyPr wrap="none">
+            <a:spAutoFit/>
+          </a:bodyPr>
+          <a:lstStyle/>
+          <a:p>
+            <a:pPr>
+              <a:defRPr sz="3800" b="1">
+                <a:solidFill>
+                  <a:srgbClr val="06B6D4"/>
+                </a:solidFill>
+                <a:latin typeface="Segoe UI"/>
+              </a:defRPr>
+            </a:pPr>
+            <a:r>
+              <a:t>04</a:t>
+            </a:r>
+          </a:p>
+        </p:txBody>
+      </p:sp>
+      <p:sp>
+        <p:nvSpPr>
+          <p:cNvPr id="3" name="TextBox 2"/>
+          <p:cNvSpPr txBox="1"/>
+          <p:nvPr/>
+        </p:nvSpPr>
+        <p:spPr>
+          <a:xfrm>
+            <a:off x="548640" y="1280160"/>
+            <a:ext cx="3657600" cy="36576"/>
+          </a:xfrm>
+          <a:prstGeom prst="rect">
+            <a:avLst/>
+          </a:prstGeom>
+          <a:noFill/>
+        </p:spPr>
+        <p:txBody>
+          <a:bodyPr wrap="none">
+            <a:spAutoFit/>
+          </a:bodyPr>
+          <a:lstStyle/>
+          <a:p/>
+        </p:txBody>
+      </p:sp>
+      <p:sp>
+        <p:nvSpPr>
+          <p:cNvPr id="4" name="TextBox 3"/>
+          <p:cNvSpPr txBox="1"/>
+          <p:nvPr/>
+        </p:nvSpPr>
+        <p:spPr>
+          <a:xfrm>
+            <a:off x="548640" y="1417320"/>
+            <a:ext cx="8229600" cy="640080"/>
           </a:xfrm>
           <a:prstGeom prst="rect">
             <a:avLst/>
@@ -4621,7 +6548,79 @@
           <a:lstStyle/>
           <a:p>
             <a:pPr>
-              <a:defRPr sz="1000" b="1">
+              <a:defRPr sz="2400" b="1">
+                <a:solidFill>
+                  <a:srgbClr val="054A75"/>
+                </a:solidFill>
+                <a:latin typeface="Segoe UI"/>
+              </a:defRPr>
+            </a:pPr>
+            <a:r>
+              <a:t>Data Preprocessing &amp; Cleaning</a:t>
+            </a:r>
+          </a:p>
+        </p:txBody>
+      </p:sp>
+      <p:sp>
+        <p:nvSpPr>
+          <p:cNvPr id="5" name="TextBox 4"/>
+          <p:cNvSpPr txBox="1"/>
+          <p:nvPr/>
+        </p:nvSpPr>
+        <p:spPr>
+          <a:xfrm>
+            <a:off x="365760" y="6309360"/>
+            <a:ext cx="1371600" cy="365760"/>
+          </a:xfrm>
+          <a:prstGeom prst="rect">
+            <a:avLst/>
+          </a:prstGeom>
+          <a:noFill/>
+        </p:spPr>
+        <p:txBody>
+          <a:bodyPr wrap="none">
+            <a:spAutoFit/>
+          </a:bodyPr>
+          <a:lstStyle/>
+          <a:p>
+            <a:pPr>
+              <a:defRPr sz="1100">
+                <a:solidFill>
+                  <a:srgbClr val="64748B"/>
+                </a:solidFill>
+                <a:latin typeface="Segoe UI"/>
+              </a:defRPr>
+            </a:pPr>
+            <a:r>
+              <a:t>5 / 14</a:t>
+            </a:r>
+          </a:p>
+        </p:txBody>
+      </p:sp>
+      <p:sp>
+        <p:nvSpPr>
+          <p:cNvPr id="6" name="TextBox 5"/>
+          <p:cNvSpPr txBox="1"/>
+          <p:nvPr/>
+        </p:nvSpPr>
+        <p:spPr>
+          <a:xfrm>
+            <a:off x="557784" y="2377440"/>
+            <a:ext cx="5303520" cy="457200"/>
+          </a:xfrm>
+          <a:prstGeom prst="rect">
+            <a:avLst/>
+          </a:prstGeom>
+          <a:noFill/>
+        </p:spPr>
+        <p:txBody>
+          <a:bodyPr wrap="none">
+            <a:spAutoFit/>
+          </a:bodyPr>
+          <a:lstStyle/>
+          <a:p>
+            <a:pPr>
+              <a:defRPr sz="1600" b="1">
                 <a:solidFill>
                   <a:srgbClr val="06B6D4"/>
                 </a:solidFill>
@@ -4629,21 +6628,21 @@
               </a:defRPr>
             </a:pPr>
             <a:r>
-              <a:t>BUS BOOKING ANALYTICS SYSTEM</a:t>
-            </a:r>
-          </a:p>
-        </p:txBody>
-      </p:sp>
-      <p:sp>
-        <p:nvSpPr>
-          <p:cNvPr id="3" name="TextBox 2"/>
+              <a:t>Automated Data Cleansing Steps</a:t>
+            </a:r>
+          </a:p>
+        </p:txBody>
+      </p:sp>
+      <p:sp>
+        <p:nvSpPr>
+          <p:cNvPr id="7" name="TextBox 6"/>
           <p:cNvSpPr txBox="1"/>
           <p:nvPr/>
         </p:nvSpPr>
         <p:spPr>
           <a:xfrm>
-            <a:off x="457200" y="594360"/>
-            <a:ext cx="11274552" cy="731520"/>
+            <a:off x="557784" y="2926080"/>
+            <a:ext cx="5303520" cy="3200400"/>
           </a:xfrm>
           <a:prstGeom prst="rect">
             <a:avLst/>
@@ -4657,363 +6656,218 @@
           <a:lstStyle/>
           <a:p>
             <a:pPr>
-              <a:defRPr sz="2800" b="1">
-                <a:solidFill>
-                  <a:srgbClr val="F1F5F9"/>
-                </a:solidFill>
-                <a:latin typeface="Segoe UI"/>
-              </a:defRPr>
-            </a:pPr>
-            <a:r>
-              <a:t>Customer Profiles &amp; Cohort Retention (Page 4)</a:t>
-            </a:r>
-          </a:p>
-        </p:txBody>
-      </p:sp>
-      <p:sp>
-        <p:nvSpPr>
-          <p:cNvPr id="4" name="TextBox 3"/>
-          <p:cNvSpPr txBox="1"/>
-          <p:nvPr/>
-        </p:nvSpPr>
-        <p:spPr>
-          <a:xfrm>
-            <a:off x="457200" y="1188720"/>
-            <a:ext cx="11274552" cy="91440"/>
-          </a:xfrm>
-          <a:prstGeom prst="rect">
-            <a:avLst/>
-          </a:prstGeom>
-          <a:noFill/>
-        </p:spPr>
-        <p:txBody>
-          <a:bodyPr wrap="none">
-            <a:spAutoFit/>
-          </a:bodyPr>
-          <a:lstStyle/>
-          <a:p>
-            <a:pPr>
-              <a:defRPr sz="800">
-                <a:solidFill>
-                  <a:srgbClr val="1E293B"/>
-                </a:solidFill>
-              </a:defRPr>
-            </a:pPr>
-            <a:r>
-              <a:t>⎯⎯⎯⎯⎯⎯⎯⎯⎯⎯⎯⎯⎯⎯⎯⎯⎯⎯⎯⎯⎯⎯⎯⎯⎯⎯⎯⎯⎯⎯⎯⎯⎯⎯⎯⎯⎯⎯⎯⎯⎯⎯⎯⎯⎯⎯⎯⎯⎯⎯⎯⎯⎯⎯⎯⎯⎯⎯⎯⎯⎯⎯⎯⎯⎯⎯⎯⎯⎯⎯⎯⎯⎯⎯⎯⎯⎯⎯⎯⎯⎯⎯⎯⎯⎯⎯⎯⎯⎯⎯⎯⎯⎯⎯⎯⎯⎯⎯⎯⎯⎯⎯⎯⎯⎯⎯⎯⎯⎯⎯⎯⎯⎯⎯⎯⎯⎯⎯⎯⎯</a:t>
-            </a:r>
-          </a:p>
-        </p:txBody>
-      </p:sp>
-      <p:sp>
-        <p:nvSpPr>
-          <p:cNvPr id="5" name="TextBox 4"/>
-          <p:cNvSpPr txBox="1"/>
-          <p:nvPr/>
-        </p:nvSpPr>
-        <p:spPr>
-          <a:xfrm>
-            <a:off x="457200" y="1645920"/>
-            <a:ext cx="4114800" cy="4572000"/>
-          </a:xfrm>
-          <a:prstGeom prst="rect">
-            <a:avLst/>
-          </a:prstGeom>
-          <a:noFill/>
-        </p:spPr>
-        <p:txBody>
-          <a:bodyPr wrap="square">
-            <a:spAutoFit/>
-          </a:bodyPr>
-          <a:lstStyle/>
-          <a:p>
-            <a:pPr>
-              <a:spcAft>
-                <a:spcPts val="1500"/>
-              </a:spcAft>
-              <a:defRPr sz="1400" b="1">
-                <a:solidFill>
-                  <a:srgbClr val="06B6D4"/>
-                </a:solidFill>
-              </a:defRPr>
-            </a:pPr>
-            <a:r>
-              <a:t>CUSTOMER METRICS</a:t>
-            </a:r>
-          </a:p>
-          <a:p>
-            <a:pPr>
-              <a:defRPr sz="1200" b="1">
-                <a:solidFill>
-                  <a:srgbClr val="94A3B8"/>
-                </a:solidFill>
-              </a:defRPr>
-            </a:pPr>
-            <a:r>
-              <a:t>• Total Bookings</a:t>
-            </a:r>
-          </a:p>
-          <a:p>
-            <a:pPr>
-              <a:defRPr sz="2000" b="1">
-                <a:solidFill>
-                  <a:srgbClr val="F1F5F9"/>
-                </a:solidFill>
-              </a:defRPr>
-            </a:pPr>
-            <a:r>
-              <a:t>   10K</a:t>
-            </a:r>
-          </a:p>
-          <a:p>
-            <a:pPr>
-              <a:spcAft>
-                <a:spcPts val="1200"/>
-              </a:spcAft>
-              <a:defRPr sz="1000">
-                <a:solidFill>
-                  <a:srgbClr val="94A3B8"/>
-                </a:solidFill>
-              </a:defRPr>
-            </a:pPr>
-            <a:r>
-              <a:t>   Total seat reservations recorded.</a:t>
-            </a:r>
-          </a:p>
-          <a:p>
-            <a:pPr>
-              <a:defRPr sz="1200" b="1">
-                <a:solidFill>
-                  <a:srgbClr val="94A3B8"/>
-                </a:solidFill>
-              </a:defRPr>
-            </a:pPr>
-            <a:r>
-              <a:t>• Unique Customers</a:t>
-            </a:r>
-          </a:p>
-          <a:p>
-            <a:pPr>
-              <a:defRPr sz="2000" b="1">
-                <a:solidFill>
-                  <a:srgbClr val="F1F5F9"/>
-                </a:solidFill>
-              </a:defRPr>
-            </a:pPr>
-            <a:r>
-              <a:t>   294</a:t>
-            </a:r>
-          </a:p>
-          <a:p>
-            <a:pPr>
-              <a:spcAft>
-                <a:spcPts val="1200"/>
-              </a:spcAft>
-              <a:defRPr sz="1000">
-                <a:solidFill>
-                  <a:srgbClr val="94A3B8"/>
-                </a:solidFill>
-              </a:defRPr>
-            </a:pPr>
-            <a:r>
-              <a:t>   Distinct customer IDs in active user base.</a:t>
-            </a:r>
-          </a:p>
-          <a:p>
-            <a:pPr>
-              <a:defRPr sz="1200" b="1">
-                <a:solidFill>
-                  <a:srgbClr val="94A3B8"/>
-                </a:solidFill>
-              </a:defRPr>
-            </a:pPr>
-            <a:r>
-              <a:t>• Avg Spend per Customer</a:t>
-            </a:r>
-          </a:p>
-          <a:p>
-            <a:pPr>
-              <a:defRPr sz="2000" b="1">
-                <a:solidFill>
-                  <a:srgbClr val="F1F5F9"/>
-                </a:solidFill>
-              </a:defRPr>
-            </a:pPr>
-            <a:r>
-              <a:t>   $30.27K</a:t>
-            </a:r>
-          </a:p>
-          <a:p>
-            <a:pPr>
-              <a:spcAft>
-                <a:spcPts val="1200"/>
-              </a:spcAft>
-              <a:defRPr sz="1000">
-                <a:solidFill>
-                  <a:srgbClr val="94A3B8"/>
-                </a:solidFill>
-              </a:defRPr>
-            </a:pPr>
-            <a:r>
-              <a:t>   Average cumulative lifetime spend per customer.</a:t>
-            </a:r>
-          </a:p>
-          <a:p>
-            <a:pPr>
-              <a:defRPr sz="1200" b="1">
-                <a:solidFill>
-                  <a:srgbClr val="94A3B8"/>
-                </a:solidFill>
-              </a:defRPr>
-            </a:pPr>
-            <a:r>
-              <a:t>• Avg Bookings per Customer</a:t>
-            </a:r>
-          </a:p>
-          <a:p>
-            <a:pPr>
-              <a:defRPr sz="2000" b="1">
-                <a:solidFill>
-                  <a:srgbClr val="06B6D4"/>
-                </a:solidFill>
-              </a:defRPr>
-            </a:pPr>
-            <a:r>
-              <a:t>   35.31</a:t>
-            </a:r>
-          </a:p>
-          <a:p>
-            <a:pPr>
-              <a:spcAft>
-                <a:spcPts val="1200"/>
-              </a:spcAft>
-              <a:defRPr sz="1000">
-                <a:solidFill>
-                  <a:srgbClr val="94A3B8"/>
-                </a:solidFill>
-              </a:defRPr>
-            </a:pPr>
-            <a:r>
-              <a:t>   Average travel frequency per customer.</a:t>
-            </a:r>
-          </a:p>
-        </p:txBody>
-      </p:sp>
-      <p:sp>
-        <p:nvSpPr>
-          <p:cNvPr id="6" name="TextBox 5"/>
-          <p:cNvSpPr txBox="1"/>
-          <p:nvPr/>
-        </p:nvSpPr>
-        <p:spPr>
-          <a:xfrm>
-            <a:off x="5029200" y="1645920"/>
-            <a:ext cx="6702552" cy="4572000"/>
-          </a:xfrm>
-          <a:prstGeom prst="rect">
-            <a:avLst/>
-          </a:prstGeom>
-          <a:noFill/>
-        </p:spPr>
-        <p:txBody>
-          <a:bodyPr wrap="square">
-            <a:spAutoFit/>
-          </a:bodyPr>
-          <a:lstStyle/>
-          <a:p>
-            <a:pPr>
-              <a:spcAft>
-                <a:spcPts val="1500"/>
-              </a:spcAft>
-              <a:defRPr sz="1400" b="1">
-                <a:solidFill>
-                  <a:srgbClr val="06B6D4"/>
-                </a:solidFill>
-              </a:defRPr>
-            </a:pPr>
-            <a:r>
-              <a:t>LOYALTY &amp; RETENTION COHORTS</a:t>
-            </a:r>
-          </a:p>
-          <a:p>
-            <a:pPr>
+              <a:spcAft>
+                <a:spcPts val="1000"/>
+              </a:spcAft>
+              <a:defRPr sz="1200">
+                <a:solidFill>
+                  <a:srgbClr val="334155"/>
+                </a:solidFill>
+                <a:latin typeface="Segoe UI"/>
+              </a:defRPr>
+            </a:pPr>
+            <a:r>
+              <a:t>◆  Mixed Date parsing parses inconsistent DD/MM/YYYY and MM-DD-YYYY strings.</a:t>
+            </a:r>
+          </a:p>
+          <a:p>
+            <a:pPr>
+              <a:spcAft>
+                <a:spcPts val="1000"/>
+              </a:spcAft>
+              <a:defRPr sz="1200">
+                <a:solidFill>
+                  <a:srgbClr val="334155"/>
+                </a:solidFill>
+                <a:latin typeface="Segoe UI"/>
+              </a:defRPr>
+            </a:pPr>
+            <a:r>
+              <a:t>◆  Deduplication enforces PK constraints by removing duplicate Booking_ID rows.</a:t>
+            </a:r>
+          </a:p>
+          <a:p>
+            <a:pPr>
+              <a:spcAft>
+                <a:spcPts val="1000"/>
+              </a:spcAft>
+              <a:defRPr sz="1200">
+                <a:solidFill>
+                  <a:srgbClr val="334155"/>
+                </a:solidFill>
+                <a:latin typeface="Segoe UI"/>
+              </a:defRPr>
+            </a:pPr>
+            <a:r>
+              <a:t>◆  Missing gender entries and customer age outliers corrected to baseline medians.</a:t>
+            </a:r>
+          </a:p>
+          <a:p>
+            <a:pPr>
+              <a:spcAft>
+                <a:spcPts val="1000"/>
+              </a:spcAft>
+              <a:defRPr sz="1200">
+                <a:solidFill>
+                  <a:srgbClr val="334155"/>
+                </a:solidFill>
+                <a:latin typeface="Segoe UI"/>
+              </a:defRPr>
+            </a:pPr>
+            <a:r>
+              <a:t>◆  Case normalization standardizes inconsistent names and statuses to clean casing.</a:t>
+            </a:r>
+          </a:p>
+          <a:p>
+            <a:pPr>
+              <a:spcAft>
+                <a:spcPts val="1000"/>
+              </a:spcAft>
+              <a:defRPr sz="1200">
+                <a:solidFill>
+                  <a:srgbClr val="334155"/>
+                </a:solidFill>
+                <a:latin typeface="Segoe UI"/>
+              </a:defRPr>
+            </a:pPr>
+            <a:r>
+              <a:t>◆  Customer booking cap restricts maximum bookings to under 75 per user.</a:t>
+            </a:r>
+          </a:p>
+        </p:txBody>
+      </p:sp>
+      <p:sp>
+        <p:nvSpPr>
+          <p:cNvPr id="8" name="Rounded Rectangle 7"/>
+          <p:cNvSpPr/>
+          <p:nvPr/>
+        </p:nvSpPr>
+        <p:spPr>
+          <a:xfrm>
+            <a:off x="6409944" y="2377440"/>
+            <a:ext cx="5212080" cy="3566160"/>
+          </a:xfrm>
+          <a:prstGeom prst="roundRect">
+            <a:avLst/>
+          </a:prstGeom>
+          <a:solidFill>
+            <a:srgbClr val="1A152C"/>
+          </a:solidFill>
+          <a:ln>
+            <a:noFill/>
+          </a:ln>
+        </p:spPr>
+        <p:style>
+          <a:lnRef idx="1">
+            <a:schemeClr val="accent1"/>
+          </a:lnRef>
+          <a:fillRef idx="3">
+            <a:schemeClr val="accent1"/>
+          </a:fillRef>
+          <a:effectRef idx="2">
+            <a:schemeClr val="accent1"/>
+          </a:effectRef>
+          <a:fontRef idx="minor">
+            <a:schemeClr val="lt1"/>
+          </a:fontRef>
+        </p:style>
+        <p:txBody>
+          <a:bodyPr rtlCol="0" anchor="ctr" wrap="square" lIns="228600" tIns="228600" rIns="228600" bIns="228600"/>
+          <a:lstStyle/>
+          <a:p>
+            <a:pPr algn="ctr">
+              <a:spcAft>
+                <a:spcPts val="1400"/>
+              </a:spcAft>
               <a:defRPr sz="1300" b="1">
                 <a:solidFill>
-                  <a:srgbClr val="F1F5F9"/>
-                </a:solidFill>
-              </a:defRPr>
-            </a:pPr>
-            <a:r>
-              <a:t>▪ Customer Retention Rate (Gauge)</a:t>
-            </a:r>
-          </a:p>
-          <a:p>
-            <a:pPr>
-              <a:spcAft>
-                <a:spcPts val="1500"/>
+                  <a:srgbClr val="22C55E"/>
+                </a:solidFill>
+                <a:latin typeface="Segoe UI"/>
+              </a:defRPr>
+            </a:pPr>
+            <a:r>
+              <a:t>🎯 PIPELINE OUTPUT METRICS</a:t>
+            </a:r>
+          </a:p>
+          <a:p>
+            <a:pPr>
+              <a:spcAft>
+                <a:spcPts val="1000"/>
               </a:spcAft>
               <a:defRPr sz="1100">
                 <a:solidFill>
-                  <a:srgbClr val="94A3B8"/>
-                </a:solidFill>
-              </a:defRPr>
-            </a:pPr>
-            <a:r>
-              <a:t>Currently stands at 75.0% against an 80.0% goal. This realistic gap helps segment commuter pools vs. single-trip seasonal travelers.</a:t>
-            </a:r>
-          </a:p>
-          <a:p>
-            <a:pPr>
-              <a:defRPr sz="1300" b="1">
-                <a:solidFill>
-                  <a:srgbClr val="F1F5F9"/>
-                </a:solidFill>
-              </a:defRPr>
-            </a:pPr>
-            <a:r>
-              <a:t>▪ Demographic Segments</a:t>
-            </a:r>
-          </a:p>
-          <a:p>
-            <a:pPr>
-              <a:spcAft>
-                <a:spcPts val="1500"/>
+                  <a:srgbClr val="FFFFFF"/>
+                </a:solidFill>
+                <a:latin typeface="Segoe UI"/>
+              </a:defRPr>
+            </a:pPr>
+            <a:r>
+              <a:t>◆  Raw Input Volume: 11,848 booking records</a:t>
+            </a:r>
+          </a:p>
+          <a:p>
+            <a:pPr>
+              <a:spcAft>
+                <a:spcPts val="1000"/>
               </a:spcAft>
               <a:defRPr sz="1100">
                 <a:solidFill>
-                  <a:srgbClr val="94A3B8"/>
-                </a:solidFill>
-              </a:defRPr>
-            </a:pPr>
-            <a:r>
-              <a:t>Young professionals and middle-aged commuters (Age 25-45 and 45+) form 90%+ of total bookings. Gender demand splits evenly, showing balanced market access.</a:t>
-            </a:r>
-          </a:p>
-          <a:p>
-            <a:pPr>
-              <a:defRPr sz="1300" b="1">
-                <a:solidFill>
-                  <a:srgbClr val="F1F5F9"/>
-                </a:solidFill>
-              </a:defRPr>
-            </a:pPr>
-            <a:r>
-              <a:t>▪ Monthly Passenger Spikes</a:t>
-            </a:r>
-          </a:p>
-          <a:p>
-            <a:pPr>
-              <a:spcAft>
-                <a:spcPts val="1500"/>
+                  <a:srgbClr val="FFFFFF"/>
+                </a:solidFill>
+                <a:latin typeface="Segoe UI"/>
+              </a:defRPr>
+            </a:pPr>
+            <a:r>
+              <a:t>◆  Clean Output Volume: 10,381 booking records</a:t>
+            </a:r>
+          </a:p>
+          <a:p>
+            <a:pPr>
+              <a:spcAft>
+                <a:spcPts val="1000"/>
               </a:spcAft>
               <a:defRPr sz="1100">
                 <a:solidFill>
-                  <a:srgbClr val="94A3B8"/>
-                </a:solidFill>
-              </a:defRPr>
-            </a:pPr>
-            <a:r>
-              <a:t>Identifies seasonal customer footprints, with distinct booking expansions peaking in spring, which is vital for targeting digital ad campaign runs.</a:t>
+                  <a:srgbClr val="FFFFFF"/>
+                </a:solidFill>
+                <a:latin typeface="Segoe UI"/>
+              </a:defRPr>
+            </a:pPr>
+            <a:r>
+              <a:t>◆  Database Constraint Enforced: Travel_Date &gt;= Booking_Date</a:t>
+            </a:r>
+          </a:p>
+          <a:p>
+            <a:pPr>
+              <a:spcAft>
+                <a:spcPts val="1000"/>
+              </a:spcAft>
+              <a:defRPr sz="1100">
+                <a:solidFill>
+                  <a:srgbClr val="FFFFFF"/>
+                </a:solidFill>
+                <a:latin typeface="Segoe UI"/>
+              </a:defRPr>
+            </a:pPr>
+            <a:r>
+              <a:t>◆  Deduplicated Entries: Removed 601 duplicate rows</a:t>
+            </a:r>
+          </a:p>
+          <a:p>
+            <a:pPr>
+              <a:spcAft>
+                <a:spcPts val="1000"/>
+              </a:spcAft>
+              <a:defRPr sz="1100">
+                <a:solidFill>
+                  <a:srgbClr val="FFFFFF"/>
+                </a:solidFill>
+                <a:latin typeface="Segoe UI"/>
+              </a:defRPr>
+            </a:pPr>
+            <a:r>
+              <a:t>◆  Customer Retention Target: Cleansed at 75.0% rate</a:t>
             </a:r>
           </a:p>
         </p:txBody>
@@ -5044,7 +6898,7 @@
     <p:bg>
       <p:bgPr>
         <a:solidFill>
-          <a:srgbClr val="0F172A"/>
+          <a:srgbClr val="FFFFFF"/>
         </a:solidFill>
         <a:effectLst/>
       </p:bgPr>
@@ -5064,8 +6918,68 @@
         </p:nvSpPr>
         <p:spPr>
           <a:xfrm>
-            <a:off x="457200" y="365760"/>
-            <a:ext cx="11274552" cy="274320"/>
+            <a:off x="548640" y="365760"/>
+            <a:ext cx="1371600" cy="822960"/>
+          </a:xfrm>
+          <a:prstGeom prst="rect">
+            <a:avLst/>
+          </a:prstGeom>
+          <a:noFill/>
+        </p:spPr>
+        <p:txBody>
+          <a:bodyPr wrap="none">
+            <a:spAutoFit/>
+          </a:bodyPr>
+          <a:lstStyle/>
+          <a:p>
+            <a:pPr>
+              <a:defRPr sz="3800" b="1">
+                <a:solidFill>
+                  <a:srgbClr val="06B6D4"/>
+                </a:solidFill>
+                <a:latin typeface="Segoe UI"/>
+              </a:defRPr>
+            </a:pPr>
+            <a:r>
+              <a:t>05</a:t>
+            </a:r>
+          </a:p>
+        </p:txBody>
+      </p:sp>
+      <p:sp>
+        <p:nvSpPr>
+          <p:cNvPr id="3" name="TextBox 2"/>
+          <p:cNvSpPr txBox="1"/>
+          <p:nvPr/>
+        </p:nvSpPr>
+        <p:spPr>
+          <a:xfrm>
+            <a:off x="548640" y="1280160"/>
+            <a:ext cx="3657600" cy="36576"/>
+          </a:xfrm>
+          <a:prstGeom prst="rect">
+            <a:avLst/>
+          </a:prstGeom>
+          <a:noFill/>
+        </p:spPr>
+        <p:txBody>
+          <a:bodyPr wrap="none">
+            <a:spAutoFit/>
+          </a:bodyPr>
+          <a:lstStyle/>
+          <a:p/>
+        </p:txBody>
+      </p:sp>
+      <p:sp>
+        <p:nvSpPr>
+          <p:cNvPr id="4" name="TextBox 3"/>
+          <p:cNvSpPr txBox="1"/>
+          <p:nvPr/>
+        </p:nvSpPr>
+        <p:spPr>
+          <a:xfrm>
+            <a:off x="548640" y="1417320"/>
+            <a:ext cx="8229600" cy="640080"/>
           </a:xfrm>
           <a:prstGeom prst="rect">
             <a:avLst/>
@@ -5079,7 +6993,79 @@
           <a:lstStyle/>
           <a:p>
             <a:pPr>
-              <a:defRPr sz="1000" b="1">
+              <a:defRPr sz="2400" b="1">
+                <a:solidFill>
+                  <a:srgbClr val="054A75"/>
+                </a:solidFill>
+                <a:latin typeface="Segoe UI"/>
+              </a:defRPr>
+            </a:pPr>
+            <a:r>
+              <a:t>MySQL Database Design &amp; Normalization</a:t>
+            </a:r>
+          </a:p>
+        </p:txBody>
+      </p:sp>
+      <p:sp>
+        <p:nvSpPr>
+          <p:cNvPr id="5" name="TextBox 4"/>
+          <p:cNvSpPr txBox="1"/>
+          <p:nvPr/>
+        </p:nvSpPr>
+        <p:spPr>
+          <a:xfrm>
+            <a:off x="365760" y="6309360"/>
+            <a:ext cx="1371600" cy="365760"/>
+          </a:xfrm>
+          <a:prstGeom prst="rect">
+            <a:avLst/>
+          </a:prstGeom>
+          <a:noFill/>
+        </p:spPr>
+        <p:txBody>
+          <a:bodyPr wrap="none">
+            <a:spAutoFit/>
+          </a:bodyPr>
+          <a:lstStyle/>
+          <a:p>
+            <a:pPr>
+              <a:defRPr sz="1100">
+                <a:solidFill>
+                  <a:srgbClr val="64748B"/>
+                </a:solidFill>
+                <a:latin typeface="Segoe UI"/>
+              </a:defRPr>
+            </a:pPr>
+            <a:r>
+              <a:t>6 / 14</a:t>
+            </a:r>
+          </a:p>
+        </p:txBody>
+      </p:sp>
+      <p:sp>
+        <p:nvSpPr>
+          <p:cNvPr id="6" name="TextBox 5"/>
+          <p:cNvSpPr txBox="1"/>
+          <p:nvPr/>
+        </p:nvSpPr>
+        <p:spPr>
+          <a:xfrm>
+            <a:off x="557784" y="2377440"/>
+            <a:ext cx="5303520" cy="457200"/>
+          </a:xfrm>
+          <a:prstGeom prst="rect">
+            <a:avLst/>
+          </a:prstGeom>
+          <a:noFill/>
+        </p:spPr>
+        <p:txBody>
+          <a:bodyPr wrap="none">
+            <a:spAutoFit/>
+          </a:bodyPr>
+          <a:lstStyle/>
+          <a:p>
+            <a:pPr>
+              <a:defRPr sz="1600" b="1">
                 <a:solidFill>
                   <a:srgbClr val="06B6D4"/>
                 </a:solidFill>
@@ -5087,21 +7073,21 @@
               </a:defRPr>
             </a:pPr>
             <a:r>
-              <a:t>BUS BOOKING ANALYTICS SYSTEM</a:t>
-            </a:r>
-          </a:p>
-        </p:txBody>
-      </p:sp>
-      <p:sp>
-        <p:nvSpPr>
-          <p:cNvPr id="3" name="TextBox 2"/>
+              <a:t>Relational Database Structure</a:t>
+            </a:r>
+          </a:p>
+        </p:txBody>
+      </p:sp>
+      <p:sp>
+        <p:nvSpPr>
+          <p:cNvPr id="7" name="TextBox 6"/>
           <p:cNvSpPr txBox="1"/>
           <p:nvPr/>
         </p:nvSpPr>
         <p:spPr>
           <a:xfrm>
-            <a:off x="457200" y="594360"/>
-            <a:ext cx="11274552" cy="731520"/>
+            <a:off x="557784" y="2926080"/>
+            <a:ext cx="5303520" cy="3200400"/>
           </a:xfrm>
           <a:prstGeom prst="rect">
             <a:avLst/>
@@ -5115,29 +7101,254 @@
           <a:lstStyle/>
           <a:p>
             <a:pPr>
-              <a:defRPr sz="2800" b="1">
-                <a:solidFill>
-                  <a:srgbClr val="F1F5F9"/>
-                </a:solidFill>
-                <a:latin typeface="Segoe UI"/>
-              </a:defRPr>
-            </a:pPr>
-            <a:r>
-              <a:t>Asset Utilization &amp; Capacity (Page 5)</a:t>
-            </a:r>
-          </a:p>
-        </p:txBody>
-      </p:sp>
-      <p:sp>
-        <p:nvSpPr>
-          <p:cNvPr id="4" name="TextBox 3"/>
+              <a:spcAft>
+                <a:spcPts val="1200"/>
+              </a:spcAft>
+              <a:defRPr sz="1200">
+                <a:solidFill>
+                  <a:srgbClr val="334155"/>
+                </a:solidFill>
+                <a:latin typeface="Segoe UI"/>
+              </a:defRPr>
+            </a:pPr>
+            <a:r>
+              <a:t>◆  Structured in clean star-schema relational hierarchy.</a:t>
+            </a:r>
+          </a:p>
+          <a:p>
+            <a:pPr>
+              <a:spcAft>
+                <a:spcPts val="1200"/>
+              </a:spcAft>
+              <a:defRPr sz="1200">
+                <a:solidFill>
+                  <a:srgbClr val="334155"/>
+                </a:solidFill>
+                <a:latin typeface="Segoe UI"/>
+              </a:defRPr>
+            </a:pPr>
+            <a:r>
+              <a:t>◆  Fact Table: Bookings contains foreign key bindings to dimensions.</a:t>
+            </a:r>
+          </a:p>
+          <a:p>
+            <a:pPr>
+              <a:spcAft>
+                <a:spcPts val="1200"/>
+              </a:spcAft>
+              <a:defRPr sz="1200">
+                <a:solidFill>
+                  <a:srgbClr val="334155"/>
+                </a:solidFill>
+                <a:latin typeface="Segoe UI"/>
+              </a:defRPr>
+            </a:pPr>
+            <a:r>
+              <a:t>◆  Dimension Tables: Customers, Buses, and Routes hold core entities.</a:t>
+            </a:r>
+          </a:p>
+          <a:p>
+            <a:pPr>
+              <a:spcAft>
+                <a:spcPts val="1200"/>
+              </a:spcAft>
+              <a:defRPr sz="1200">
+                <a:solidFill>
+                  <a:srgbClr val="334155"/>
+                </a:solidFill>
+                <a:latin typeface="Segoe UI"/>
+              </a:defRPr>
+            </a:pPr>
+            <a:r>
+              <a:t>◆  Strict foreign keys prevent orphan records and maintain database integrity.</a:t>
+            </a:r>
+          </a:p>
+          <a:p>
+            <a:pPr>
+              <a:spcAft>
+                <a:spcPts val="1200"/>
+              </a:spcAft>
+              <a:defRPr sz="1200">
+                <a:solidFill>
+                  <a:srgbClr val="334155"/>
+                </a:solidFill>
+                <a:latin typeface="Segoe UI"/>
+              </a:defRPr>
+            </a:pPr>
+            <a:r>
+              <a:t>◆  Performance indexes configured on key query corridors.</a:t>
+            </a:r>
+          </a:p>
+        </p:txBody>
+      </p:sp>
+      <p:sp>
+        <p:nvSpPr>
+          <p:cNvPr id="8" name="Rounded Rectangle 7"/>
+          <p:cNvSpPr/>
+          <p:nvPr/>
+        </p:nvSpPr>
+        <p:spPr>
+          <a:xfrm>
+            <a:off x="6409944" y="2377440"/>
+            <a:ext cx="5212080" cy="3566160"/>
+          </a:xfrm>
+          <a:prstGeom prst="roundRect">
+            <a:avLst/>
+          </a:prstGeom>
+          <a:solidFill>
+            <a:srgbClr val="1A152C"/>
+          </a:solidFill>
+          <a:ln>
+            <a:noFill/>
+          </a:ln>
+        </p:spPr>
+        <p:style>
+          <a:lnRef idx="1">
+            <a:schemeClr val="accent1"/>
+          </a:lnRef>
+          <a:fillRef idx="3">
+            <a:schemeClr val="accent1"/>
+          </a:fillRef>
+          <a:effectRef idx="2">
+            <a:schemeClr val="accent1"/>
+          </a:effectRef>
+          <a:fontRef idx="minor">
+            <a:schemeClr val="lt1"/>
+          </a:fontRef>
+        </p:style>
+        <p:txBody>
+          <a:bodyPr rtlCol="0" anchor="ctr" wrap="square" lIns="228600" tIns="228600" rIns="228600" bIns="228600"/>
+          <a:lstStyle/>
+          <a:p>
+            <a:pPr algn="ctr">
+              <a:spcAft>
+                <a:spcPts val="1400"/>
+              </a:spcAft>
+              <a:defRPr sz="1300" b="1">
+                <a:solidFill>
+                  <a:srgbClr val="06B6D4"/>
+                </a:solidFill>
+                <a:latin typeface="Segoe UI"/>
+              </a:defRPr>
+            </a:pPr>
+            <a:r>
+              <a:t>📂 TABLE SCHEMAS (DDL)</a:t>
+            </a:r>
+          </a:p>
+          <a:p>
+            <a:pPr>
+              <a:spcAft>
+                <a:spcPts val="1000"/>
+              </a:spcAft>
+              <a:defRPr sz="1100">
+                <a:solidFill>
+                  <a:srgbClr val="FFFFFF"/>
+                </a:solidFill>
+                <a:latin typeface="Segoe UI"/>
+              </a:defRPr>
+            </a:pPr>
+            <a:r>
+              <a:t>◆  Customers: Customer_ID (PK) | Name | Email | Phone | Gender | Age</a:t>
+            </a:r>
+          </a:p>
+          <a:p>
+            <a:pPr>
+              <a:spcAft>
+                <a:spcPts val="1000"/>
+              </a:spcAft>
+              <a:defRPr sz="1100">
+                <a:solidFill>
+                  <a:srgbClr val="FFFFFF"/>
+                </a:solidFill>
+                <a:latin typeface="Segoe UI"/>
+              </a:defRPr>
+            </a:pPr>
+            <a:r>
+              <a:t>◆  Buses: Bus_ID (PK) | Bus_Number | Bus_Type | Capacity</a:t>
+            </a:r>
+          </a:p>
+          <a:p>
+            <a:pPr>
+              <a:spcAft>
+                <a:spcPts val="1000"/>
+              </a:spcAft>
+              <a:defRPr sz="1100">
+                <a:solidFill>
+                  <a:srgbClr val="FFFFFF"/>
+                </a:solidFill>
+                <a:latin typeface="Segoe UI"/>
+              </a:defRPr>
+            </a:pPr>
+            <a:r>
+              <a:t>◆  Routes: Route_ID (PK) | Source | Destination | Distance</a:t>
+            </a:r>
+          </a:p>
+          <a:p>
+            <a:pPr>
+              <a:spcAft>
+                <a:spcPts val="1000"/>
+              </a:spcAft>
+              <a:defRPr sz="1100">
+                <a:solidFill>
+                  <a:srgbClr val="FFFFFF"/>
+                </a:solidFill>
+                <a:latin typeface="Segoe UI"/>
+              </a:defRPr>
+            </a:pPr>
+            <a:r>
+              <a:t>◆  Bookings: Booking_ID (PK) | Customer_ID (FK) | Bus_ID (FK) | Route_ID (FK)</a:t>
+            </a:r>
+          </a:p>
+        </p:txBody>
+      </p:sp>
+    </p:spTree>
+  </p:cSld>
+  <mc:AlternateContent xmlns:mc="http://schemas.openxmlformats.org/markup-compatibility/2006">
+    <mc:Choice xmlns:p14="http://schemas.microsoft.com/office/powerpoint/2010/main" Requires="p14">
+      <p:transition spd="slow">
+        <p:push dir="l"/>
+      </p:transition>
+    </mc:Choice>
+    <mc:Fallback>
+      <p:transition spd="slow">
+        <p:push dir="l"/>
+      </p:transition>
+    </mc:Fallback>
+  </mc:AlternateContent>
+  <p:clrMapOvr>
+    <a:masterClrMapping/>
+  </p:clrMapOvr>
+</p:sld>
+</file>
+
+<file path=ppt/slides/slide7.xml><?xml version="1.0" encoding="utf-8"?>
+<p:sld xmlns:a="http://schemas.openxmlformats.org/drawingml/2006/main" xmlns:p="http://schemas.openxmlformats.org/presentationml/2006/main" xmlns:r="http://schemas.openxmlformats.org/officeDocument/2006/relationships">
+  <p:cSld>
+    <p:bg>
+      <p:bgPr>
+        <a:solidFill>
+          <a:srgbClr val="FFFFFF"/>
+        </a:solidFill>
+        <a:effectLst/>
+      </p:bgPr>
+    </p:bg>
+    <p:spTree>
+      <p:nvGrpSpPr>
+        <p:cNvPr id="1" name=""/>
+        <p:cNvGrpSpPr/>
+        <p:nvPr/>
+      </p:nvGrpSpPr>
+      <p:grpSpPr/>
+      <p:sp>
+        <p:nvSpPr>
+          <p:cNvPr id="2" name="TextBox 1"/>
           <p:cNvSpPr txBox="1"/>
           <p:nvPr/>
         </p:nvSpPr>
         <p:spPr>
           <a:xfrm>
-            <a:off x="457200" y="1188720"/>
-            <a:ext cx="11274552" cy="91440"/>
+            <a:off x="548640" y="365760"/>
+            <a:ext cx="1371600" cy="822960"/>
           </a:xfrm>
           <a:prstGeom prst="rect">
             <a:avLst/>
@@ -5151,28 +7362,53 @@
           <a:lstStyle/>
           <a:p>
             <a:pPr>
-              <a:defRPr sz="800">
-                <a:solidFill>
-                  <a:srgbClr val="1E293B"/>
-                </a:solidFill>
-              </a:defRPr>
-            </a:pPr>
-            <a:r>
-              <a:t>⎯⎯⎯⎯⎯⎯⎯⎯⎯⎯⎯⎯⎯⎯⎯⎯⎯⎯⎯⎯⎯⎯⎯⎯⎯⎯⎯⎯⎯⎯⎯⎯⎯⎯⎯⎯⎯⎯⎯⎯⎯⎯⎯⎯⎯⎯⎯⎯⎯⎯⎯⎯⎯⎯⎯⎯⎯⎯⎯⎯⎯⎯⎯⎯⎯⎯⎯⎯⎯⎯⎯⎯⎯⎯⎯⎯⎯⎯⎯⎯⎯⎯⎯⎯⎯⎯⎯⎯⎯⎯⎯⎯⎯⎯⎯⎯⎯⎯⎯⎯⎯⎯⎯⎯⎯⎯⎯⎯⎯⎯⎯⎯⎯⎯⎯⎯⎯⎯⎯⎯</a:t>
-            </a:r>
-          </a:p>
-        </p:txBody>
-      </p:sp>
-      <p:sp>
-        <p:nvSpPr>
-          <p:cNvPr id="5" name="TextBox 4"/>
+              <a:defRPr sz="3800" b="1">
+                <a:solidFill>
+                  <a:srgbClr val="06B6D4"/>
+                </a:solidFill>
+                <a:latin typeface="Segoe UI"/>
+              </a:defRPr>
+            </a:pPr>
+            <a:r>
+              <a:t>06</a:t>
+            </a:r>
+          </a:p>
+        </p:txBody>
+      </p:sp>
+      <p:sp>
+        <p:nvSpPr>
+          <p:cNvPr id="3" name="TextBox 2"/>
           <p:cNvSpPr txBox="1"/>
           <p:nvPr/>
         </p:nvSpPr>
         <p:spPr>
           <a:xfrm>
-            <a:off x="457200" y="1645920"/>
-            <a:ext cx="4114800" cy="4572000"/>
+            <a:off x="548640" y="1280160"/>
+            <a:ext cx="3657600" cy="36576"/>
+          </a:xfrm>
+          <a:prstGeom prst="rect">
+            <a:avLst/>
+          </a:prstGeom>
+          <a:noFill/>
+        </p:spPr>
+        <p:txBody>
+          <a:bodyPr wrap="none">
+            <a:spAutoFit/>
+          </a:bodyPr>
+          <a:lstStyle/>
+          <a:p/>
+        </p:txBody>
+      </p:sp>
+      <p:sp>
+        <p:nvSpPr>
+          <p:cNvPr id="4" name="TextBox 3"/>
+          <p:cNvSpPr txBox="1"/>
+          <p:nvPr/>
+        </p:nvSpPr>
+        <p:spPr>
+          <a:xfrm>
+            <a:off x="548640" y="1417320"/>
+            <a:ext cx="8229600" cy="640080"/>
           </a:xfrm>
           <a:prstGeom prst="rect">
             <a:avLst/>
@@ -5186,173 +7422,51 @@
           <a:lstStyle/>
           <a:p>
             <a:pPr>
-              <a:spcAft>
-                <a:spcPts val="1500"/>
-              </a:spcAft>
-              <a:defRPr sz="1400" b="1">
-                <a:solidFill>
-                  <a:srgbClr val="06B6D4"/>
-                </a:solidFill>
-              </a:defRPr>
-            </a:pPr>
-            <a:r>
-              <a:t>CAPACITY &amp; UTILIZATION</a:t>
-            </a:r>
-          </a:p>
-          <a:p>
-            <a:pPr>
-              <a:defRPr sz="1200" b="1">
-                <a:solidFill>
-                  <a:srgbClr val="94A3B8"/>
-                </a:solidFill>
-              </a:defRPr>
-            </a:pPr>
-            <a:r>
-              <a:t>• Total Fleet Size</a:t>
-            </a:r>
-          </a:p>
-          <a:p>
-            <a:pPr>
-              <a:defRPr sz="2000" b="1">
-                <a:solidFill>
-                  <a:srgbClr val="F1F5F9"/>
-                </a:solidFill>
-              </a:defRPr>
-            </a:pPr>
-            <a:r>
-              <a:t>   11 Buses</a:t>
-            </a:r>
-          </a:p>
-          <a:p>
-            <a:pPr>
-              <a:spcAft>
-                <a:spcPts val="1200"/>
-              </a:spcAft>
-              <a:defRPr sz="1000">
-                <a:solidFill>
-                  <a:srgbClr val="94A3B8"/>
-                </a:solidFill>
-              </a:defRPr>
-            </a:pPr>
-            <a:r>
-              <a:t>   Total number of physical active coaches.</a:t>
-            </a:r>
-          </a:p>
-          <a:p>
-            <a:pPr>
-              <a:defRPr sz="1200" b="1">
-                <a:solidFill>
-                  <a:srgbClr val="94A3B8"/>
-                </a:solidFill>
-              </a:defRPr>
-            </a:pPr>
-            <a:r>
-              <a:t>• Total Seating Capacity</a:t>
-            </a:r>
-          </a:p>
-          <a:p>
-            <a:pPr>
-              <a:defRPr sz="2000" b="1">
-                <a:solidFill>
-                  <a:srgbClr val="F1F5F9"/>
-                </a:solidFill>
-              </a:defRPr>
-            </a:pPr>
-            <a:r>
-              <a:t>   470 Seats</a:t>
-            </a:r>
-          </a:p>
-          <a:p>
-            <a:pPr>
-              <a:spcAft>
-                <a:spcPts val="1200"/>
-              </a:spcAft>
-              <a:defRPr sz="1000">
-                <a:solidFill>
-                  <a:srgbClr val="94A3B8"/>
-                </a:solidFill>
-              </a:defRPr>
-            </a:pPr>
-            <a:r>
-              <a:t>   Gross capacity on dimension table (Corrected!).</a:t>
-            </a:r>
-          </a:p>
-          <a:p>
-            <a:pPr>
-              <a:defRPr sz="1200" b="1">
-                <a:solidFill>
-                  <a:srgbClr val="94A3B8"/>
-                </a:solidFill>
-              </a:defRPr>
-            </a:pPr>
-            <a:r>
-              <a:t>• Average Bus Capacity</a:t>
-            </a:r>
-          </a:p>
-          <a:p>
-            <a:pPr>
-              <a:defRPr sz="2000" b="1">
-                <a:solidFill>
-                  <a:srgbClr val="F1F5F9"/>
-                </a:solidFill>
-              </a:defRPr>
-            </a:pPr>
-            <a:r>
-              <a:t>   42.73 Seats</a:t>
-            </a:r>
-          </a:p>
-          <a:p>
-            <a:pPr>
-              <a:spcAft>
-                <a:spcPts val="1200"/>
-              </a:spcAft>
-              <a:defRPr sz="1000">
-                <a:solidFill>
-                  <a:srgbClr val="94A3B8"/>
-                </a:solidFill>
-              </a:defRPr>
-            </a:pPr>
-            <a:r>
-              <a:t>   Average seats available per dispatched vehicle.</a:t>
-            </a:r>
-          </a:p>
-          <a:p>
-            <a:pPr>
-              <a:defRPr sz="1200" b="1">
-                <a:solidFill>
-                  <a:srgbClr val="94A3B8"/>
-                </a:solidFill>
-              </a:defRPr>
-            </a:pPr>
-            <a:r>
-              <a:t>• Average Occupancy Rate</a:t>
-            </a:r>
-          </a:p>
-          <a:p>
-            <a:pPr>
-              <a:defRPr sz="2000" b="1">
-                <a:solidFill>
-                  <a:srgbClr val="06B6D4"/>
-                </a:solidFill>
-              </a:defRPr>
-            </a:pPr>
-            <a:r>
-              <a:t>   51.0%</a:t>
-            </a:r>
-          </a:p>
-          <a:p>
-            <a:pPr>
-              <a:spcAft>
-                <a:spcPts val="1200"/>
-              </a:spcAft>
-              <a:defRPr sz="1000">
-                <a:solidFill>
-                  <a:srgbClr val="94A3B8"/>
-                </a:solidFill>
-              </a:defRPr>
-            </a:pPr>
-            <a:r>
-              <a:t>   Average load factor across overall departures.</a:t>
+              <a:defRPr sz="2400" b="1">
+                <a:solidFill>
+                  <a:srgbClr val="054A75"/>
+                </a:solidFill>
+                <a:latin typeface="Segoe UI"/>
+              </a:defRPr>
+            </a:pPr>
+            <a:r>
+              <a:t>Executive Overview Dashboard (Page 1)</a:t>
+            </a:r>
+          </a:p>
+        </p:txBody>
+      </p:sp>
+      <p:sp>
+        <p:nvSpPr>
+          <p:cNvPr id="5" name="TextBox 4"/>
+          <p:cNvSpPr txBox="1"/>
+          <p:nvPr/>
+        </p:nvSpPr>
+        <p:spPr>
+          <a:xfrm>
+            <a:off x="365760" y="6309360"/>
+            <a:ext cx="1371600" cy="365760"/>
+          </a:xfrm>
+          <a:prstGeom prst="rect">
+            <a:avLst/>
+          </a:prstGeom>
+          <a:noFill/>
+        </p:spPr>
+        <p:txBody>
+          <a:bodyPr wrap="none">
+            <a:spAutoFit/>
+          </a:bodyPr>
+          <a:lstStyle/>
+          <a:p>
+            <a:pPr>
+              <a:defRPr sz="1100">
+                <a:solidFill>
+                  <a:srgbClr val="64748B"/>
+                </a:solidFill>
+                <a:latin typeface="Segoe UI"/>
+              </a:defRPr>
+            </a:pPr>
+            <a:r>
+              <a:t>7 / 14</a:t>
             </a:r>
           </a:p>
         </p:txBody>
@@ -5365,8 +7479,8 @@
         </p:nvSpPr>
         <p:spPr>
           <a:xfrm>
-            <a:off x="5029200" y="1645920"/>
-            <a:ext cx="6702552" cy="4572000"/>
+            <a:off x="557784" y="2377440"/>
+            <a:ext cx="5303520" cy="3657600"/>
           </a:xfrm>
           <a:prstGeom prst="rect">
             <a:avLst/>
@@ -5383,99 +7497,107 @@
               <a:spcAft>
                 <a:spcPts val="1500"/>
               </a:spcAft>
-              <a:defRPr sz="1400" b="1">
+              <a:defRPr sz="1500" b="1">
                 <a:solidFill>
                   <a:srgbClr val="06B6D4"/>
                 </a:solidFill>
-              </a:defRPr>
-            </a:pPr>
-            <a:r>
-              <a:t>FLEET OPTIMIZATION NOTES</a:t>
-            </a:r>
-          </a:p>
-          <a:p>
-            <a:pPr>
-              <a:defRPr sz="1300" b="1">
-                <a:solidFill>
-                  <a:srgbClr val="F1F5F9"/>
-                </a:solidFill>
-              </a:defRPr>
-            </a:pPr>
-            <a:r>
-              <a:t>▪ Seating Capacity vs. Occupied Seats</a:t>
-            </a:r>
-          </a:p>
-          <a:p>
-            <a:pPr>
-              <a:spcAft>
-                <a:spcPts val="1500"/>
-              </a:spcAft>
-              <a:defRPr sz="1100">
-                <a:solidFill>
-                  <a:srgbClr val="94A3B8"/>
-                </a:solidFill>
-              </a:defRPr>
-            </a:pPr>
-            <a:r>
-              <a:t>Highlights asset scaling. AC Seater buses offer higher gross capacity (50 seats) but AC Sleepers (40 capacity) operate with higher pricing margins.</a:t>
-            </a:r>
-          </a:p>
-          <a:p>
-            <a:pPr>
-              <a:defRPr sz="1300" b="1">
-                <a:solidFill>
-                  <a:srgbClr val="F1F5F9"/>
-                </a:solidFill>
-              </a:defRPr>
-            </a:pPr>
-            <a:r>
-              <a:t>▪ Occupancy Load Factors</a:t>
-            </a:r>
-          </a:p>
-          <a:p>
-            <a:pPr>
-              <a:spcAft>
-                <a:spcPts val="1500"/>
-              </a:spcAft>
-              <a:defRPr sz="1100">
-                <a:solidFill>
-                  <a:srgbClr val="94A3B8"/>
-                </a:solidFill>
-              </a:defRPr>
-            </a:pPr>
-            <a:r>
-              <a:t>Currently stands at 51% average load factor. Fleet operators can optimize route schedules to consolidate passenger counts on low-occupancy weekday runs.</a:t>
-            </a:r>
-          </a:p>
-          <a:p>
-            <a:pPr>
-              <a:defRPr sz="1300" b="1">
-                <a:solidFill>
-                  <a:srgbClr val="F1F5F9"/>
-                </a:solidFill>
-              </a:defRPr>
-            </a:pPr>
-            <a:r>
-              <a:t>▪ Individual Asset Yield Table</a:t>
-            </a:r>
-          </a:p>
-          <a:p>
-            <a:pPr>
-              <a:spcAft>
-                <a:spcPts val="1500"/>
-              </a:spcAft>
-              <a:defRPr sz="1100">
-                <a:solidFill>
-                  <a:srgbClr val="94A3B8"/>
-                </a:solidFill>
-              </a:defRPr>
-            </a:pPr>
-            <a:r>
-              <a:t>Enables mechanical maintenance monitoring against exact ticket revenues, determining which specific license plates are underperforming.</a:t>
-            </a:r>
-          </a:p>
-        </p:txBody>
-      </p:sp>
+                <a:latin typeface="Segoe UI"/>
+              </a:defRPr>
+            </a:pPr>
+            <a:r>
+              <a:t>CORE KPIs &amp; GENERAL DEMANDS</a:t>
+            </a:r>
+          </a:p>
+          <a:p>
+            <a:pPr>
+              <a:spcAft>
+                <a:spcPts val="1200"/>
+              </a:spcAft>
+              <a:defRPr sz="1150">
+                <a:solidFill>
+                  <a:srgbClr val="334155"/>
+                </a:solidFill>
+                <a:latin typeface="Segoe UI"/>
+              </a:defRPr>
+            </a:pPr>
+            <a:r>
+              <a:t>◆  Tracks core corporate targets: Total Revenue ($479.85K) and Average Ticket Fare ($900.27) both exceed targets.</a:t>
+            </a:r>
+          </a:p>
+          <a:p>
+            <a:pPr>
+              <a:spcAft>
+                <a:spcPts val="1200"/>
+              </a:spcAft>
+              <a:defRPr sz="1150">
+                <a:solidFill>
+                  <a:srgbClr val="334155"/>
+                </a:solidFill>
+                <a:latin typeface="Segoe UI"/>
+              </a:defRPr>
+            </a:pPr>
+            <a:r>
+              <a:t>◆  Monthly demand curves reveal high volumes peaking in May-June, with seasonal drops in late winter.</a:t>
+            </a:r>
+          </a:p>
+          <a:p>
+            <a:pPr>
+              <a:spcAft>
+                <a:spcPts val="1200"/>
+              </a:spcAft>
+              <a:defRPr sz="1150">
+                <a:solidFill>
+                  <a:srgbClr val="334155"/>
+                </a:solidFill>
+                <a:latin typeface="Segoe UI"/>
+              </a:defRPr>
+            </a:pPr>
+            <a:r>
+              <a:t>◆  Confirmed vs. Cancelled cards identify exact transaction distributions (8.50K Confirmed rows).</a:t>
+            </a:r>
+          </a:p>
+          <a:p>
+            <a:pPr>
+              <a:spcAft>
+                <a:spcPts val="1200"/>
+              </a:spcAft>
+              <a:defRPr sz="1150">
+                <a:solidFill>
+                  <a:srgbClr val="334155"/>
+                </a:solidFill>
+                <a:latin typeface="Segoe UI"/>
+              </a:defRPr>
+            </a:pPr>
+            <a:r>
+              <a:t>◆  Source hub split places Bangalore as the top ticket sales hub, generating $1.99M.</a:t>
+            </a:r>
+          </a:p>
+        </p:txBody>
+      </p:sp>
+      <p:pic>
+        <p:nvPicPr>
+          <p:cNvPr id="7" name="Picture 6" descr="Screenshot 2026-07-16 005206.png"/>
+          <p:cNvPicPr>
+            <a:picLocks noChangeAspect="1"/>
+          </p:cNvPicPr>
+          <p:nvPr/>
+        </p:nvPicPr>
+        <p:blipFill>
+          <a:blip r:embed="rId2"/>
+          <a:stretch>
+            <a:fillRect/>
+          </a:stretch>
+        </p:blipFill>
+        <p:spPr>
+          <a:xfrm>
+            <a:off x="6409944" y="2286000"/>
+            <a:ext cx="5212080" cy="2926080"/>
+          </a:xfrm>
+          <a:prstGeom prst="rect">
+            <a:avLst/>
+          </a:prstGeom>
+        </p:spPr>
+      </p:pic>
     </p:spTree>
   </p:cSld>
   <mc:AlternateContent xmlns:mc="http://schemas.openxmlformats.org/markup-compatibility/2006">
@@ -5496,13 +7618,13 @@
 </p:sld>
 </file>
 
-<file path=ppt/slides/slide7.xml><?xml version="1.0" encoding="utf-8"?>
+<file path=ppt/slides/slide8.xml><?xml version="1.0" encoding="utf-8"?>
 <p:sld xmlns:a="http://schemas.openxmlformats.org/drawingml/2006/main" xmlns:p="http://schemas.openxmlformats.org/presentationml/2006/main" xmlns:r="http://schemas.openxmlformats.org/officeDocument/2006/relationships">
   <p:cSld>
     <p:bg>
       <p:bgPr>
         <a:solidFill>
-          <a:srgbClr val="0F172A"/>
+          <a:srgbClr val="FFFFFF"/>
         </a:solidFill>
         <a:effectLst/>
       </p:bgPr>
@@ -5522,8 +7644,68 @@
         </p:nvSpPr>
         <p:spPr>
           <a:xfrm>
-            <a:off x="457200" y="365760"/>
-            <a:ext cx="11274552" cy="274320"/>
+            <a:off x="548640" y="365760"/>
+            <a:ext cx="1371600" cy="822960"/>
+          </a:xfrm>
+          <a:prstGeom prst="rect">
+            <a:avLst/>
+          </a:prstGeom>
+          <a:noFill/>
+        </p:spPr>
+        <p:txBody>
+          <a:bodyPr wrap="none">
+            <a:spAutoFit/>
+          </a:bodyPr>
+          <a:lstStyle/>
+          <a:p>
+            <a:pPr>
+              <a:defRPr sz="3800" b="1">
+                <a:solidFill>
+                  <a:srgbClr val="06B6D4"/>
+                </a:solidFill>
+                <a:latin typeface="Segoe UI"/>
+              </a:defRPr>
+            </a:pPr>
+            <a:r>
+              <a:t>07</a:t>
+            </a:r>
+          </a:p>
+        </p:txBody>
+      </p:sp>
+      <p:sp>
+        <p:nvSpPr>
+          <p:cNvPr id="3" name="TextBox 2"/>
+          <p:cNvSpPr txBox="1"/>
+          <p:nvPr/>
+        </p:nvSpPr>
+        <p:spPr>
+          <a:xfrm>
+            <a:off x="548640" y="1280160"/>
+            <a:ext cx="3657600" cy="36576"/>
+          </a:xfrm>
+          <a:prstGeom prst="rect">
+            <a:avLst/>
+          </a:prstGeom>
+          <a:noFill/>
+        </p:spPr>
+        <p:txBody>
+          <a:bodyPr wrap="none">
+            <a:spAutoFit/>
+          </a:bodyPr>
+          <a:lstStyle/>
+          <a:p/>
+        </p:txBody>
+      </p:sp>
+      <p:sp>
+        <p:nvSpPr>
+          <p:cNvPr id="4" name="TextBox 3"/>
+          <p:cNvSpPr txBox="1"/>
+          <p:nvPr/>
+        </p:nvSpPr>
+        <p:spPr>
+          <a:xfrm>
+            <a:off x="548640" y="1417320"/>
+            <a:ext cx="8229600" cy="640080"/>
           </a:xfrm>
           <a:prstGeom prst="rect">
             <a:avLst/>
@@ -5537,29 +7719,65 @@
           <a:lstStyle/>
           <a:p>
             <a:pPr>
-              <a:defRPr sz="1000" b="1">
-                <a:solidFill>
-                  <a:srgbClr val="06B6D4"/>
-                </a:solidFill>
-                <a:latin typeface="Segoe UI"/>
-              </a:defRPr>
-            </a:pPr>
-            <a:r>
-              <a:t>BUS BOOKING ANALYTICS SYSTEM</a:t>
-            </a:r>
-          </a:p>
-        </p:txBody>
-      </p:sp>
-      <p:sp>
-        <p:nvSpPr>
-          <p:cNvPr id="3" name="TextBox 2"/>
+              <a:defRPr sz="2400" b="1">
+                <a:solidFill>
+                  <a:srgbClr val="054A75"/>
+                </a:solidFill>
+                <a:latin typeface="Segoe UI"/>
+              </a:defRPr>
+            </a:pPr>
+            <a:r>
+              <a:t>Operations &amp; Bookings Analysis (Page 2)</a:t>
+            </a:r>
+          </a:p>
+        </p:txBody>
+      </p:sp>
+      <p:sp>
+        <p:nvSpPr>
+          <p:cNvPr id="5" name="TextBox 4"/>
           <p:cNvSpPr txBox="1"/>
           <p:nvPr/>
         </p:nvSpPr>
         <p:spPr>
           <a:xfrm>
-            <a:off x="457200" y="594360"/>
-            <a:ext cx="11274552" cy="731520"/>
+            <a:off x="365760" y="6309360"/>
+            <a:ext cx="1371600" cy="365760"/>
+          </a:xfrm>
+          <a:prstGeom prst="rect">
+            <a:avLst/>
+          </a:prstGeom>
+          <a:noFill/>
+        </p:spPr>
+        <p:txBody>
+          <a:bodyPr wrap="none">
+            <a:spAutoFit/>
+          </a:bodyPr>
+          <a:lstStyle/>
+          <a:p>
+            <a:pPr>
+              <a:defRPr sz="1100">
+                <a:solidFill>
+                  <a:srgbClr val="64748B"/>
+                </a:solidFill>
+                <a:latin typeface="Segoe UI"/>
+              </a:defRPr>
+            </a:pPr>
+            <a:r>
+              <a:t>8 / 14</a:t>
+            </a:r>
+          </a:p>
+        </p:txBody>
+      </p:sp>
+      <p:sp>
+        <p:nvSpPr>
+          <p:cNvPr id="6" name="TextBox 5"/>
+          <p:cNvSpPr txBox="1"/>
+          <p:nvPr/>
+        </p:nvSpPr>
+        <p:spPr>
+          <a:xfrm>
+            <a:off x="557784" y="2377440"/>
+            <a:ext cx="5303520" cy="3657600"/>
           </a:xfrm>
           <a:prstGeom prst="rect">
             <a:avLst/>
@@ -5573,29 +7791,158 @@
           <a:lstStyle/>
           <a:p>
             <a:pPr>
-              <a:defRPr sz="2800" b="1">
-                <a:solidFill>
-                  <a:srgbClr val="F1F5F9"/>
-                </a:solidFill>
-                <a:latin typeface="Segoe UI"/>
-              </a:defRPr>
-            </a:pPr>
-            <a:r>
-              <a:t>Route Demand &amp; Reports (Page 6 &amp; 7)</a:t>
-            </a:r>
-          </a:p>
-        </p:txBody>
-      </p:sp>
-      <p:sp>
-        <p:nvSpPr>
-          <p:cNvPr id="4" name="TextBox 3"/>
+              <a:spcAft>
+                <a:spcPts val="1500"/>
+              </a:spcAft>
+              <a:defRPr sz="1500" b="1">
+                <a:solidFill>
+                  <a:srgbClr val="06B6D4"/>
+                </a:solidFill>
+                <a:latin typeface="Segoe UI"/>
+              </a:defRPr>
+            </a:pPr>
+            <a:r>
+              <a:t>DEMAND &amp; VERIFICATION RATIOS</a:t>
+            </a:r>
+          </a:p>
+          <a:p>
+            <a:pPr>
+              <a:spcAft>
+                <a:spcPts val="1200"/>
+              </a:spcAft>
+              <a:defRPr sz="1150">
+                <a:solidFill>
+                  <a:srgbClr val="334155"/>
+                </a:solidFill>
+                <a:latin typeface="Segoe UI"/>
+              </a:defRPr>
+            </a:pPr>
+            <a:r>
+              <a:t>◆  Monitors average booking lead times (4.81 days) to guide scheduling schedules.</a:t>
+            </a:r>
+          </a:p>
+          <a:p>
+            <a:pPr>
+              <a:spcAft>
+                <a:spcPts val="1200"/>
+              </a:spcAft>
+              <a:defRPr sz="1150">
+                <a:solidFill>
+                  <a:srgbClr val="334155"/>
+                </a:solidFill>
+                <a:latin typeface="Segoe UI"/>
+              </a:defRPr>
+            </a:pPr>
+            <a:r>
+              <a:t>◆  Shows confirmation rates (82.0%) and pending transactions ratios (12.0%).</a:t>
+            </a:r>
+          </a:p>
+          <a:p>
+            <a:pPr>
+              <a:spcAft>
+                <a:spcPts val="1200"/>
+              </a:spcAft>
+              <a:defRPr sz="1150">
+                <a:solidFill>
+                  <a:srgbClr val="334155"/>
+                </a:solidFill>
+                <a:latin typeface="Segoe UI"/>
+              </a:defRPr>
+            </a:pPr>
+            <a:r>
+              <a:t>◆  Booking volume split by bus type: Non-AC Sleeper registers 3,143 reservations, AC Sleeper registers 2,883, and AC Seater 2,476.</a:t>
+            </a:r>
+          </a:p>
+          <a:p>
+            <a:pPr>
+              <a:spcAft>
+                <a:spcPts val="1200"/>
+              </a:spcAft>
+              <a:defRPr sz="1150">
+                <a:solidFill>
+                  <a:srgbClr val="334155"/>
+                </a:solidFill>
+                <a:latin typeface="Segoe UI"/>
+              </a:defRPr>
+            </a:pPr>
+            <a:r>
+              <a:t>◆  Source corridor traffic lists Delhi corridor as the highest boarding corridor.</a:t>
+            </a:r>
+          </a:p>
+        </p:txBody>
+      </p:sp>
+      <p:pic>
+        <p:nvPicPr>
+          <p:cNvPr id="7" name="Picture 6" descr="Screenshot 2026-07-16 005249.png"/>
+          <p:cNvPicPr>
+            <a:picLocks noChangeAspect="1"/>
+          </p:cNvPicPr>
+          <p:nvPr/>
+        </p:nvPicPr>
+        <p:blipFill>
+          <a:blip r:embed="rId2"/>
+          <a:stretch>
+            <a:fillRect/>
+          </a:stretch>
+        </p:blipFill>
+        <p:spPr>
+          <a:xfrm>
+            <a:off x="6409944" y="2286000"/>
+            <a:ext cx="5212080" cy="2926080"/>
+          </a:xfrm>
+          <a:prstGeom prst="rect">
+            <a:avLst/>
+          </a:prstGeom>
+        </p:spPr>
+      </p:pic>
+    </p:spTree>
+  </p:cSld>
+  <mc:AlternateContent xmlns:mc="http://schemas.openxmlformats.org/markup-compatibility/2006">
+    <mc:Choice xmlns:p14="http://schemas.microsoft.com/office/powerpoint/2010/main" Requires="p14">
+      <p:transition spd="slow">
+        <p:wipe dir="l"/>
+      </p:transition>
+    </mc:Choice>
+    <mc:Fallback>
+      <p:transition spd="slow">
+        <p:wipe dir="l"/>
+      </p:transition>
+    </mc:Fallback>
+  </mc:AlternateContent>
+  <p:clrMapOvr>
+    <a:masterClrMapping/>
+  </p:clrMapOvr>
+</p:sld>
+</file>
+
+<file path=ppt/slides/slide9.xml><?xml version="1.0" encoding="utf-8"?>
+<p:sld xmlns:a="http://schemas.openxmlformats.org/drawingml/2006/main" xmlns:p="http://schemas.openxmlformats.org/presentationml/2006/main" xmlns:r="http://schemas.openxmlformats.org/officeDocument/2006/relationships">
+  <p:cSld>
+    <p:bg>
+      <p:bgPr>
+        <a:solidFill>
+          <a:srgbClr val="FFFFFF"/>
+        </a:solidFill>
+        <a:effectLst/>
+      </p:bgPr>
+    </p:bg>
+    <p:spTree>
+      <p:nvGrpSpPr>
+        <p:cNvPr id="1" name=""/>
+        <p:cNvGrpSpPr/>
+        <p:nvPr/>
+      </p:nvGrpSpPr>
+      <p:grpSpPr/>
+      <p:sp>
+        <p:nvSpPr>
+          <p:cNvPr id="2" name="TextBox 1"/>
           <p:cNvSpPr txBox="1"/>
           <p:nvPr/>
         </p:nvSpPr>
         <p:spPr>
           <a:xfrm>
-            <a:off x="457200" y="1188720"/>
-            <a:ext cx="11274552" cy="91440"/>
+            <a:off x="548640" y="365760"/>
+            <a:ext cx="1371600" cy="822960"/>
           </a:xfrm>
           <a:prstGeom prst="rect">
             <a:avLst/>
@@ -5609,28 +7956,53 @@
           <a:lstStyle/>
           <a:p>
             <a:pPr>
-              <a:defRPr sz="800">
-                <a:solidFill>
-                  <a:srgbClr val="1E293B"/>
-                </a:solidFill>
-              </a:defRPr>
-            </a:pPr>
-            <a:r>
-              <a:t>⎯⎯⎯⎯⎯⎯⎯⎯⎯⎯⎯⎯⎯⎯⎯⎯⎯⎯⎯⎯⎯⎯⎯⎯⎯⎯⎯⎯⎯⎯⎯⎯⎯⎯⎯⎯⎯⎯⎯⎯⎯⎯⎯⎯⎯⎯⎯⎯⎯⎯⎯⎯⎯⎯⎯⎯⎯⎯⎯⎯⎯⎯⎯⎯⎯⎯⎯⎯⎯⎯⎯⎯⎯⎯⎯⎯⎯⎯⎯⎯⎯⎯⎯⎯⎯⎯⎯⎯⎯⎯⎯⎯⎯⎯⎯⎯⎯⎯⎯⎯⎯⎯⎯⎯⎯⎯⎯⎯⎯⎯⎯⎯⎯⎯⎯⎯⎯⎯⎯⎯</a:t>
-            </a:r>
-          </a:p>
-        </p:txBody>
-      </p:sp>
-      <p:sp>
-        <p:nvSpPr>
-          <p:cNvPr id="5" name="TextBox 4"/>
+              <a:defRPr sz="3800" b="1">
+                <a:solidFill>
+                  <a:srgbClr val="06B6D4"/>
+                </a:solidFill>
+                <a:latin typeface="Segoe UI"/>
+              </a:defRPr>
+            </a:pPr>
+            <a:r>
+              <a:t>08</a:t>
+            </a:r>
+          </a:p>
+        </p:txBody>
+      </p:sp>
+      <p:sp>
+        <p:nvSpPr>
+          <p:cNvPr id="3" name="TextBox 2"/>
           <p:cNvSpPr txBox="1"/>
           <p:nvPr/>
         </p:nvSpPr>
         <p:spPr>
           <a:xfrm>
-            <a:off x="457200" y="1645920"/>
-            <a:ext cx="4572000" cy="4572000"/>
+            <a:off x="548640" y="1280160"/>
+            <a:ext cx="3657600" cy="36576"/>
+          </a:xfrm>
+          <a:prstGeom prst="rect">
+            <a:avLst/>
+          </a:prstGeom>
+          <a:noFill/>
+        </p:spPr>
+        <p:txBody>
+          <a:bodyPr wrap="none">
+            <a:spAutoFit/>
+          </a:bodyPr>
+          <a:lstStyle/>
+          <a:p/>
+        </p:txBody>
+      </p:sp>
+      <p:sp>
+        <p:nvSpPr>
+          <p:cNvPr id="4" name="TextBox 3"/>
+          <p:cNvSpPr txBox="1"/>
+          <p:nvPr/>
+        </p:nvSpPr>
+        <p:spPr>
+          <a:xfrm>
+            <a:off x="548640" y="1417320"/>
+            <a:ext cx="8229600" cy="640080"/>
           </a:xfrm>
           <a:prstGeom prst="rect">
             <a:avLst/>
@@ -5644,98 +8016,51 @@
           <a:lstStyle/>
           <a:p>
             <a:pPr>
-              <a:spcAft>
-                <a:spcPts val="1500"/>
-              </a:spcAft>
-              <a:defRPr sz="1400" b="1">
-                <a:solidFill>
-                  <a:srgbClr val="06B6D4"/>
-                </a:solidFill>
-              </a:defRPr>
-            </a:pPr>
-            <a:r>
-              <a:t>ROUTE METRICS</a:t>
-            </a:r>
-          </a:p>
-          <a:p>
-            <a:pPr>
-              <a:defRPr sz="1200" b="1">
-                <a:solidFill>
-                  <a:srgbClr val="F1F5F9"/>
-                </a:solidFill>
-              </a:defRPr>
-            </a:pPr>
-            <a:r>
-              <a:t>• Active Route Footprint</a:t>
-            </a:r>
-          </a:p>
-          <a:p>
-            <a:pPr>
-              <a:spcAft>
-                <a:spcPts val="1200"/>
-              </a:spcAft>
-              <a:defRPr sz="1050">
-                <a:solidFill>
-                  <a:srgbClr val="94A3B8"/>
-                </a:solidFill>
-              </a:defRPr>
-            </a:pPr>
-            <a:r>
-              <a:t>11 distinct city-to-city routes connecting major economic hubs across India.</a:t>
-            </a:r>
-          </a:p>
-          <a:p>
-            <a:pPr>
-              <a:defRPr sz="1200" b="1">
-                <a:solidFill>
-                  <a:srgbClr val="F1F5F9"/>
-                </a:solidFill>
-              </a:defRPr>
-            </a:pPr>
-            <a:r>
-              <a:t>• High-Demand Corridors</a:t>
-            </a:r>
-          </a:p>
-          <a:p>
-            <a:pPr>
-              <a:spcAft>
-                <a:spcPts val="1200"/>
-              </a:spcAft>
-              <a:defRPr sz="1050">
-                <a:solidFill>
-                  <a:srgbClr val="94A3B8"/>
-                </a:solidFill>
-              </a:defRPr>
-            </a:pPr>
-            <a:r>
-              <a:t>Mumbai - Ahmedabad, Bangalore - Hyderabad, and Chennai - Hyderabad represent the highest booking demand and revenue yields.</a:t>
-            </a:r>
-          </a:p>
-          <a:p>
-            <a:pPr>
-              <a:defRPr sz="1200" b="1">
-                <a:solidFill>
-                  <a:srgbClr val="F1F5F9"/>
-                </a:solidFill>
-              </a:defRPr>
-            </a:pPr>
-            <a:r>
-              <a:t>• Distance Class Efficiency</a:t>
-            </a:r>
-          </a:p>
-          <a:p>
-            <a:pPr>
-              <a:spcAft>
-                <a:spcPts val="1200"/>
-              </a:spcAft>
-              <a:defRPr sz="1050">
-                <a:solidFill>
-                  <a:srgbClr val="94A3B8"/>
-                </a:solidFill>
-              </a:defRPr>
-            </a:pPr>
-            <a:r>
-              <a:t>Longer corridors show strong revenue generation, validating pricing margins per travel kilometer.</a:t>
+              <a:defRPr sz="2400" b="1">
+                <a:solidFill>
+                  <a:srgbClr val="054A75"/>
+                </a:solidFill>
+                <a:latin typeface="Segoe UI"/>
+              </a:defRPr>
+            </a:pPr>
+            <a:r>
+              <a:t>Revenue &amp; Yield Optimization (Page 3)</a:t>
+            </a:r>
+          </a:p>
+        </p:txBody>
+      </p:sp>
+      <p:sp>
+        <p:nvSpPr>
+          <p:cNvPr id="5" name="TextBox 4"/>
+          <p:cNvSpPr txBox="1"/>
+          <p:nvPr/>
+        </p:nvSpPr>
+        <p:spPr>
+          <a:xfrm>
+            <a:off x="365760" y="6309360"/>
+            <a:ext cx="1371600" cy="365760"/>
+          </a:xfrm>
+          <a:prstGeom prst="rect">
+            <a:avLst/>
+          </a:prstGeom>
+          <a:noFill/>
+        </p:spPr>
+        <p:txBody>
+          <a:bodyPr wrap="none">
+            <a:spAutoFit/>
+          </a:bodyPr>
+          <a:lstStyle/>
+          <a:p>
+            <a:pPr>
+              <a:defRPr sz="1100">
+                <a:solidFill>
+                  <a:srgbClr val="64748B"/>
+                </a:solidFill>
+                <a:latin typeface="Segoe UI"/>
+              </a:defRPr>
+            </a:pPr>
+            <a:r>
+              <a:t>9 / 14</a:t>
             </a:r>
           </a:p>
         </p:txBody>
@@ -5748,8 +8073,8 @@
         </p:nvSpPr>
         <p:spPr>
           <a:xfrm>
-            <a:off x="5486400" y="1645920"/>
-            <a:ext cx="6245352" cy="4572000"/>
+            <a:off x="557784" y="2377440"/>
+            <a:ext cx="5303520" cy="3657600"/>
           </a:xfrm>
           <a:prstGeom prst="rect">
             <a:avLst/>
@@ -5766,99 +8091,107 @@
               <a:spcAft>
                 <a:spcPts val="1500"/>
               </a:spcAft>
-              <a:defRPr sz="1400" b="1">
+              <a:defRPr sz="1500" b="1">
                 <a:solidFill>
                   <a:srgbClr val="06B6D4"/>
                 </a:solidFill>
-              </a:defRPr>
-            </a:pPr>
-            <a:r>
-              <a:t>REPORTING &amp; AUDIT EXPORTS</a:t>
-            </a:r>
-          </a:p>
-          <a:p>
-            <a:pPr>
-              <a:defRPr sz="1300" b="1">
-                <a:solidFill>
-                  <a:srgbClr val="F1F5F9"/>
-                </a:solidFill>
-              </a:defRPr>
-            </a:pPr>
-            <a:r>
-              <a:t>▪ Unified Search &amp; Filtering</a:t>
-            </a:r>
-          </a:p>
-          <a:p>
-            <a:pPr>
-              <a:spcAft>
-                <a:spcPts val="1500"/>
-              </a:spcAft>
-              <a:defRPr sz="1100">
-                <a:solidFill>
-                  <a:srgbClr val="94A3B8"/>
-                </a:solidFill>
-              </a:defRPr>
-            </a:pPr>
-            <a:r>
-              <a:t>Page 7 features a search bar allowing users to filter by specific Booking IDs, Customer names, and dates for transaction auditing.</a:t>
-            </a:r>
-          </a:p>
-          <a:p>
-            <a:pPr>
-              <a:defRPr sz="1300" b="1">
-                <a:solidFill>
-                  <a:srgbClr val="F1F5F9"/>
-                </a:solidFill>
-              </a:defRPr>
-            </a:pPr>
-            <a:r>
-              <a:t>▪ Alternating Row Visuals</a:t>
-            </a:r>
-          </a:p>
-          <a:p>
-            <a:pPr>
-              <a:spcAft>
-                <a:spcPts val="1500"/>
-              </a:spcAft>
-              <a:defRPr sz="1100">
-                <a:solidFill>
-                  <a:srgbClr val="94A3B8"/>
-                </a:solidFill>
-              </a:defRPr>
-            </a:pPr>
-            <a:r>
-              <a:t>Tables are formatted with clean alternating rows and high-contrast text for easy scannability.</a:t>
-            </a:r>
-          </a:p>
-          <a:p>
-            <a:pPr>
-              <a:defRPr sz="1300" b="1">
-                <a:solidFill>
-                  <a:srgbClr val="F1F5F9"/>
-                </a:solidFill>
-              </a:defRPr>
-            </a:pPr>
-            <a:r>
-              <a:t>▪ CSV Data Export</a:t>
-            </a:r>
-          </a:p>
-          <a:p>
-            <a:pPr>
-              <a:spcAft>
-                <a:spcPts val="1500"/>
-              </a:spcAft>
-              <a:defRPr sz="1100">
-                <a:solidFill>
-                  <a:srgbClr val="94A3B8"/>
-                </a:solidFill>
-              </a:defRPr>
-            </a:pPr>
-            <a:r>
-              <a:t>Fully configured for raw data extraction, allowing business analysts to export clean CSV sheets directly from the dashboard visual in one click.</a:t>
-            </a:r>
-          </a:p>
-        </p:txBody>
-      </p:sp>
+                <a:latin typeface="Segoe UI"/>
+              </a:defRPr>
+            </a:pPr>
+            <a:r>
+              <a:t>FINANCIAL YIELD CORRIDORS</a:t>
+            </a:r>
+          </a:p>
+          <a:p>
+            <a:pPr>
+              <a:spcAft>
+                <a:spcPts val="1200"/>
+              </a:spcAft>
+              <a:defRPr sz="1150">
+                <a:solidFill>
+                  <a:srgbClr val="334155"/>
+                </a:solidFill>
+                <a:latin typeface="Segoe UI"/>
+              </a:defRPr>
+            </a:pPr>
+            <a:r>
+              <a:t>◆  Audits gross vs net revenue channels ($8.90M gross ticket sales).</a:t>
+            </a:r>
+          </a:p>
+          <a:p>
+            <a:pPr>
+              <a:spcAft>
+                <a:spcPts val="1200"/>
+              </a:spcAft>
+              <a:defRPr sz="1150">
+                <a:solidFill>
+                  <a:srgbClr val="334155"/>
+                </a:solidFill>
+                <a:latin typeface="Segoe UI"/>
+              </a:defRPr>
+            </a:pPr>
+            <a:r>
+              <a:t>◆  Tracks revenue leakage due to cancelled rows ($519.84K).</a:t>
+            </a:r>
+          </a:p>
+          <a:p>
+            <a:pPr>
+              <a:spcAft>
+                <a:spcPts val="1200"/>
+              </a:spcAft>
+              <a:defRPr sz="1150">
+                <a:solidFill>
+                  <a:srgbClr val="334155"/>
+                </a:solidFill>
+                <a:latin typeface="Segoe UI"/>
+              </a:defRPr>
+            </a:pPr>
+            <a:r>
+              <a:t>◆  Seat fare yields compared by bus class: Premium AC Sleeper yields the highest return ($952 avg fare) vs AC Seater ($718).</a:t>
+            </a:r>
+          </a:p>
+          <a:p>
+            <a:pPr>
+              <a:spcAft>
+                <a:spcPts val="1200"/>
+              </a:spcAft>
+              <a:defRPr sz="1150">
+                <a:solidFill>
+                  <a:srgbClr val="334155"/>
+                </a:solidFill>
+                <a:latin typeface="Segoe UI"/>
+              </a:defRPr>
+            </a:pPr>
+            <a:r>
+              <a:t>◆  Distance-fare correlations show proportionate pricing scaling on long-distance runs.</a:t>
+            </a:r>
+          </a:p>
+        </p:txBody>
+      </p:sp>
+      <p:pic>
+        <p:nvPicPr>
+          <p:cNvPr id="7" name="Picture 6" descr="Screenshot 2026-07-16 005307.png"/>
+          <p:cNvPicPr>
+            <a:picLocks noChangeAspect="1"/>
+          </p:cNvPicPr>
+          <p:nvPr/>
+        </p:nvPicPr>
+        <p:blipFill>
+          <a:blip r:embed="rId2"/>
+          <a:stretch>
+            <a:fillRect/>
+          </a:stretch>
+        </p:blipFill>
+        <p:spPr>
+          <a:xfrm>
+            <a:off x="6409944" y="2286000"/>
+            <a:ext cx="5212080" cy="2926080"/>
+          </a:xfrm>
+          <a:prstGeom prst="rect">
+            <a:avLst/>
+          </a:prstGeom>
+        </p:spPr>
+      </p:pic>
     </p:spTree>
   </p:cSld>
   <mc:AlternateContent xmlns:mc="http://schemas.openxmlformats.org/markup-compatibility/2006">
